--- a/MQTT Bozó Attila Péter.pptx
+++ b/MQTT Bozó Attila Péter.pptx
@@ -7,6 +7,8 @@
   <p:sldIdLst>
     <p:sldId id="256" r:id="rId2"/>
     <p:sldId id="257" r:id="rId3"/>
+    <p:sldId id="258" r:id="rId4"/>
+    <p:sldId id="259" r:id="rId5"/>
   </p:sldIdLst>
   <p:sldSz cx="12192000" cy="6858000"/>
   <p:notesSz cx="6858000" cy="9144000"/>
@@ -260,7 +262,7 @@
           <a:p>
             <a:fld id="{C1E3846D-CD3F-47E2-B16B-088B38F459EC}" type="datetimeFigureOut">
               <a:rPr lang="hu-HU" smtClean="0"/>
-              <a:t>2025. 12. 18.</a:t>
+              <a:t>2026. 01. 06.</a:t>
             </a:fld>
             <a:endParaRPr lang="hu-HU"/>
           </a:p>
@@ -458,7 +460,7 @@
           <a:p>
             <a:fld id="{C1E3846D-CD3F-47E2-B16B-088B38F459EC}" type="datetimeFigureOut">
               <a:rPr lang="hu-HU" smtClean="0"/>
-              <a:t>2025. 12. 18.</a:t>
+              <a:t>2026. 01. 06.</a:t>
             </a:fld>
             <a:endParaRPr lang="hu-HU"/>
           </a:p>
@@ -666,7 +668,7 @@
           <a:p>
             <a:fld id="{C1E3846D-CD3F-47E2-B16B-088B38F459EC}" type="datetimeFigureOut">
               <a:rPr lang="hu-HU" smtClean="0"/>
-              <a:t>2025. 12. 18.</a:t>
+              <a:t>2026. 01. 06.</a:t>
             </a:fld>
             <a:endParaRPr lang="hu-HU"/>
           </a:p>
@@ -864,7 +866,7 @@
           <a:p>
             <a:fld id="{C1E3846D-CD3F-47E2-B16B-088B38F459EC}" type="datetimeFigureOut">
               <a:rPr lang="hu-HU" smtClean="0"/>
-              <a:t>2025. 12. 18.</a:t>
+              <a:t>2026. 01. 06.</a:t>
             </a:fld>
             <a:endParaRPr lang="hu-HU"/>
           </a:p>
@@ -1139,7 +1141,7 @@
           <a:p>
             <a:fld id="{C1E3846D-CD3F-47E2-B16B-088B38F459EC}" type="datetimeFigureOut">
               <a:rPr lang="hu-HU" smtClean="0"/>
-              <a:t>2025. 12. 18.</a:t>
+              <a:t>2026. 01. 06.</a:t>
             </a:fld>
             <a:endParaRPr lang="hu-HU"/>
           </a:p>
@@ -1404,7 +1406,7 @@
           <a:p>
             <a:fld id="{C1E3846D-CD3F-47E2-B16B-088B38F459EC}" type="datetimeFigureOut">
               <a:rPr lang="hu-HU" smtClean="0"/>
-              <a:t>2025. 12. 18.</a:t>
+              <a:t>2026. 01. 06.</a:t>
             </a:fld>
             <a:endParaRPr lang="hu-HU"/>
           </a:p>
@@ -1816,7 +1818,7 @@
           <a:p>
             <a:fld id="{C1E3846D-CD3F-47E2-B16B-088B38F459EC}" type="datetimeFigureOut">
               <a:rPr lang="hu-HU" smtClean="0"/>
-              <a:t>2025. 12. 18.</a:t>
+              <a:t>2026. 01. 06.</a:t>
             </a:fld>
             <a:endParaRPr lang="hu-HU"/>
           </a:p>
@@ -1957,7 +1959,7 @@
           <a:p>
             <a:fld id="{C1E3846D-CD3F-47E2-B16B-088B38F459EC}" type="datetimeFigureOut">
               <a:rPr lang="hu-HU" smtClean="0"/>
-              <a:t>2025. 12. 18.</a:t>
+              <a:t>2026. 01. 06.</a:t>
             </a:fld>
             <a:endParaRPr lang="hu-HU"/>
           </a:p>
@@ -2070,7 +2072,7 @@
           <a:p>
             <a:fld id="{C1E3846D-CD3F-47E2-B16B-088B38F459EC}" type="datetimeFigureOut">
               <a:rPr lang="hu-HU" smtClean="0"/>
-              <a:t>2025. 12. 18.</a:t>
+              <a:t>2026. 01. 06.</a:t>
             </a:fld>
             <a:endParaRPr lang="hu-HU"/>
           </a:p>
@@ -2381,7 +2383,7 @@
           <a:p>
             <a:fld id="{C1E3846D-CD3F-47E2-B16B-088B38F459EC}" type="datetimeFigureOut">
               <a:rPr lang="hu-HU" smtClean="0"/>
-              <a:t>2025. 12. 18.</a:t>
+              <a:t>2026. 01. 06.</a:t>
             </a:fld>
             <a:endParaRPr lang="hu-HU"/>
           </a:p>
@@ -2669,7 +2671,7 @@
           <a:p>
             <a:fld id="{C1E3846D-CD3F-47E2-B16B-088B38F459EC}" type="datetimeFigureOut">
               <a:rPr lang="hu-HU" smtClean="0"/>
-              <a:t>2025. 12. 18.</a:t>
+              <a:t>2026. 01. 06.</a:t>
             </a:fld>
             <a:endParaRPr lang="hu-HU"/>
           </a:p>
@@ -2910,7 +2912,7 @@
           <a:p>
             <a:fld id="{C1E3846D-CD3F-47E2-B16B-088B38F459EC}" type="datetimeFigureOut">
               <a:rPr lang="hu-HU" smtClean="0"/>
-              <a:t>2025. 12. 18.</a:t>
+              <a:t>2026. 01. 06.</a:t>
             </a:fld>
             <a:endParaRPr lang="hu-HU"/>
           </a:p>
@@ -3445,72 +3447,6 @@
       </p:sp>
       <p:sp>
         <p:nvSpPr>
-          <p:cNvPr id="3" name="Alcím 2">
-            <a:extLst>
-              <a:ext uri="{FF2B5EF4-FFF2-40B4-BE49-F238E27FC236}">
-                <a16:creationId xmlns:a16="http://schemas.microsoft.com/office/drawing/2014/main" id="{080B6D76-FA53-4E30-98F7-3790CF55DB52}"/>
-              </a:ext>
-            </a:extLst>
-          </p:cNvPr>
-          <p:cNvSpPr>
-            <a:spLocks noGrp="1"/>
-          </p:cNvSpPr>
-          <p:nvPr>
-            <p:ph type="subTitle" idx="1"/>
-          </p:nvPr>
-        </p:nvSpPr>
-        <p:spPr>
-          <a:xfrm>
-            <a:off x="2660649" y="3429000"/>
-            <a:ext cx="6870700" cy="449262"/>
-          </a:xfrm>
-        </p:spPr>
-        <p:txBody>
-          <a:bodyPr>
-            <a:normAutofit/>
-          </a:bodyPr>
-          <a:lstStyle/>
-          <a:p>
-            <a:r>
-              <a:rPr lang="hu-HU" i="1" dirty="0">
-                <a:latin typeface="Times New Roman" panose="02020603050405020304" pitchFamily="18" charset="0"/>
-                <a:cs typeface="Times New Roman" panose="02020603050405020304" pitchFamily="18" charset="0"/>
-              </a:rPr>
-              <a:t>-Könnyű </a:t>
-            </a:r>
-            <a:r>
-              <a:rPr lang="hu-HU" i="1" dirty="0" err="1">
-                <a:latin typeface="Times New Roman" panose="02020603050405020304" pitchFamily="18" charset="0"/>
-                <a:cs typeface="Times New Roman" panose="02020603050405020304" pitchFamily="18" charset="0"/>
-              </a:rPr>
-              <a:t>üzenetkelezelő</a:t>
-            </a:r>
-            <a:r>
-              <a:rPr lang="hu-HU" i="1" dirty="0">
-                <a:latin typeface="Times New Roman" panose="02020603050405020304" pitchFamily="18" charset="0"/>
-                <a:cs typeface="Times New Roman" panose="02020603050405020304" pitchFamily="18" charset="0"/>
-              </a:rPr>
-              <a:t> protokoll </a:t>
-            </a:r>
-            <a:r>
-              <a:rPr lang="hu-HU" i="1" dirty="0" err="1">
-                <a:latin typeface="Times New Roman" panose="02020603050405020304" pitchFamily="18" charset="0"/>
-                <a:cs typeface="Times New Roman" panose="02020603050405020304" pitchFamily="18" charset="0"/>
-              </a:rPr>
-              <a:t>IoT</a:t>
-            </a:r>
-            <a:r>
-              <a:rPr lang="hu-HU" i="1" dirty="0">
-                <a:latin typeface="Times New Roman" panose="02020603050405020304" pitchFamily="18" charset="0"/>
-                <a:cs typeface="Times New Roman" panose="02020603050405020304" pitchFamily="18" charset="0"/>
-              </a:rPr>
-              <a:t> rendszerekben</a:t>
-            </a:r>
-          </a:p>
-        </p:txBody>
-      </p:sp>
-      <p:sp>
-        <p:nvSpPr>
           <p:cNvPr id="4" name="Alcím 2">
             <a:extLst>
               <a:ext uri="{FF2B5EF4-FFF2-40B4-BE49-F238E27FC236}">
@@ -3761,10 +3697,10 @@
       </p:pic>
       <p:sp>
         <p:nvSpPr>
-          <p:cNvPr id="8" name="Téglalap: lekerekített 7">
-            <a:extLst>
-              <a:ext uri="{FF2B5EF4-FFF2-40B4-BE49-F238E27FC236}">
-                <a16:creationId xmlns:a16="http://schemas.microsoft.com/office/drawing/2014/main" id="{95235D7D-B507-4C61-8F4B-A3B93EA86944}"/>
+          <p:cNvPr id="7" name="Téglalap: lekerekített 6">
+            <a:extLst>
+              <a:ext uri="{FF2B5EF4-FFF2-40B4-BE49-F238E27FC236}">
+                <a16:creationId xmlns:a16="http://schemas.microsoft.com/office/drawing/2014/main" id="{95006A8E-27E1-4F4A-8BD8-7126CE0DABB7}"/>
               </a:ext>
             </a:extLst>
           </p:cNvPr>
@@ -3773,7 +3709,7 @@
         </p:nvSpPr>
         <p:spPr>
           <a:xfrm rot="5400000">
-            <a:off x="13359663" y="1451319"/>
+            <a:off x="15042896" y="-9675"/>
             <a:ext cx="1628039" cy="6073974"/>
           </a:xfrm>
           <a:prstGeom prst="roundRect">
@@ -3814,69 +3750,6 @@
           </a:fontRef>
         </p:style>
         <p:txBody>
-          <a:bodyPr rtlCol="0" anchor="ctr"/>
-          <a:lstStyle/>
-          <a:p>
-            <a:pPr algn="ctr"/>
-            <a:endParaRPr lang="hu-HU"/>
-          </a:p>
-        </p:txBody>
-      </p:sp>
-      <p:sp>
-        <p:nvSpPr>
-          <p:cNvPr id="7" name="Téglalap: lekerekített 6">
-            <a:extLst>
-              <a:ext uri="{FF2B5EF4-FFF2-40B4-BE49-F238E27FC236}">
-                <a16:creationId xmlns:a16="http://schemas.microsoft.com/office/drawing/2014/main" id="{95006A8E-27E1-4F4A-8BD8-7126CE0DABB7}"/>
-              </a:ext>
-            </a:extLst>
-          </p:cNvPr>
-          <p:cNvSpPr/>
-          <p:nvPr/>
-        </p:nvSpPr>
-        <p:spPr>
-          <a:xfrm rot="5400000">
-            <a:off x="12830639" y="-9675"/>
-            <a:ext cx="1628039" cy="6073974"/>
-          </a:xfrm>
-          <a:prstGeom prst="roundRect">
-            <a:avLst>
-              <a:gd name="adj" fmla="val 50000"/>
-            </a:avLst>
-          </a:prstGeom>
-          <a:solidFill>
-            <a:schemeClr val="bg1"/>
-          </a:solidFill>
-          <a:ln>
-            <a:solidFill>
-              <a:schemeClr val="bg1"/>
-            </a:solidFill>
-          </a:ln>
-          <a:effectLst>
-            <a:outerShdw blurRad="50800" dist="38100" dir="2700000" algn="tl" rotWithShape="0">
-              <a:prstClr val="black">
-                <a:alpha val="40000"/>
-              </a:prstClr>
-            </a:outerShdw>
-          </a:effectLst>
-        </p:spPr>
-        <p:style>
-          <a:lnRef idx="2">
-            <a:schemeClr val="accent1">
-              <a:shade val="50000"/>
-            </a:schemeClr>
-          </a:lnRef>
-          <a:fillRef idx="1">
-            <a:schemeClr val="accent1"/>
-          </a:fillRef>
-          <a:effectRef idx="0">
-            <a:schemeClr val="accent1"/>
-          </a:effectRef>
-          <a:fontRef idx="minor">
-            <a:schemeClr val="lt1"/>
-          </a:fontRef>
-        </p:style>
-        <p:txBody>
           <a:bodyPr rot="0" spcFirstLastPara="0" vertOverflow="overflow" horzOverflow="overflow" vert="horz" wrap="square" lIns="91440" tIns="45720" rIns="91440" bIns="45720" numCol="1" spcCol="0" rtlCol="0" fromWordArt="0" anchor="ctr" anchorCtr="0" forceAA="0" compatLnSpc="1">
             <a:prstTxWarp prst="textNoShape">
               <a:avLst/>
@@ -3892,142 +3765,6 @@
       </p:sp>
       <p:sp>
         <p:nvSpPr>
-          <p:cNvPr id="5" name="Téglalap: lekerekített 4">
-            <a:extLst>
-              <a:ext uri="{FF2B5EF4-FFF2-40B4-BE49-F238E27FC236}">
-                <a16:creationId xmlns:a16="http://schemas.microsoft.com/office/drawing/2014/main" id="{B9926562-9809-4ED3-8BDC-05540A3826D3}"/>
-              </a:ext>
-            </a:extLst>
-          </p:cNvPr>
-          <p:cNvSpPr/>
-          <p:nvPr/>
-        </p:nvSpPr>
-        <p:spPr>
-          <a:xfrm rot="5400000">
-            <a:off x="12058839" y="-1317106"/>
-            <a:ext cx="1628039" cy="6073974"/>
-          </a:xfrm>
-          <a:prstGeom prst="roundRect">
-            <a:avLst>
-              <a:gd name="adj" fmla="val 50000"/>
-            </a:avLst>
-          </a:prstGeom>
-          <a:solidFill>
-            <a:schemeClr val="bg1"/>
-          </a:solidFill>
-          <a:ln>
-            <a:solidFill>
-              <a:schemeClr val="bg1"/>
-            </a:solidFill>
-          </a:ln>
-          <a:effectLst>
-            <a:outerShdw blurRad="50800" dist="38100" dir="2700000" algn="tl" rotWithShape="0">
-              <a:prstClr val="black">
-                <a:alpha val="40000"/>
-              </a:prstClr>
-            </a:outerShdw>
-          </a:effectLst>
-        </p:spPr>
-        <p:style>
-          <a:lnRef idx="2">
-            <a:schemeClr val="accent1">
-              <a:shade val="50000"/>
-            </a:schemeClr>
-          </a:lnRef>
-          <a:fillRef idx="1">
-            <a:schemeClr val="accent1"/>
-          </a:fillRef>
-          <a:effectRef idx="0">
-            <a:schemeClr val="accent1"/>
-          </a:effectRef>
-          <a:fontRef idx="minor">
-            <a:schemeClr val="lt1"/>
-          </a:fontRef>
-        </p:style>
-        <p:txBody>
-          <a:bodyPr rot="0" spcFirstLastPara="0" vertOverflow="overflow" horzOverflow="overflow" vert="horz" wrap="square" lIns="91440" tIns="45720" rIns="91440" bIns="45720" numCol="1" spcCol="0" rtlCol="0" fromWordArt="0" anchor="ctr" anchorCtr="0" forceAA="0" compatLnSpc="1">
-            <a:prstTxWarp prst="textNoShape">
-              <a:avLst/>
-            </a:prstTxWarp>
-            <a:noAutofit/>
-          </a:bodyPr>
-          <a:lstStyle/>
-          <a:p>
-            <a:pPr algn="ctr"/>
-            <a:endParaRPr lang="hu-HU" dirty="0"/>
-          </a:p>
-        </p:txBody>
-      </p:sp>
-      <p:sp>
-        <p:nvSpPr>
-          <p:cNvPr id="9" name="Téglalap: lekerekített 8">
-            <a:extLst>
-              <a:ext uri="{FF2B5EF4-FFF2-40B4-BE49-F238E27FC236}">
-                <a16:creationId xmlns:a16="http://schemas.microsoft.com/office/drawing/2014/main" id="{389040F0-4B8A-4AE3-9567-5B784F1F03F7}"/>
-              </a:ext>
-            </a:extLst>
-          </p:cNvPr>
-          <p:cNvSpPr/>
-          <p:nvPr/>
-        </p:nvSpPr>
-        <p:spPr>
-          <a:xfrm rot="5400000">
-            <a:off x="11716248" y="-2741170"/>
-            <a:ext cx="1628039" cy="6073974"/>
-          </a:xfrm>
-          <a:prstGeom prst="roundRect">
-            <a:avLst>
-              <a:gd name="adj" fmla="val 50000"/>
-            </a:avLst>
-          </a:prstGeom>
-          <a:solidFill>
-            <a:schemeClr val="bg1"/>
-          </a:solidFill>
-          <a:ln>
-            <a:solidFill>
-              <a:schemeClr val="bg1"/>
-            </a:solidFill>
-          </a:ln>
-          <a:effectLst>
-            <a:outerShdw blurRad="50800" dist="38100" dir="2700000" algn="tl" rotWithShape="0">
-              <a:prstClr val="black">
-                <a:alpha val="40000"/>
-              </a:prstClr>
-            </a:outerShdw>
-          </a:effectLst>
-        </p:spPr>
-        <p:style>
-          <a:lnRef idx="2">
-            <a:schemeClr val="accent1">
-              <a:shade val="50000"/>
-            </a:schemeClr>
-          </a:lnRef>
-          <a:fillRef idx="1">
-            <a:schemeClr val="accent1"/>
-          </a:fillRef>
-          <a:effectRef idx="0">
-            <a:schemeClr val="accent1"/>
-          </a:effectRef>
-          <a:fontRef idx="minor">
-            <a:schemeClr val="lt1"/>
-          </a:fontRef>
-        </p:style>
-        <p:txBody>
-          <a:bodyPr rot="0" spcFirstLastPara="0" vertOverflow="overflow" horzOverflow="overflow" vert="horz" wrap="square" lIns="91440" tIns="45720" rIns="91440" bIns="45720" numCol="1" spcCol="0" rtlCol="0" fromWordArt="0" anchor="ctr" anchorCtr="0" forceAA="0" compatLnSpc="1">
-            <a:prstTxWarp prst="textNoShape">
-              <a:avLst/>
-            </a:prstTxWarp>
-            <a:noAutofit/>
-          </a:bodyPr>
-          <a:lstStyle/>
-          <a:p>
-            <a:pPr algn="ctr"/>
-            <a:endParaRPr lang="hu-HU"/>
-          </a:p>
-        </p:txBody>
-      </p:sp>
-      <p:sp>
-        <p:nvSpPr>
           <p:cNvPr id="10" name="Alcím 2">
             <a:extLst>
               <a:ext uri="{FF2B5EF4-FFF2-40B4-BE49-F238E27FC236}">
@@ -4042,7 +3779,7 @@
         </p:nvSpPr>
         <p:spPr>
           <a:xfrm>
-            <a:off x="11986532" y="2673825"/>
+            <a:off x="14198789" y="2673825"/>
             <a:ext cx="3981454" cy="674702"/>
           </a:xfrm>
           <a:prstGeom prst="rect">
@@ -4259,7 +3996,7 @@
         </p:blipFill>
         <p:spPr>
           <a:xfrm>
-            <a:off x="15722238" y="3484074"/>
+            <a:off x="11277600" y="7525132"/>
             <a:ext cx="914400" cy="914400"/>
           </a:xfrm>
           <a:prstGeom prst="rect">
@@ -4302,7 +4039,7 @@
         </p:blipFill>
         <p:spPr>
           <a:xfrm>
-            <a:off x="15649573" y="1750642"/>
+            <a:off x="11298973" y="-1552996"/>
             <a:ext cx="893027" cy="893027"/>
           </a:xfrm>
           <a:prstGeom prst="rect">
@@ -4317,6 +4054,84 @@
           </a:effectLst>
         </p:spPr>
       </p:pic>
+      <p:pic>
+        <p:nvPicPr>
+          <p:cNvPr id="14" name="Ábra 13" descr="Boríték">
+            <a:extLst>
+              <a:ext uri="{FF2B5EF4-FFF2-40B4-BE49-F238E27FC236}">
+                <a16:creationId xmlns:a16="http://schemas.microsoft.com/office/drawing/2014/main" id="{FB7454B2-2E3B-4483-9947-83B3BCF9F4B8}"/>
+              </a:ext>
+            </a:extLst>
+          </p:cNvPr>
+          <p:cNvPicPr>
+            <a:picLocks noChangeAspect="1"/>
+          </p:cNvPicPr>
+          <p:nvPr/>
+        </p:nvPicPr>
+        <p:blipFill>
+          <a:blip r:embed="rId7">
+            <a:extLst>
+              <a:ext uri="{28A0092B-C50C-407E-A947-70E740481C1C}">
+                <a14:useLocalDpi xmlns:a14="http://schemas.microsoft.com/office/drawing/2010/main" val="0"/>
+              </a:ext>
+              <a:ext uri="{96DAC541-7B7A-43D3-8B79-37D633B846F1}">
+                <asvg:svgBlip xmlns:asvg="http://schemas.microsoft.com/office/drawing/2016/SVG/main" r:embed="rId8"/>
+              </a:ext>
+            </a:extLst>
+          </a:blip>
+          <a:stretch>
+            <a:fillRect/>
+          </a:stretch>
+        </p:blipFill>
+        <p:spPr>
+          <a:xfrm>
+            <a:off x="1168399" y="-1117169"/>
+            <a:ext cx="914400" cy="914400"/>
+          </a:xfrm>
+          <a:prstGeom prst="rect">
+            <a:avLst/>
+          </a:prstGeom>
+        </p:spPr>
+      </p:pic>
+      <p:pic>
+        <p:nvPicPr>
+          <p:cNvPr id="16" name="Ábra 15" descr="Küldés">
+            <a:extLst>
+              <a:ext uri="{FF2B5EF4-FFF2-40B4-BE49-F238E27FC236}">
+                <a16:creationId xmlns:a16="http://schemas.microsoft.com/office/drawing/2014/main" id="{41B89D27-C4BB-4821-AE0C-DC187EBD2712}"/>
+              </a:ext>
+            </a:extLst>
+          </p:cNvPr>
+          <p:cNvPicPr>
+            <a:picLocks noChangeAspect="1"/>
+          </p:cNvPicPr>
+          <p:nvPr/>
+        </p:nvPicPr>
+        <p:blipFill>
+          <a:blip r:embed="rId9">
+            <a:extLst>
+              <a:ext uri="{28A0092B-C50C-407E-A947-70E740481C1C}">
+                <a14:useLocalDpi xmlns:a14="http://schemas.microsoft.com/office/drawing/2010/main" val="0"/>
+              </a:ext>
+              <a:ext uri="{96DAC541-7B7A-43D3-8B79-37D633B846F1}">
+                <asvg:svgBlip xmlns:asvg="http://schemas.microsoft.com/office/drawing/2016/SVG/main" r:embed="rId10"/>
+              </a:ext>
+            </a:extLst>
+          </a:blip>
+          <a:stretch>
+            <a:fillRect/>
+          </a:stretch>
+        </p:blipFill>
+        <p:spPr>
+          <a:xfrm>
+            <a:off x="2363428" y="7525132"/>
+            <a:ext cx="914400" cy="914400"/>
+          </a:xfrm>
+          <a:prstGeom prst="rect">
+            <a:avLst/>
+          </a:prstGeom>
+        </p:spPr>
+      </p:pic>
     </p:spTree>
     <p:extLst>
       <p:ext uri="{BB962C8B-B14F-4D97-AF65-F5344CB8AC3E}">
@@ -4327,13 +4142,13 @@
   <p:clrMapOvr>
     <a:masterClrMapping/>
   </p:clrMapOvr>
-  <mc:AlternateContent xmlns:mc="http://schemas.openxmlformats.org/markup-compatibility/2006">
-    <mc:Choice xmlns:p159="http://schemas.microsoft.com/office/powerpoint/2015/09/main" Requires="p159">
+  <mc:AlternateContent xmlns:mc="http://schemas.openxmlformats.org/markup-compatibility/2006" xmlns:p159="http://schemas.microsoft.com/office/powerpoint/2015/09/main">
+    <mc:Choice Requires="p159">
       <p:transition xmlns:p14="http://schemas.microsoft.com/office/powerpoint/2010/main" spd="slow" p14:dur="2000">
         <p159:morph option="byObject"/>
       </p:transition>
     </mc:Choice>
-    <mc:Fallback>
+    <mc:Fallback xmlns="">
       <p:transition spd="slow">
         <p:fade/>
       </p:transition>
@@ -4477,72 +4292,6 @@
       </p:sp>
       <p:sp>
         <p:nvSpPr>
-          <p:cNvPr id="3" name="Alcím 2">
-            <a:extLst>
-              <a:ext uri="{FF2B5EF4-FFF2-40B4-BE49-F238E27FC236}">
-                <a16:creationId xmlns:a16="http://schemas.microsoft.com/office/drawing/2014/main" id="{080B6D76-FA53-4E30-98F7-3790CF55DB52}"/>
-              </a:ext>
-            </a:extLst>
-          </p:cNvPr>
-          <p:cNvSpPr>
-            <a:spLocks noGrp="1"/>
-          </p:cNvSpPr>
-          <p:nvPr>
-            <p:ph type="subTitle" idx="1"/>
-          </p:nvPr>
-        </p:nvSpPr>
-        <p:spPr>
-          <a:xfrm>
-            <a:off x="13658849" y="3429000"/>
-            <a:ext cx="6870700" cy="449262"/>
-          </a:xfrm>
-        </p:spPr>
-        <p:txBody>
-          <a:bodyPr>
-            <a:normAutofit/>
-          </a:bodyPr>
-          <a:lstStyle/>
-          <a:p>
-            <a:r>
-              <a:rPr lang="hu-HU" i="1" dirty="0">
-                <a:latin typeface="Times New Roman" panose="02020603050405020304" pitchFamily="18" charset="0"/>
-                <a:cs typeface="Times New Roman" panose="02020603050405020304" pitchFamily="18" charset="0"/>
-              </a:rPr>
-              <a:t>-Könnyű </a:t>
-            </a:r>
-            <a:r>
-              <a:rPr lang="hu-HU" i="1" dirty="0" err="1">
-                <a:latin typeface="Times New Roman" panose="02020603050405020304" pitchFamily="18" charset="0"/>
-                <a:cs typeface="Times New Roman" panose="02020603050405020304" pitchFamily="18" charset="0"/>
-              </a:rPr>
-              <a:t>üzenetkelezelő</a:t>
-            </a:r>
-            <a:r>
-              <a:rPr lang="hu-HU" i="1" dirty="0">
-                <a:latin typeface="Times New Roman" panose="02020603050405020304" pitchFamily="18" charset="0"/>
-                <a:cs typeface="Times New Roman" panose="02020603050405020304" pitchFamily="18" charset="0"/>
-              </a:rPr>
-              <a:t> protokoll </a:t>
-            </a:r>
-            <a:r>
-              <a:rPr lang="hu-HU" i="1" dirty="0" err="1">
-                <a:latin typeface="Times New Roman" panose="02020603050405020304" pitchFamily="18" charset="0"/>
-                <a:cs typeface="Times New Roman" panose="02020603050405020304" pitchFamily="18" charset="0"/>
-              </a:rPr>
-              <a:t>IoT</a:t>
-            </a:r>
-            <a:r>
-              <a:rPr lang="hu-HU" i="1" dirty="0">
-                <a:latin typeface="Times New Roman" panose="02020603050405020304" pitchFamily="18" charset="0"/>
-                <a:cs typeface="Times New Roman" panose="02020603050405020304" pitchFamily="18" charset="0"/>
-              </a:rPr>
-              <a:t> rendszerekben</a:t>
-            </a:r>
-          </a:p>
-        </p:txBody>
-      </p:sp>
-      <p:sp>
-        <p:nvSpPr>
           <p:cNvPr id="4" name="Alcím 2">
             <a:extLst>
               <a:ext uri="{FF2B5EF4-FFF2-40B4-BE49-F238E27FC236}">
@@ -4791,69 +4540,6 @@
           </a:prstGeom>
         </p:spPr>
       </p:pic>
-      <p:sp>
-        <p:nvSpPr>
-          <p:cNvPr id="7" name="Téglalap: lekerekített 6">
-            <a:extLst>
-              <a:ext uri="{FF2B5EF4-FFF2-40B4-BE49-F238E27FC236}">
-                <a16:creationId xmlns:a16="http://schemas.microsoft.com/office/drawing/2014/main" id="{DB5D317E-BA06-4173-AF25-2A9A7892CB01}"/>
-              </a:ext>
-            </a:extLst>
-          </p:cNvPr>
-          <p:cNvSpPr/>
-          <p:nvPr/>
-        </p:nvSpPr>
-        <p:spPr>
-          <a:xfrm rot="5400000">
-            <a:off x="13359663" y="1451319"/>
-            <a:ext cx="1628039" cy="6073974"/>
-          </a:xfrm>
-          <a:prstGeom prst="roundRect">
-            <a:avLst>
-              <a:gd name="adj" fmla="val 50000"/>
-            </a:avLst>
-          </a:prstGeom>
-          <a:solidFill>
-            <a:schemeClr val="bg1"/>
-          </a:solidFill>
-          <a:ln>
-            <a:solidFill>
-              <a:schemeClr val="bg1"/>
-            </a:solidFill>
-          </a:ln>
-          <a:effectLst>
-            <a:outerShdw blurRad="50800" dist="38100" dir="2700000" algn="tl" rotWithShape="0">
-              <a:prstClr val="black">
-                <a:alpha val="40000"/>
-              </a:prstClr>
-            </a:outerShdw>
-          </a:effectLst>
-        </p:spPr>
-        <p:style>
-          <a:lnRef idx="2">
-            <a:schemeClr val="accent1">
-              <a:shade val="50000"/>
-            </a:schemeClr>
-          </a:lnRef>
-          <a:fillRef idx="1">
-            <a:schemeClr val="accent1"/>
-          </a:fillRef>
-          <a:effectRef idx="0">
-            <a:schemeClr val="accent1"/>
-          </a:effectRef>
-          <a:fontRef idx="minor">
-            <a:schemeClr val="lt1"/>
-          </a:fontRef>
-        </p:style>
-        <p:txBody>
-          <a:bodyPr rtlCol="0" anchor="ctr"/>
-          <a:lstStyle/>
-          <a:p>
-            <a:pPr algn="ctr"/>
-            <a:endParaRPr lang="hu-HU"/>
-          </a:p>
-        </p:txBody>
-      </p:sp>
       <p:sp>
         <p:nvSpPr>
           <p:cNvPr id="8" name="Téglalap: lekerekített 7">
@@ -4943,10 +4629,892 @@
       </p:sp>
       <p:sp>
         <p:nvSpPr>
-          <p:cNvPr id="9" name="Téglalap: lekerekített 8">
-            <a:extLst>
-              <a:ext uri="{FF2B5EF4-FFF2-40B4-BE49-F238E27FC236}">
-                <a16:creationId xmlns:a16="http://schemas.microsoft.com/office/drawing/2014/main" id="{4E6BE01A-DAE9-4E36-8CEC-4B2CE43D68B9}"/>
+          <p:cNvPr id="11" name="Alcím 2">
+            <a:extLst>
+              <a:ext uri="{FF2B5EF4-FFF2-40B4-BE49-F238E27FC236}">
+                <a16:creationId xmlns:a16="http://schemas.microsoft.com/office/drawing/2014/main" id="{E7B5FF37-1DA2-4F3B-8D38-BC99AEF9F7ED}"/>
+              </a:ext>
+            </a:extLst>
+          </p:cNvPr>
+          <p:cNvSpPr txBox="1">
+            <a:spLocks/>
+          </p:cNvSpPr>
+          <p:nvPr/>
+        </p:nvSpPr>
+        <p:spPr>
+          <a:xfrm>
+            <a:off x="4105269" y="2673825"/>
+            <a:ext cx="3981454" cy="674702"/>
+          </a:xfrm>
+          <a:prstGeom prst="rect">
+            <a:avLst/>
+          </a:prstGeom>
+        </p:spPr>
+        <p:txBody>
+          <a:bodyPr vert="horz" lIns="91440" tIns="45720" rIns="91440" bIns="45720" rtlCol="0">
+            <a:normAutofit lnSpcReduction="10000"/>
+          </a:bodyPr>
+          <a:lstStyle>
+            <a:lvl1pPr marL="0" indent="0" algn="ctr" defTabSz="914400" rtl="0" eaLnBrk="1" latinLnBrk="0" hangingPunct="1">
+              <a:lnSpc>
+                <a:spcPct val="90000"/>
+              </a:lnSpc>
+              <a:spcBef>
+                <a:spcPts val="1000"/>
+              </a:spcBef>
+              <a:buFont typeface="Arial" panose="020B0604020202020204" pitchFamily="34" charset="0"/>
+              <a:buNone/>
+              <a:defRPr sz="2400" kern="1200">
+                <a:solidFill>
+                  <a:schemeClr val="tx1"/>
+                </a:solidFill>
+                <a:latin typeface="+mn-lt"/>
+                <a:ea typeface="+mn-ea"/>
+                <a:cs typeface="+mn-cs"/>
+              </a:defRPr>
+            </a:lvl1pPr>
+            <a:lvl2pPr marL="457200" indent="0" algn="ctr" defTabSz="914400" rtl="0" eaLnBrk="1" latinLnBrk="0" hangingPunct="1">
+              <a:lnSpc>
+                <a:spcPct val="90000"/>
+              </a:lnSpc>
+              <a:spcBef>
+                <a:spcPts val="500"/>
+              </a:spcBef>
+              <a:buFont typeface="Arial" panose="020B0604020202020204" pitchFamily="34" charset="0"/>
+              <a:buNone/>
+              <a:defRPr sz="2000" kern="1200">
+                <a:solidFill>
+                  <a:schemeClr val="tx1"/>
+                </a:solidFill>
+                <a:latin typeface="+mn-lt"/>
+                <a:ea typeface="+mn-ea"/>
+                <a:cs typeface="+mn-cs"/>
+              </a:defRPr>
+            </a:lvl2pPr>
+            <a:lvl3pPr marL="914400" indent="0" algn="ctr" defTabSz="914400" rtl="0" eaLnBrk="1" latinLnBrk="0" hangingPunct="1">
+              <a:lnSpc>
+                <a:spcPct val="90000"/>
+              </a:lnSpc>
+              <a:spcBef>
+                <a:spcPts val="500"/>
+              </a:spcBef>
+              <a:buFont typeface="Arial" panose="020B0604020202020204" pitchFamily="34" charset="0"/>
+              <a:buNone/>
+              <a:defRPr sz="1800" kern="1200">
+                <a:solidFill>
+                  <a:schemeClr val="tx1"/>
+                </a:solidFill>
+                <a:latin typeface="+mn-lt"/>
+                <a:ea typeface="+mn-ea"/>
+                <a:cs typeface="+mn-cs"/>
+              </a:defRPr>
+            </a:lvl3pPr>
+            <a:lvl4pPr marL="1371600" indent="0" algn="ctr" defTabSz="914400" rtl="0" eaLnBrk="1" latinLnBrk="0" hangingPunct="1">
+              <a:lnSpc>
+                <a:spcPct val="90000"/>
+              </a:lnSpc>
+              <a:spcBef>
+                <a:spcPts val="500"/>
+              </a:spcBef>
+              <a:buFont typeface="Arial" panose="020B0604020202020204" pitchFamily="34" charset="0"/>
+              <a:buNone/>
+              <a:defRPr sz="1600" kern="1200">
+                <a:solidFill>
+                  <a:schemeClr val="tx1"/>
+                </a:solidFill>
+                <a:latin typeface="+mn-lt"/>
+                <a:ea typeface="+mn-ea"/>
+                <a:cs typeface="+mn-cs"/>
+              </a:defRPr>
+            </a:lvl4pPr>
+            <a:lvl5pPr marL="1828800" indent="0" algn="ctr" defTabSz="914400" rtl="0" eaLnBrk="1" latinLnBrk="0" hangingPunct="1">
+              <a:lnSpc>
+                <a:spcPct val="90000"/>
+              </a:lnSpc>
+              <a:spcBef>
+                <a:spcPts val="500"/>
+              </a:spcBef>
+              <a:buFont typeface="Arial" panose="020B0604020202020204" pitchFamily="34" charset="0"/>
+              <a:buNone/>
+              <a:defRPr sz="1600" kern="1200">
+                <a:solidFill>
+                  <a:schemeClr val="tx1"/>
+                </a:solidFill>
+                <a:latin typeface="+mn-lt"/>
+                <a:ea typeface="+mn-ea"/>
+                <a:cs typeface="+mn-cs"/>
+              </a:defRPr>
+            </a:lvl5pPr>
+            <a:lvl6pPr marL="2286000" indent="0" algn="ctr" defTabSz="914400" rtl="0" eaLnBrk="1" latinLnBrk="0" hangingPunct="1">
+              <a:lnSpc>
+                <a:spcPct val="90000"/>
+              </a:lnSpc>
+              <a:spcBef>
+                <a:spcPts val="500"/>
+              </a:spcBef>
+              <a:buFont typeface="Arial" panose="020B0604020202020204" pitchFamily="34" charset="0"/>
+              <a:buNone/>
+              <a:defRPr sz="1600" kern="1200">
+                <a:solidFill>
+                  <a:schemeClr val="tx1"/>
+                </a:solidFill>
+                <a:latin typeface="+mn-lt"/>
+                <a:ea typeface="+mn-ea"/>
+                <a:cs typeface="+mn-cs"/>
+              </a:defRPr>
+            </a:lvl6pPr>
+            <a:lvl7pPr marL="2743200" indent="0" algn="ctr" defTabSz="914400" rtl="0" eaLnBrk="1" latinLnBrk="0" hangingPunct="1">
+              <a:lnSpc>
+                <a:spcPct val="90000"/>
+              </a:lnSpc>
+              <a:spcBef>
+                <a:spcPts val="500"/>
+              </a:spcBef>
+              <a:buFont typeface="Arial" panose="020B0604020202020204" pitchFamily="34" charset="0"/>
+              <a:buNone/>
+              <a:defRPr sz="1600" kern="1200">
+                <a:solidFill>
+                  <a:schemeClr val="tx1"/>
+                </a:solidFill>
+                <a:latin typeface="+mn-lt"/>
+                <a:ea typeface="+mn-ea"/>
+                <a:cs typeface="+mn-cs"/>
+              </a:defRPr>
+            </a:lvl7pPr>
+            <a:lvl8pPr marL="3200400" indent="0" algn="ctr" defTabSz="914400" rtl="0" eaLnBrk="1" latinLnBrk="0" hangingPunct="1">
+              <a:lnSpc>
+                <a:spcPct val="90000"/>
+              </a:lnSpc>
+              <a:spcBef>
+                <a:spcPts val="500"/>
+              </a:spcBef>
+              <a:buFont typeface="Arial" panose="020B0604020202020204" pitchFamily="34" charset="0"/>
+              <a:buNone/>
+              <a:defRPr sz="1600" kern="1200">
+                <a:solidFill>
+                  <a:schemeClr val="tx1"/>
+                </a:solidFill>
+                <a:latin typeface="+mn-lt"/>
+                <a:ea typeface="+mn-ea"/>
+                <a:cs typeface="+mn-cs"/>
+              </a:defRPr>
+            </a:lvl8pPr>
+            <a:lvl9pPr marL="3657600" indent="0" algn="ctr" defTabSz="914400" rtl="0" eaLnBrk="1" latinLnBrk="0" hangingPunct="1">
+              <a:lnSpc>
+                <a:spcPct val="90000"/>
+              </a:lnSpc>
+              <a:spcBef>
+                <a:spcPts val="500"/>
+              </a:spcBef>
+              <a:buFont typeface="Arial" panose="020B0604020202020204" pitchFamily="34" charset="0"/>
+              <a:buNone/>
+              <a:defRPr sz="1600" kern="1200">
+                <a:solidFill>
+                  <a:schemeClr val="tx1"/>
+                </a:solidFill>
+                <a:latin typeface="+mn-lt"/>
+                <a:ea typeface="+mn-ea"/>
+                <a:cs typeface="+mn-cs"/>
+              </a:defRPr>
+            </a:lvl9pPr>
+          </a:lstStyle>
+          <a:p>
+            <a:r>
+              <a:rPr lang="hu-HU" sz="4400" b="1" dirty="0">
+                <a:latin typeface="Times New Roman" panose="02020603050405020304" pitchFamily="18" charset="0"/>
+                <a:cs typeface="Times New Roman" panose="02020603050405020304" pitchFamily="18" charset="0"/>
+              </a:rPr>
+              <a:t>Mi az MQTT?</a:t>
+            </a:r>
+          </a:p>
+        </p:txBody>
+      </p:sp>
+      <p:pic>
+        <p:nvPicPr>
+          <p:cNvPr id="12" name="Ábra 11" descr="Feliratok">
+            <a:extLst>
+              <a:ext uri="{FF2B5EF4-FFF2-40B4-BE49-F238E27FC236}">
+                <a16:creationId xmlns:a16="http://schemas.microsoft.com/office/drawing/2014/main" id="{A2D3CB12-A4E1-4E59-8BCD-F320328BB333}"/>
+              </a:ext>
+            </a:extLst>
+          </p:cNvPr>
+          <p:cNvPicPr>
+            <a:picLocks noChangeAspect="1"/>
+          </p:cNvPicPr>
+          <p:nvPr/>
+        </p:nvPicPr>
+        <p:blipFill>
+          <a:blip r:embed="rId4">
+            <a:extLst>
+              <a:ext uri="{28A0092B-C50C-407E-A947-70E740481C1C}">
+                <a14:useLocalDpi xmlns:a14="http://schemas.microsoft.com/office/drawing/2010/main" val="0"/>
+              </a:ext>
+              <a:ext uri="{96DAC541-7B7A-43D3-8B79-37D633B846F1}">
+                <asvg:svgBlip xmlns:asvg="http://schemas.microsoft.com/office/drawing/2016/SVG/main" r:embed="rId5"/>
+              </a:ext>
+            </a:extLst>
+          </a:blip>
+          <a:stretch>
+            <a:fillRect/>
+          </a:stretch>
+        </p:blipFill>
+        <p:spPr>
+          <a:xfrm>
+            <a:off x="7392270" y="3330792"/>
+            <a:ext cx="2196523" cy="2196523"/>
+          </a:xfrm>
+          <a:prstGeom prst="rect">
+            <a:avLst/>
+          </a:prstGeom>
+          <a:effectLst>
+            <a:outerShdw blurRad="50800" dist="38100" dir="2700000" algn="tl" rotWithShape="0">
+              <a:prstClr val="black">
+                <a:alpha val="40000"/>
+              </a:prstClr>
+            </a:outerShdw>
+          </a:effectLst>
+        </p:spPr>
+      </p:pic>
+      <p:pic>
+        <p:nvPicPr>
+          <p:cNvPr id="14" name="Kép 13">
+            <a:extLst>
+              <a:ext uri="{FF2B5EF4-FFF2-40B4-BE49-F238E27FC236}">
+                <a16:creationId xmlns:a16="http://schemas.microsoft.com/office/drawing/2014/main" id="{4DF4B949-BA0F-4DCC-9A89-2DED77730486}"/>
+              </a:ext>
+            </a:extLst>
+          </p:cNvPr>
+          <p:cNvPicPr>
+            <a:picLocks noChangeAspect="1"/>
+          </p:cNvPicPr>
+          <p:nvPr/>
+        </p:nvPicPr>
+        <p:blipFill>
+          <a:blip r:embed="rId6">
+            <a:extLst>
+              <a:ext uri="{28A0092B-C50C-407E-A947-70E740481C1C}">
+                <a14:useLocalDpi xmlns:a14="http://schemas.microsoft.com/office/drawing/2010/main" val="0"/>
+              </a:ext>
+            </a:extLst>
+          </a:blip>
+          <a:stretch>
+            <a:fillRect/>
+          </a:stretch>
+        </p:blipFill>
+        <p:spPr>
+          <a:xfrm>
+            <a:off x="8416563" y="1144797"/>
+            <a:ext cx="1628040" cy="1628040"/>
+          </a:xfrm>
+          <a:prstGeom prst="rect">
+            <a:avLst/>
+          </a:prstGeom>
+          <a:effectLst>
+            <a:outerShdw blurRad="50800" dist="38100" dir="2700000" algn="tl" rotWithShape="0">
+              <a:prstClr val="black">
+                <a:alpha val="40000"/>
+              </a:prstClr>
+            </a:outerShdw>
+          </a:effectLst>
+        </p:spPr>
+      </p:pic>
+      <p:pic>
+        <p:nvPicPr>
+          <p:cNvPr id="15" name="Ábra 14" descr="Boríték">
+            <a:extLst>
+              <a:ext uri="{FF2B5EF4-FFF2-40B4-BE49-F238E27FC236}">
+                <a16:creationId xmlns:a16="http://schemas.microsoft.com/office/drawing/2014/main" id="{10373AD0-0DED-400A-9454-A7C34FB0F172}"/>
+              </a:ext>
+            </a:extLst>
+          </p:cNvPr>
+          <p:cNvPicPr>
+            <a:picLocks noChangeAspect="1"/>
+          </p:cNvPicPr>
+          <p:nvPr/>
+        </p:nvPicPr>
+        <p:blipFill>
+          <a:blip r:embed="rId7">
+            <a:extLst>
+              <a:ext uri="{28A0092B-C50C-407E-A947-70E740481C1C}">
+                <a14:useLocalDpi xmlns:a14="http://schemas.microsoft.com/office/drawing/2010/main" val="0"/>
+              </a:ext>
+              <a:ext uri="{96DAC541-7B7A-43D3-8B79-37D633B846F1}">
+                <asvg:svgBlip xmlns:asvg="http://schemas.microsoft.com/office/drawing/2016/SVG/main" r:embed="rId8"/>
+              </a:ext>
+            </a:extLst>
+          </a:blip>
+          <a:stretch>
+            <a:fillRect/>
+          </a:stretch>
+        </p:blipFill>
+        <p:spPr>
+          <a:xfrm rot="1120505">
+            <a:off x="1025035" y="563832"/>
+            <a:ext cx="2360840" cy="1960117"/>
+          </a:xfrm>
+          <a:prstGeom prst="rect">
+            <a:avLst/>
+          </a:prstGeom>
+        </p:spPr>
+      </p:pic>
+      <p:pic>
+        <p:nvPicPr>
+          <p:cNvPr id="16" name="Ábra 15" descr="Küldés">
+            <a:extLst>
+              <a:ext uri="{FF2B5EF4-FFF2-40B4-BE49-F238E27FC236}">
+                <a16:creationId xmlns:a16="http://schemas.microsoft.com/office/drawing/2014/main" id="{967DE48E-BD2E-48F2-A52A-B0DE3B8299DB}"/>
+              </a:ext>
+            </a:extLst>
+          </p:cNvPr>
+          <p:cNvPicPr>
+            <a:picLocks noChangeAspect="1"/>
+          </p:cNvPicPr>
+          <p:nvPr/>
+        </p:nvPicPr>
+        <p:blipFill>
+          <a:blip r:embed="rId9">
+            <a:extLst>
+              <a:ext uri="{28A0092B-C50C-407E-A947-70E740481C1C}">
+                <a14:useLocalDpi xmlns:a14="http://schemas.microsoft.com/office/drawing/2010/main" val="0"/>
+              </a:ext>
+              <a:ext uri="{96DAC541-7B7A-43D3-8B79-37D633B846F1}">
+                <asvg:svgBlip xmlns:asvg="http://schemas.microsoft.com/office/drawing/2016/SVG/main" r:embed="rId10"/>
+              </a:ext>
+            </a:extLst>
+          </a:blip>
+          <a:stretch>
+            <a:fillRect/>
+          </a:stretch>
+        </p:blipFill>
+        <p:spPr>
+          <a:xfrm rot="21103744">
+            <a:off x="1592214" y="3145766"/>
+            <a:ext cx="2021972" cy="2021972"/>
+          </a:xfrm>
+          <a:prstGeom prst="rect">
+            <a:avLst/>
+          </a:prstGeom>
+        </p:spPr>
+      </p:pic>
+      <p:pic>
+        <p:nvPicPr>
+          <p:cNvPr id="17" name="Ábra 16" descr="Összezavarodott személy">
+            <a:extLst>
+              <a:ext uri="{FF2B5EF4-FFF2-40B4-BE49-F238E27FC236}">
+                <a16:creationId xmlns:a16="http://schemas.microsoft.com/office/drawing/2014/main" id="{5B15AC18-E306-47B8-BCF0-29667C6A7CD8}"/>
+              </a:ext>
+            </a:extLst>
+          </p:cNvPr>
+          <p:cNvPicPr>
+            <a:picLocks noChangeAspect="1"/>
+          </p:cNvPicPr>
+          <p:nvPr/>
+        </p:nvPicPr>
+        <p:blipFill>
+          <a:blip r:embed="rId11">
+            <a:extLst>
+              <a:ext uri="{28A0092B-C50C-407E-A947-70E740481C1C}">
+                <a14:useLocalDpi xmlns:a14="http://schemas.microsoft.com/office/drawing/2010/main" val="0"/>
+              </a:ext>
+              <a:ext uri="{96DAC541-7B7A-43D3-8B79-37D633B846F1}">
+                <asvg:svgBlip xmlns:asvg="http://schemas.microsoft.com/office/drawing/2016/SVG/main" r:embed="rId12"/>
+              </a:ext>
+            </a:extLst>
+          </a:blip>
+          <a:stretch>
+            <a:fillRect/>
+          </a:stretch>
+        </p:blipFill>
+        <p:spPr>
+          <a:xfrm rot="19615665">
+            <a:off x="-1387768" y="6900255"/>
+            <a:ext cx="5242747" cy="3352683"/>
+          </a:xfrm>
+          <a:prstGeom prst="rect">
+            <a:avLst/>
+          </a:prstGeom>
+        </p:spPr>
+      </p:pic>
+    </p:spTree>
+    <p:extLst>
+      <p:ext uri="{BB962C8B-B14F-4D97-AF65-F5344CB8AC3E}">
+        <p14:creationId xmlns:p14="http://schemas.microsoft.com/office/powerpoint/2010/main" val="1063436869"/>
+      </p:ext>
+    </p:extLst>
+  </p:cSld>
+  <p:clrMapOvr>
+    <a:masterClrMapping/>
+  </p:clrMapOvr>
+  <mc:AlternateContent xmlns:mc="http://schemas.openxmlformats.org/markup-compatibility/2006" xmlns:p159="http://schemas.microsoft.com/office/powerpoint/2015/09/main">
+    <mc:Choice Requires="p159">
+      <p:transition xmlns:p14="http://schemas.microsoft.com/office/powerpoint/2010/main" spd="slow" p14:dur="2000">
+        <p159:morph option="byObject"/>
+      </p:transition>
+    </mc:Choice>
+    <mc:Fallback xmlns="">
+      <p:transition spd="slow">
+        <p:fade/>
+      </p:transition>
+    </mc:Fallback>
+  </mc:AlternateContent>
+</p:sld>
+</file>
+
+<file path=ppt/slides/slide3.xml><?xml version="1.0" encoding="utf-8"?>
+<p:sld xmlns:a="http://schemas.openxmlformats.org/drawingml/2006/main" xmlns:r="http://schemas.openxmlformats.org/officeDocument/2006/relationships" xmlns:p="http://schemas.openxmlformats.org/presentationml/2006/main">
+  <p:cSld>
+    <p:bg>
+      <p:bgPr>
+        <a:gradFill flip="none" rotWithShape="1">
+          <a:gsLst>
+            <a:gs pos="0">
+              <a:schemeClr val="bg2">
+                <a:lumMod val="90000"/>
+              </a:schemeClr>
+            </a:gs>
+            <a:gs pos="45000">
+              <a:schemeClr val="bg1">
+                <a:lumMod val="65000"/>
+              </a:schemeClr>
+            </a:gs>
+            <a:gs pos="100000">
+              <a:schemeClr val="bg2">
+                <a:lumMod val="10000"/>
+              </a:schemeClr>
+            </a:gs>
+          </a:gsLst>
+          <a:lin ang="5400000" scaled="1"/>
+          <a:tileRect/>
+        </a:gradFill>
+        <a:effectLst/>
+      </p:bgPr>
+    </p:bg>
+    <p:spTree>
+      <p:nvGrpSpPr>
+        <p:cNvPr id="1" name=""/>
+        <p:cNvGrpSpPr/>
+        <p:nvPr/>
+      </p:nvGrpSpPr>
+      <p:grpSpPr>
+        <a:xfrm>
+          <a:off x="0" y="0"/>
+          <a:ext cx="0" cy="0"/>
+          <a:chOff x="0" y="0"/>
+          <a:chExt cx="0" cy="0"/>
+        </a:xfrm>
+      </p:grpSpPr>
+      <p:sp>
+        <p:nvSpPr>
+          <p:cNvPr id="2" name="Cím 1">
+            <a:extLst>
+              <a:ext uri="{FF2B5EF4-FFF2-40B4-BE49-F238E27FC236}">
+                <a16:creationId xmlns:a16="http://schemas.microsoft.com/office/drawing/2014/main" id="{B2A63552-8D4C-456B-AB6E-2B42D66B77F3}"/>
+              </a:ext>
+            </a:extLst>
+          </p:cNvPr>
+          <p:cNvSpPr>
+            <a:spLocks noGrp="1"/>
+          </p:cNvSpPr>
+          <p:nvPr>
+            <p:ph type="ctrTitle"/>
+          </p:nvPr>
+        </p:nvSpPr>
+        <p:spPr>
+          <a:xfrm>
+            <a:off x="-10283634" y="2636872"/>
+            <a:ext cx="9492863" cy="748609"/>
+          </a:xfrm>
+        </p:spPr>
+        <p:txBody>
+          <a:bodyPr>
+            <a:normAutofit fontScale="90000"/>
+          </a:bodyPr>
+          <a:lstStyle/>
+          <a:p>
+            <a:br>
+              <a:rPr lang="hu-HU" sz="4800" dirty="0">
+                <a:latin typeface="Times New Roman" panose="02020603050405020304" pitchFamily="18" charset="0"/>
+                <a:cs typeface="Times New Roman" panose="02020603050405020304" pitchFamily="18" charset="0"/>
+              </a:rPr>
+            </a:br>
+            <a:r>
+              <a:rPr lang="hu-HU" sz="4800" dirty="0" err="1">
+                <a:latin typeface="Times New Roman" panose="02020603050405020304" pitchFamily="18" charset="0"/>
+                <a:cs typeface="Times New Roman" panose="02020603050405020304" pitchFamily="18" charset="0"/>
+              </a:rPr>
+              <a:t>Message</a:t>
+            </a:r>
+            <a:r>
+              <a:rPr lang="hu-HU" sz="4800" dirty="0">
+                <a:latin typeface="Times New Roman" panose="02020603050405020304" pitchFamily="18" charset="0"/>
+                <a:cs typeface="Times New Roman" panose="02020603050405020304" pitchFamily="18" charset="0"/>
+              </a:rPr>
+              <a:t> </a:t>
+            </a:r>
+            <a:r>
+              <a:rPr lang="hu-HU" sz="4800" dirty="0" err="1">
+                <a:latin typeface="Times New Roman" panose="02020603050405020304" pitchFamily="18" charset="0"/>
+                <a:cs typeface="Times New Roman" panose="02020603050405020304" pitchFamily="18" charset="0"/>
+              </a:rPr>
+              <a:t>Queuing</a:t>
+            </a:r>
+            <a:r>
+              <a:rPr lang="hu-HU" sz="4800" dirty="0">
+                <a:latin typeface="Times New Roman" panose="02020603050405020304" pitchFamily="18" charset="0"/>
+                <a:cs typeface="Times New Roman" panose="02020603050405020304" pitchFamily="18" charset="0"/>
+              </a:rPr>
+              <a:t> </a:t>
+            </a:r>
+            <a:r>
+              <a:rPr lang="hu-HU" sz="4800" dirty="0" err="1">
+                <a:latin typeface="Times New Roman" panose="02020603050405020304" pitchFamily="18" charset="0"/>
+                <a:cs typeface="Times New Roman" panose="02020603050405020304" pitchFamily="18" charset="0"/>
+              </a:rPr>
+              <a:t>Telemetry</a:t>
+            </a:r>
+            <a:r>
+              <a:rPr lang="hu-HU" sz="4800" dirty="0">
+                <a:latin typeface="Times New Roman" panose="02020603050405020304" pitchFamily="18" charset="0"/>
+                <a:cs typeface="Times New Roman" panose="02020603050405020304" pitchFamily="18" charset="0"/>
+              </a:rPr>
+              <a:t> </a:t>
+            </a:r>
+            <a:r>
+              <a:rPr lang="hu-HU" sz="4800" dirty="0" err="1">
+                <a:latin typeface="Times New Roman" panose="02020603050405020304" pitchFamily="18" charset="0"/>
+                <a:cs typeface="Times New Roman" panose="02020603050405020304" pitchFamily="18" charset="0"/>
+              </a:rPr>
+              <a:t>Transport</a:t>
+            </a:r>
+            <a:endParaRPr lang="hu-HU" sz="4800" dirty="0">
+              <a:latin typeface="Times New Roman" panose="02020603050405020304" pitchFamily="18" charset="0"/>
+              <a:cs typeface="Times New Roman" panose="02020603050405020304" pitchFamily="18" charset="0"/>
+            </a:endParaRPr>
+          </a:p>
+        </p:txBody>
+      </p:sp>
+      <p:sp>
+        <p:nvSpPr>
+          <p:cNvPr id="3" name="Alcím 2">
+            <a:extLst>
+              <a:ext uri="{FF2B5EF4-FFF2-40B4-BE49-F238E27FC236}">
+                <a16:creationId xmlns:a16="http://schemas.microsoft.com/office/drawing/2014/main" id="{080B6D76-FA53-4E30-98F7-3790CF55DB52}"/>
+              </a:ext>
+            </a:extLst>
+          </p:cNvPr>
+          <p:cNvSpPr>
+            <a:spLocks noGrp="1"/>
+          </p:cNvSpPr>
+          <p:nvPr>
+            <p:ph type="subTitle" idx="1"/>
+          </p:nvPr>
+        </p:nvSpPr>
+        <p:spPr>
+          <a:xfrm>
+            <a:off x="13658849" y="3429000"/>
+            <a:ext cx="6870700" cy="449262"/>
+          </a:xfrm>
+        </p:spPr>
+        <p:txBody>
+          <a:bodyPr>
+            <a:normAutofit/>
+          </a:bodyPr>
+          <a:lstStyle/>
+          <a:p>
+            <a:r>
+              <a:rPr lang="hu-HU" i="1" dirty="0">
+                <a:latin typeface="Times New Roman" panose="02020603050405020304" pitchFamily="18" charset="0"/>
+                <a:cs typeface="Times New Roman" panose="02020603050405020304" pitchFamily="18" charset="0"/>
+              </a:rPr>
+              <a:t>-Könnyű </a:t>
+            </a:r>
+            <a:r>
+              <a:rPr lang="hu-HU" i="1" dirty="0" err="1">
+                <a:latin typeface="Times New Roman" panose="02020603050405020304" pitchFamily="18" charset="0"/>
+                <a:cs typeface="Times New Roman" panose="02020603050405020304" pitchFamily="18" charset="0"/>
+              </a:rPr>
+              <a:t>üzenetkelezelő</a:t>
+            </a:r>
+            <a:r>
+              <a:rPr lang="hu-HU" i="1" dirty="0">
+                <a:latin typeface="Times New Roman" panose="02020603050405020304" pitchFamily="18" charset="0"/>
+                <a:cs typeface="Times New Roman" panose="02020603050405020304" pitchFamily="18" charset="0"/>
+              </a:rPr>
+              <a:t> protokoll </a:t>
+            </a:r>
+            <a:r>
+              <a:rPr lang="hu-HU" i="1" dirty="0" err="1">
+                <a:latin typeface="Times New Roman" panose="02020603050405020304" pitchFamily="18" charset="0"/>
+                <a:cs typeface="Times New Roman" panose="02020603050405020304" pitchFamily="18" charset="0"/>
+              </a:rPr>
+              <a:t>IoT</a:t>
+            </a:r>
+            <a:r>
+              <a:rPr lang="hu-HU" i="1" dirty="0">
+                <a:latin typeface="Times New Roman" panose="02020603050405020304" pitchFamily="18" charset="0"/>
+                <a:cs typeface="Times New Roman" panose="02020603050405020304" pitchFamily="18" charset="0"/>
+              </a:rPr>
+              <a:t> rendszerekben</a:t>
+            </a:r>
+          </a:p>
+        </p:txBody>
+      </p:sp>
+      <p:sp>
+        <p:nvSpPr>
+          <p:cNvPr id="4" name="Alcím 2">
+            <a:extLst>
+              <a:ext uri="{FF2B5EF4-FFF2-40B4-BE49-F238E27FC236}">
+                <a16:creationId xmlns:a16="http://schemas.microsoft.com/office/drawing/2014/main" id="{6CE16EB6-FEDC-43F0-AD02-E6C0D416E2A2}"/>
+              </a:ext>
+            </a:extLst>
+          </p:cNvPr>
+          <p:cNvSpPr txBox="1">
+            <a:spLocks/>
+          </p:cNvSpPr>
+          <p:nvPr/>
+        </p:nvSpPr>
+        <p:spPr>
+          <a:xfrm>
+            <a:off x="5264147" y="4488306"/>
+            <a:ext cx="1663700" cy="342900"/>
+          </a:xfrm>
+          <a:prstGeom prst="rect">
+            <a:avLst/>
+          </a:prstGeom>
+        </p:spPr>
+        <p:txBody>
+          <a:bodyPr vert="horz" lIns="91440" tIns="45720" rIns="91440" bIns="45720" rtlCol="0">
+            <a:normAutofit fontScale="92500"/>
+          </a:bodyPr>
+          <a:lstStyle>
+            <a:lvl1pPr marL="0" indent="0" algn="ctr" defTabSz="914400" rtl="0" eaLnBrk="1" latinLnBrk="0" hangingPunct="1">
+              <a:lnSpc>
+                <a:spcPct val="90000"/>
+              </a:lnSpc>
+              <a:spcBef>
+                <a:spcPts val="1000"/>
+              </a:spcBef>
+              <a:buFont typeface="Arial" panose="020B0604020202020204" pitchFamily="34" charset="0"/>
+              <a:buNone/>
+              <a:defRPr sz="2400" kern="1200">
+                <a:solidFill>
+                  <a:schemeClr val="tx1"/>
+                </a:solidFill>
+                <a:latin typeface="+mn-lt"/>
+                <a:ea typeface="+mn-ea"/>
+                <a:cs typeface="+mn-cs"/>
+              </a:defRPr>
+            </a:lvl1pPr>
+            <a:lvl2pPr marL="457200" indent="0" algn="ctr" defTabSz="914400" rtl="0" eaLnBrk="1" latinLnBrk="0" hangingPunct="1">
+              <a:lnSpc>
+                <a:spcPct val="90000"/>
+              </a:lnSpc>
+              <a:spcBef>
+                <a:spcPts val="500"/>
+              </a:spcBef>
+              <a:buFont typeface="Arial" panose="020B0604020202020204" pitchFamily="34" charset="0"/>
+              <a:buNone/>
+              <a:defRPr sz="2000" kern="1200">
+                <a:solidFill>
+                  <a:schemeClr val="tx1"/>
+                </a:solidFill>
+                <a:latin typeface="+mn-lt"/>
+                <a:ea typeface="+mn-ea"/>
+                <a:cs typeface="+mn-cs"/>
+              </a:defRPr>
+            </a:lvl2pPr>
+            <a:lvl3pPr marL="914400" indent="0" algn="ctr" defTabSz="914400" rtl="0" eaLnBrk="1" latinLnBrk="0" hangingPunct="1">
+              <a:lnSpc>
+                <a:spcPct val="90000"/>
+              </a:lnSpc>
+              <a:spcBef>
+                <a:spcPts val="500"/>
+              </a:spcBef>
+              <a:buFont typeface="Arial" panose="020B0604020202020204" pitchFamily="34" charset="0"/>
+              <a:buNone/>
+              <a:defRPr sz="1800" kern="1200">
+                <a:solidFill>
+                  <a:schemeClr val="tx1"/>
+                </a:solidFill>
+                <a:latin typeface="+mn-lt"/>
+                <a:ea typeface="+mn-ea"/>
+                <a:cs typeface="+mn-cs"/>
+              </a:defRPr>
+            </a:lvl3pPr>
+            <a:lvl4pPr marL="1371600" indent="0" algn="ctr" defTabSz="914400" rtl="0" eaLnBrk="1" latinLnBrk="0" hangingPunct="1">
+              <a:lnSpc>
+                <a:spcPct val="90000"/>
+              </a:lnSpc>
+              <a:spcBef>
+                <a:spcPts val="500"/>
+              </a:spcBef>
+              <a:buFont typeface="Arial" panose="020B0604020202020204" pitchFamily="34" charset="0"/>
+              <a:buNone/>
+              <a:defRPr sz="1600" kern="1200">
+                <a:solidFill>
+                  <a:schemeClr val="tx1"/>
+                </a:solidFill>
+                <a:latin typeface="+mn-lt"/>
+                <a:ea typeface="+mn-ea"/>
+                <a:cs typeface="+mn-cs"/>
+              </a:defRPr>
+            </a:lvl4pPr>
+            <a:lvl5pPr marL="1828800" indent="0" algn="ctr" defTabSz="914400" rtl="0" eaLnBrk="1" latinLnBrk="0" hangingPunct="1">
+              <a:lnSpc>
+                <a:spcPct val="90000"/>
+              </a:lnSpc>
+              <a:spcBef>
+                <a:spcPts val="500"/>
+              </a:spcBef>
+              <a:buFont typeface="Arial" panose="020B0604020202020204" pitchFamily="34" charset="0"/>
+              <a:buNone/>
+              <a:defRPr sz="1600" kern="1200">
+                <a:solidFill>
+                  <a:schemeClr val="tx1"/>
+                </a:solidFill>
+                <a:latin typeface="+mn-lt"/>
+                <a:ea typeface="+mn-ea"/>
+                <a:cs typeface="+mn-cs"/>
+              </a:defRPr>
+            </a:lvl5pPr>
+            <a:lvl6pPr marL="2286000" indent="0" algn="ctr" defTabSz="914400" rtl="0" eaLnBrk="1" latinLnBrk="0" hangingPunct="1">
+              <a:lnSpc>
+                <a:spcPct val="90000"/>
+              </a:lnSpc>
+              <a:spcBef>
+                <a:spcPts val="500"/>
+              </a:spcBef>
+              <a:buFont typeface="Arial" panose="020B0604020202020204" pitchFamily="34" charset="0"/>
+              <a:buNone/>
+              <a:defRPr sz="1600" kern="1200">
+                <a:solidFill>
+                  <a:schemeClr val="tx1"/>
+                </a:solidFill>
+                <a:latin typeface="+mn-lt"/>
+                <a:ea typeface="+mn-ea"/>
+                <a:cs typeface="+mn-cs"/>
+              </a:defRPr>
+            </a:lvl6pPr>
+            <a:lvl7pPr marL="2743200" indent="0" algn="ctr" defTabSz="914400" rtl="0" eaLnBrk="1" latinLnBrk="0" hangingPunct="1">
+              <a:lnSpc>
+                <a:spcPct val="90000"/>
+              </a:lnSpc>
+              <a:spcBef>
+                <a:spcPts val="500"/>
+              </a:spcBef>
+              <a:buFont typeface="Arial" panose="020B0604020202020204" pitchFamily="34" charset="0"/>
+              <a:buNone/>
+              <a:defRPr sz="1600" kern="1200">
+                <a:solidFill>
+                  <a:schemeClr val="tx1"/>
+                </a:solidFill>
+                <a:latin typeface="+mn-lt"/>
+                <a:ea typeface="+mn-ea"/>
+                <a:cs typeface="+mn-cs"/>
+              </a:defRPr>
+            </a:lvl7pPr>
+            <a:lvl8pPr marL="3200400" indent="0" algn="ctr" defTabSz="914400" rtl="0" eaLnBrk="1" latinLnBrk="0" hangingPunct="1">
+              <a:lnSpc>
+                <a:spcPct val="90000"/>
+              </a:lnSpc>
+              <a:spcBef>
+                <a:spcPts val="500"/>
+              </a:spcBef>
+              <a:buFont typeface="Arial" panose="020B0604020202020204" pitchFamily="34" charset="0"/>
+              <a:buNone/>
+              <a:defRPr sz="1600" kern="1200">
+                <a:solidFill>
+                  <a:schemeClr val="tx1"/>
+                </a:solidFill>
+                <a:latin typeface="+mn-lt"/>
+                <a:ea typeface="+mn-ea"/>
+                <a:cs typeface="+mn-cs"/>
+              </a:defRPr>
+            </a:lvl8pPr>
+            <a:lvl9pPr marL="3657600" indent="0" algn="ctr" defTabSz="914400" rtl="0" eaLnBrk="1" latinLnBrk="0" hangingPunct="1">
+              <a:lnSpc>
+                <a:spcPct val="90000"/>
+              </a:lnSpc>
+              <a:spcBef>
+                <a:spcPts val="500"/>
+              </a:spcBef>
+              <a:buFont typeface="Arial" panose="020B0604020202020204" pitchFamily="34" charset="0"/>
+              <a:buNone/>
+              <a:defRPr sz="1600" kern="1200">
+                <a:solidFill>
+                  <a:schemeClr val="tx1"/>
+                </a:solidFill>
+                <a:latin typeface="+mn-lt"/>
+                <a:ea typeface="+mn-ea"/>
+                <a:cs typeface="+mn-cs"/>
+              </a:defRPr>
+            </a:lvl9pPr>
+          </a:lstStyle>
+          <a:p>
+            <a:r>
+              <a:rPr lang="hu-HU" sz="1600" b="1" dirty="0">
+                <a:latin typeface="Times New Roman" panose="02020603050405020304" pitchFamily="18" charset="0"/>
+                <a:cs typeface="Times New Roman" panose="02020603050405020304" pitchFamily="18" charset="0"/>
+              </a:rPr>
+              <a:t>Bozó Attila Péter</a:t>
+            </a:r>
+          </a:p>
+        </p:txBody>
+      </p:sp>
+      <p:pic>
+        <p:nvPicPr>
+          <p:cNvPr id="6" name="Kép 5">
+            <a:extLst>
+              <a:ext uri="{FF2B5EF4-FFF2-40B4-BE49-F238E27FC236}">
+                <a16:creationId xmlns:a16="http://schemas.microsoft.com/office/drawing/2014/main" id="{0EA2C2C0-7CB5-4EDA-A1C1-20F14502A99B}"/>
+              </a:ext>
+            </a:extLst>
+          </p:cNvPr>
+          <p:cNvPicPr>
+            <a:picLocks noChangeAspect="1"/>
+          </p:cNvPicPr>
+          <p:nvPr/>
+        </p:nvPicPr>
+        <p:blipFill>
+          <a:blip r:embed="rId2">
+            <a:extLst>
+              <a:ext uri="{BEBA8EAE-BF5A-486C-A8C5-ECC9F3942E4B}">
+                <a14:imgProps xmlns:a14="http://schemas.microsoft.com/office/drawing/2010/main">
+                  <a14:imgLayer r:embed="rId3">
+                    <a14:imgEffect>
+                      <a14:saturation sat="0"/>
+                    </a14:imgEffect>
+                    <a14:imgEffect>
+                      <a14:brightnessContrast contrast="100000"/>
+                    </a14:imgEffect>
+                  </a14:imgLayer>
+                </a14:imgProps>
+              </a:ext>
+              <a:ext uri="{28A0092B-C50C-407E-A947-70E740481C1C}">
+                <a14:useLocalDpi xmlns:a14="http://schemas.microsoft.com/office/drawing/2010/main" val="0"/>
+              </a:ext>
+            </a:extLst>
+          </a:blip>
+          <a:stretch>
+            <a:fillRect/>
+          </a:stretch>
+        </p:blipFill>
+        <p:spPr>
+          <a:xfrm>
+            <a:off x="4915578" y="93837"/>
+            <a:ext cx="2360840" cy="2022884"/>
+          </a:xfrm>
+          <a:prstGeom prst="rect">
+            <a:avLst/>
+          </a:prstGeom>
+        </p:spPr>
+      </p:pic>
+      <p:sp>
+        <p:nvSpPr>
+          <p:cNvPr id="8" name="Téglalap: lekerekített 7">
+            <a:extLst>
+              <a:ext uri="{FF2B5EF4-FFF2-40B4-BE49-F238E27FC236}">
+                <a16:creationId xmlns:a16="http://schemas.microsoft.com/office/drawing/2014/main" id="{BC87AA45-369F-4D7A-826E-FE393A058A28}"/>
               </a:ext>
             </a:extLst>
           </p:cNvPr>
@@ -4955,7 +5523,7 @@
         </p:nvSpPr>
         <p:spPr>
           <a:xfrm rot="5400000">
-            <a:off x="12058839" y="-1317106"/>
+            <a:off x="15123720" y="-25811"/>
             <a:ext cx="1628039" cy="6073974"/>
           </a:xfrm>
           <a:prstGeom prst="roundRect">
@@ -4963,20 +5531,39 @@
               <a:gd name="adj" fmla="val 50000"/>
             </a:avLst>
           </a:prstGeom>
-          <a:solidFill>
-            <a:schemeClr val="bg1"/>
-          </a:solidFill>
+          <a:gradFill flip="none" rotWithShape="1">
+            <a:gsLst>
+              <a:gs pos="0">
+                <a:schemeClr val="bg1">
+                  <a:shade val="30000"/>
+                  <a:satMod val="115000"/>
+                </a:schemeClr>
+              </a:gs>
+              <a:gs pos="50000">
+                <a:schemeClr val="bg1">
+                  <a:shade val="67500"/>
+                  <a:satMod val="115000"/>
+                </a:schemeClr>
+              </a:gs>
+              <a:gs pos="100000">
+                <a:schemeClr val="bg1">
+                  <a:shade val="100000"/>
+                  <a:satMod val="115000"/>
+                </a:schemeClr>
+              </a:gs>
+            </a:gsLst>
+            <a:lin ang="5400000" scaled="1"/>
+            <a:tileRect/>
+          </a:gradFill>
           <a:ln>
             <a:solidFill>
               <a:schemeClr val="bg1"/>
             </a:solidFill>
           </a:ln>
           <a:effectLst>
-            <a:outerShdw blurRad="50800" dist="38100" dir="2700000" algn="tl" rotWithShape="0">
-              <a:prstClr val="black">
-                <a:alpha val="40000"/>
-              </a:prstClr>
-            </a:outerShdw>
+            <a:innerShdw blurRad="114300">
+              <a:prstClr val="black"/>
+            </a:innerShdw>
           </a:effectLst>
         </p:spPr>
         <p:style>
@@ -5005,16 +5592,183 @@
           <a:lstStyle/>
           <a:p>
             <a:pPr algn="ctr"/>
-            <a:endParaRPr lang="hu-HU" dirty="0"/>
-          </a:p>
-        </p:txBody>
-      </p:sp>
-      <p:sp>
-        <p:nvSpPr>
-          <p:cNvPr id="10" name="Téglalap: lekerekített 9">
-            <a:extLst>
-              <a:ext uri="{FF2B5EF4-FFF2-40B4-BE49-F238E27FC236}">
-                <a16:creationId xmlns:a16="http://schemas.microsoft.com/office/drawing/2014/main" id="{D67CA543-4C77-4085-9A5E-6599D965C9E8}"/>
+            <a:endParaRPr lang="hu-HU"/>
+          </a:p>
+        </p:txBody>
+      </p:sp>
+      <p:pic>
+        <p:nvPicPr>
+          <p:cNvPr id="16" name="Ábra 15" descr="Boríték">
+            <a:extLst>
+              <a:ext uri="{FF2B5EF4-FFF2-40B4-BE49-F238E27FC236}">
+                <a16:creationId xmlns:a16="http://schemas.microsoft.com/office/drawing/2014/main" id="{989A28DE-FDC4-4087-A057-4619D37CD8DD}"/>
+              </a:ext>
+            </a:extLst>
+          </p:cNvPr>
+          <p:cNvPicPr>
+            <a:picLocks noChangeAspect="1"/>
+          </p:cNvPicPr>
+          <p:nvPr/>
+        </p:nvPicPr>
+        <p:blipFill>
+          <a:blip r:embed="rId4">
+            <a:extLst>
+              <a:ext uri="{28A0092B-C50C-407E-A947-70E740481C1C}">
+                <a14:useLocalDpi xmlns:a14="http://schemas.microsoft.com/office/drawing/2010/main" val="0"/>
+              </a:ext>
+              <a:ext uri="{96DAC541-7B7A-43D3-8B79-37D633B846F1}">
+                <asvg:svgBlip xmlns:asvg="http://schemas.microsoft.com/office/drawing/2016/SVG/main" r:embed="rId5"/>
+              </a:ext>
+            </a:extLst>
+          </a:blip>
+          <a:stretch>
+            <a:fillRect/>
+          </a:stretch>
+        </p:blipFill>
+        <p:spPr>
+          <a:xfrm rot="1120505">
+            <a:off x="844806" y="-2469654"/>
+            <a:ext cx="2360840" cy="1960117"/>
+          </a:xfrm>
+          <a:prstGeom prst="rect">
+            <a:avLst/>
+          </a:prstGeom>
+        </p:spPr>
+      </p:pic>
+      <p:pic>
+        <p:nvPicPr>
+          <p:cNvPr id="17" name="Ábra 16" descr="Küldés">
+            <a:extLst>
+              <a:ext uri="{FF2B5EF4-FFF2-40B4-BE49-F238E27FC236}">
+                <a16:creationId xmlns:a16="http://schemas.microsoft.com/office/drawing/2014/main" id="{3447B44B-72DC-4C44-8852-B0E29082EEE0}"/>
+              </a:ext>
+            </a:extLst>
+          </p:cNvPr>
+          <p:cNvPicPr>
+            <a:picLocks noChangeAspect="1"/>
+          </p:cNvPicPr>
+          <p:nvPr/>
+        </p:nvPicPr>
+        <p:blipFill>
+          <a:blip r:embed="rId6">
+            <a:extLst>
+              <a:ext uri="{28A0092B-C50C-407E-A947-70E740481C1C}">
+                <a14:useLocalDpi xmlns:a14="http://schemas.microsoft.com/office/drawing/2010/main" val="0"/>
+              </a:ext>
+              <a:ext uri="{96DAC541-7B7A-43D3-8B79-37D633B846F1}">
+                <asvg:svgBlip xmlns:asvg="http://schemas.microsoft.com/office/drawing/2016/SVG/main" r:embed="rId7"/>
+              </a:ext>
+            </a:extLst>
+          </a:blip>
+          <a:stretch>
+            <a:fillRect/>
+          </a:stretch>
+        </p:blipFill>
+        <p:spPr>
+          <a:xfrm rot="21103744">
+            <a:off x="5050496" y="7601652"/>
+            <a:ext cx="2021972" cy="2021972"/>
+          </a:xfrm>
+          <a:prstGeom prst="rect">
+            <a:avLst/>
+          </a:prstGeom>
+        </p:spPr>
+      </p:pic>
+      <p:pic>
+        <p:nvPicPr>
+          <p:cNvPr id="19" name="Ábra 18" descr="Feliratok">
+            <a:extLst>
+              <a:ext uri="{FF2B5EF4-FFF2-40B4-BE49-F238E27FC236}">
+                <a16:creationId xmlns:a16="http://schemas.microsoft.com/office/drawing/2014/main" id="{0AE990BB-4B93-4D6E-8B78-28033E9E2A22}"/>
+              </a:ext>
+            </a:extLst>
+          </p:cNvPr>
+          <p:cNvPicPr>
+            <a:picLocks noChangeAspect="1"/>
+          </p:cNvPicPr>
+          <p:nvPr/>
+        </p:nvPicPr>
+        <p:blipFill>
+          <a:blip r:embed="rId8">
+            <a:extLst>
+              <a:ext uri="{28A0092B-C50C-407E-A947-70E740481C1C}">
+                <a14:useLocalDpi xmlns:a14="http://schemas.microsoft.com/office/drawing/2010/main" val="0"/>
+              </a:ext>
+              <a:ext uri="{96DAC541-7B7A-43D3-8B79-37D633B846F1}">
+                <asvg:svgBlip xmlns:asvg="http://schemas.microsoft.com/office/drawing/2016/SVG/main" r:embed="rId9"/>
+              </a:ext>
+            </a:extLst>
+          </a:blip>
+          <a:stretch>
+            <a:fillRect/>
+          </a:stretch>
+        </p:blipFill>
+        <p:spPr>
+          <a:xfrm>
+            <a:off x="9304551" y="7162563"/>
+            <a:ext cx="2196523" cy="2196523"/>
+          </a:xfrm>
+          <a:prstGeom prst="rect">
+            <a:avLst/>
+          </a:prstGeom>
+          <a:effectLst>
+            <a:outerShdw blurRad="50800" dist="38100" dir="2700000" algn="tl" rotWithShape="0">
+              <a:prstClr val="black">
+                <a:alpha val="40000"/>
+              </a:prstClr>
+            </a:outerShdw>
+          </a:effectLst>
+        </p:spPr>
+      </p:pic>
+      <p:pic>
+        <p:nvPicPr>
+          <p:cNvPr id="20" name="Kép 19">
+            <a:extLst>
+              <a:ext uri="{FF2B5EF4-FFF2-40B4-BE49-F238E27FC236}">
+                <a16:creationId xmlns:a16="http://schemas.microsoft.com/office/drawing/2014/main" id="{699FDADC-9073-408A-9314-49D2E3E83D1F}"/>
+              </a:ext>
+            </a:extLst>
+          </p:cNvPr>
+          <p:cNvPicPr>
+            <a:picLocks noChangeAspect="1"/>
+          </p:cNvPicPr>
+          <p:nvPr/>
+        </p:nvPicPr>
+        <p:blipFill>
+          <a:blip r:embed="rId10">
+            <a:extLst>
+              <a:ext uri="{28A0092B-C50C-407E-A947-70E740481C1C}">
+                <a14:useLocalDpi xmlns:a14="http://schemas.microsoft.com/office/drawing/2010/main" val="0"/>
+              </a:ext>
+            </a:extLst>
+          </a:blip>
+          <a:stretch>
+            <a:fillRect/>
+          </a:stretch>
+        </p:blipFill>
+        <p:spPr>
+          <a:xfrm>
+            <a:off x="8490531" y="-3117636"/>
+            <a:ext cx="1628040" cy="1628040"/>
+          </a:xfrm>
+          <a:prstGeom prst="rect">
+            <a:avLst/>
+          </a:prstGeom>
+          <a:effectLst>
+            <a:outerShdw blurRad="50800" dist="38100" dir="2700000" algn="tl" rotWithShape="0">
+              <a:prstClr val="black">
+                <a:alpha val="40000"/>
+              </a:prstClr>
+            </a:outerShdw>
+          </a:effectLst>
+        </p:spPr>
+      </p:pic>
+      <p:sp>
+        <p:nvSpPr>
+          <p:cNvPr id="21" name="Téglalap: lekerekített 20">
+            <a:extLst>
+              <a:ext uri="{FF2B5EF4-FFF2-40B4-BE49-F238E27FC236}">
+                <a16:creationId xmlns:a16="http://schemas.microsoft.com/office/drawing/2014/main" id="{D891EC16-3552-4FE1-AED1-E497DBF2C12B}"/>
               </a:ext>
             </a:extLst>
           </p:cNvPr>
@@ -5023,7 +5777,7 @@
         </p:nvSpPr>
         <p:spPr>
           <a:xfrm rot="5400000">
-            <a:off x="11716248" y="-2741170"/>
+            <a:off x="5281977" y="-25811"/>
             <a:ext cx="1628039" cy="6073974"/>
           </a:xfrm>
           <a:prstGeom prst="roundRect">
@@ -5031,20 +5785,39 @@
               <a:gd name="adj" fmla="val 50000"/>
             </a:avLst>
           </a:prstGeom>
-          <a:solidFill>
-            <a:schemeClr val="bg1"/>
-          </a:solidFill>
+          <a:gradFill flip="none" rotWithShape="1">
+            <a:gsLst>
+              <a:gs pos="0">
+                <a:schemeClr val="bg1">
+                  <a:shade val="30000"/>
+                  <a:satMod val="115000"/>
+                </a:schemeClr>
+              </a:gs>
+              <a:gs pos="50000">
+                <a:schemeClr val="bg1">
+                  <a:shade val="67500"/>
+                  <a:satMod val="115000"/>
+                </a:schemeClr>
+              </a:gs>
+              <a:gs pos="100000">
+                <a:schemeClr val="bg1">
+                  <a:shade val="100000"/>
+                  <a:satMod val="115000"/>
+                </a:schemeClr>
+              </a:gs>
+            </a:gsLst>
+            <a:lin ang="5400000" scaled="1"/>
+            <a:tileRect/>
+          </a:gradFill>
           <a:ln>
             <a:solidFill>
               <a:schemeClr val="bg1"/>
             </a:solidFill>
           </a:ln>
           <a:effectLst>
-            <a:outerShdw blurRad="50800" dist="38100" dir="2700000" algn="tl" rotWithShape="0">
-              <a:prstClr val="black">
-                <a:alpha val="40000"/>
-              </a:prstClr>
-            </a:outerShdw>
+            <a:innerShdw blurRad="114300">
+              <a:prstClr val="black"/>
+            </a:innerShdw>
           </a:effectLst>
         </p:spPr>
         <p:style>
@@ -5079,10 +5852,10 @@
       </p:sp>
       <p:sp>
         <p:nvSpPr>
-          <p:cNvPr id="11" name="Alcím 2">
-            <a:extLst>
-              <a:ext uri="{FF2B5EF4-FFF2-40B4-BE49-F238E27FC236}">
-                <a16:creationId xmlns:a16="http://schemas.microsoft.com/office/drawing/2014/main" id="{E7B5FF37-1DA2-4F3B-8D38-BC99AEF9F7ED}"/>
+          <p:cNvPr id="23" name="Alcím 2">
+            <a:extLst>
+              <a:ext uri="{FF2B5EF4-FFF2-40B4-BE49-F238E27FC236}">
+                <a16:creationId xmlns:a16="http://schemas.microsoft.com/office/drawing/2014/main" id="{130EC767-0828-4712-AD08-FF0C733F5B9B}"/>
               </a:ext>
             </a:extLst>
           </p:cNvPr>
@@ -5094,297 +5867,6 @@
         <p:spPr>
           <a:xfrm>
             <a:off x="4105269" y="2673825"/>
-            <a:ext cx="3981454" cy="674702"/>
-          </a:xfrm>
-          <a:prstGeom prst="rect">
-            <a:avLst/>
-          </a:prstGeom>
-        </p:spPr>
-        <p:txBody>
-          <a:bodyPr vert="horz" lIns="91440" tIns="45720" rIns="91440" bIns="45720" rtlCol="0">
-            <a:normAutofit lnSpcReduction="10000"/>
-          </a:bodyPr>
-          <a:lstStyle>
-            <a:lvl1pPr marL="0" indent="0" algn="ctr" defTabSz="914400" rtl="0" eaLnBrk="1" latinLnBrk="0" hangingPunct="1">
-              <a:lnSpc>
-                <a:spcPct val="90000"/>
-              </a:lnSpc>
-              <a:spcBef>
-                <a:spcPts val="1000"/>
-              </a:spcBef>
-              <a:buFont typeface="Arial" panose="020B0604020202020204" pitchFamily="34" charset="0"/>
-              <a:buNone/>
-              <a:defRPr sz="2400" kern="1200">
-                <a:solidFill>
-                  <a:schemeClr val="tx1"/>
-                </a:solidFill>
-                <a:latin typeface="+mn-lt"/>
-                <a:ea typeface="+mn-ea"/>
-                <a:cs typeface="+mn-cs"/>
-              </a:defRPr>
-            </a:lvl1pPr>
-            <a:lvl2pPr marL="457200" indent="0" algn="ctr" defTabSz="914400" rtl="0" eaLnBrk="1" latinLnBrk="0" hangingPunct="1">
-              <a:lnSpc>
-                <a:spcPct val="90000"/>
-              </a:lnSpc>
-              <a:spcBef>
-                <a:spcPts val="500"/>
-              </a:spcBef>
-              <a:buFont typeface="Arial" panose="020B0604020202020204" pitchFamily="34" charset="0"/>
-              <a:buNone/>
-              <a:defRPr sz="2000" kern="1200">
-                <a:solidFill>
-                  <a:schemeClr val="tx1"/>
-                </a:solidFill>
-                <a:latin typeface="+mn-lt"/>
-                <a:ea typeface="+mn-ea"/>
-                <a:cs typeface="+mn-cs"/>
-              </a:defRPr>
-            </a:lvl2pPr>
-            <a:lvl3pPr marL="914400" indent="0" algn="ctr" defTabSz="914400" rtl="0" eaLnBrk="1" latinLnBrk="0" hangingPunct="1">
-              <a:lnSpc>
-                <a:spcPct val="90000"/>
-              </a:lnSpc>
-              <a:spcBef>
-                <a:spcPts val="500"/>
-              </a:spcBef>
-              <a:buFont typeface="Arial" panose="020B0604020202020204" pitchFamily="34" charset="0"/>
-              <a:buNone/>
-              <a:defRPr sz="1800" kern="1200">
-                <a:solidFill>
-                  <a:schemeClr val="tx1"/>
-                </a:solidFill>
-                <a:latin typeface="+mn-lt"/>
-                <a:ea typeface="+mn-ea"/>
-                <a:cs typeface="+mn-cs"/>
-              </a:defRPr>
-            </a:lvl3pPr>
-            <a:lvl4pPr marL="1371600" indent="0" algn="ctr" defTabSz="914400" rtl="0" eaLnBrk="1" latinLnBrk="0" hangingPunct="1">
-              <a:lnSpc>
-                <a:spcPct val="90000"/>
-              </a:lnSpc>
-              <a:spcBef>
-                <a:spcPts val="500"/>
-              </a:spcBef>
-              <a:buFont typeface="Arial" panose="020B0604020202020204" pitchFamily="34" charset="0"/>
-              <a:buNone/>
-              <a:defRPr sz="1600" kern="1200">
-                <a:solidFill>
-                  <a:schemeClr val="tx1"/>
-                </a:solidFill>
-                <a:latin typeface="+mn-lt"/>
-                <a:ea typeface="+mn-ea"/>
-                <a:cs typeface="+mn-cs"/>
-              </a:defRPr>
-            </a:lvl4pPr>
-            <a:lvl5pPr marL="1828800" indent="0" algn="ctr" defTabSz="914400" rtl="0" eaLnBrk="1" latinLnBrk="0" hangingPunct="1">
-              <a:lnSpc>
-                <a:spcPct val="90000"/>
-              </a:lnSpc>
-              <a:spcBef>
-                <a:spcPts val="500"/>
-              </a:spcBef>
-              <a:buFont typeface="Arial" panose="020B0604020202020204" pitchFamily="34" charset="0"/>
-              <a:buNone/>
-              <a:defRPr sz="1600" kern="1200">
-                <a:solidFill>
-                  <a:schemeClr val="tx1"/>
-                </a:solidFill>
-                <a:latin typeface="+mn-lt"/>
-                <a:ea typeface="+mn-ea"/>
-                <a:cs typeface="+mn-cs"/>
-              </a:defRPr>
-            </a:lvl5pPr>
-            <a:lvl6pPr marL="2286000" indent="0" algn="ctr" defTabSz="914400" rtl="0" eaLnBrk="1" latinLnBrk="0" hangingPunct="1">
-              <a:lnSpc>
-                <a:spcPct val="90000"/>
-              </a:lnSpc>
-              <a:spcBef>
-                <a:spcPts val="500"/>
-              </a:spcBef>
-              <a:buFont typeface="Arial" panose="020B0604020202020204" pitchFamily="34" charset="0"/>
-              <a:buNone/>
-              <a:defRPr sz="1600" kern="1200">
-                <a:solidFill>
-                  <a:schemeClr val="tx1"/>
-                </a:solidFill>
-                <a:latin typeface="+mn-lt"/>
-                <a:ea typeface="+mn-ea"/>
-                <a:cs typeface="+mn-cs"/>
-              </a:defRPr>
-            </a:lvl6pPr>
-            <a:lvl7pPr marL="2743200" indent="0" algn="ctr" defTabSz="914400" rtl="0" eaLnBrk="1" latinLnBrk="0" hangingPunct="1">
-              <a:lnSpc>
-                <a:spcPct val="90000"/>
-              </a:lnSpc>
-              <a:spcBef>
-                <a:spcPts val="500"/>
-              </a:spcBef>
-              <a:buFont typeface="Arial" panose="020B0604020202020204" pitchFamily="34" charset="0"/>
-              <a:buNone/>
-              <a:defRPr sz="1600" kern="1200">
-                <a:solidFill>
-                  <a:schemeClr val="tx1"/>
-                </a:solidFill>
-                <a:latin typeface="+mn-lt"/>
-                <a:ea typeface="+mn-ea"/>
-                <a:cs typeface="+mn-cs"/>
-              </a:defRPr>
-            </a:lvl7pPr>
-            <a:lvl8pPr marL="3200400" indent="0" algn="ctr" defTabSz="914400" rtl="0" eaLnBrk="1" latinLnBrk="0" hangingPunct="1">
-              <a:lnSpc>
-                <a:spcPct val="90000"/>
-              </a:lnSpc>
-              <a:spcBef>
-                <a:spcPts val="500"/>
-              </a:spcBef>
-              <a:buFont typeface="Arial" panose="020B0604020202020204" pitchFamily="34" charset="0"/>
-              <a:buNone/>
-              <a:defRPr sz="1600" kern="1200">
-                <a:solidFill>
-                  <a:schemeClr val="tx1"/>
-                </a:solidFill>
-                <a:latin typeface="+mn-lt"/>
-                <a:ea typeface="+mn-ea"/>
-                <a:cs typeface="+mn-cs"/>
-              </a:defRPr>
-            </a:lvl8pPr>
-            <a:lvl9pPr marL="3657600" indent="0" algn="ctr" defTabSz="914400" rtl="0" eaLnBrk="1" latinLnBrk="0" hangingPunct="1">
-              <a:lnSpc>
-                <a:spcPct val="90000"/>
-              </a:lnSpc>
-              <a:spcBef>
-                <a:spcPts val="500"/>
-              </a:spcBef>
-              <a:buFont typeface="Arial" panose="020B0604020202020204" pitchFamily="34" charset="0"/>
-              <a:buNone/>
-              <a:defRPr sz="1600" kern="1200">
-                <a:solidFill>
-                  <a:schemeClr val="tx1"/>
-                </a:solidFill>
-                <a:latin typeface="+mn-lt"/>
-                <a:ea typeface="+mn-ea"/>
-                <a:cs typeface="+mn-cs"/>
-              </a:defRPr>
-            </a:lvl9pPr>
-          </a:lstStyle>
-          <a:p>
-            <a:r>
-              <a:rPr lang="hu-HU" sz="4400" b="1" dirty="0">
-                <a:latin typeface="Times New Roman" panose="02020603050405020304" pitchFamily="18" charset="0"/>
-                <a:cs typeface="Times New Roman" panose="02020603050405020304" pitchFamily="18" charset="0"/>
-              </a:rPr>
-              <a:t>Mi az MQTT?</a:t>
-            </a:r>
-          </a:p>
-        </p:txBody>
-      </p:sp>
-      <p:pic>
-        <p:nvPicPr>
-          <p:cNvPr id="12" name="Ábra 11" descr="Feliratok">
-            <a:extLst>
-              <a:ext uri="{FF2B5EF4-FFF2-40B4-BE49-F238E27FC236}">
-                <a16:creationId xmlns:a16="http://schemas.microsoft.com/office/drawing/2014/main" id="{A2D3CB12-A4E1-4E59-8BCD-F320328BB333}"/>
-              </a:ext>
-            </a:extLst>
-          </p:cNvPr>
-          <p:cNvPicPr>
-            <a:picLocks noChangeAspect="1"/>
-          </p:cNvPicPr>
-          <p:nvPr/>
-        </p:nvPicPr>
-        <p:blipFill>
-          <a:blip r:embed="rId4">
-            <a:extLst>
-              <a:ext uri="{28A0092B-C50C-407E-A947-70E740481C1C}">
-                <a14:useLocalDpi xmlns:a14="http://schemas.microsoft.com/office/drawing/2010/main" val="0"/>
-              </a:ext>
-              <a:ext uri="{96DAC541-7B7A-43D3-8B79-37D633B846F1}">
-                <asvg:svgBlip xmlns:asvg="http://schemas.microsoft.com/office/drawing/2016/SVG/main" r:embed="rId5"/>
-              </a:ext>
-            </a:extLst>
-          </a:blip>
-          <a:stretch>
-            <a:fillRect/>
-          </a:stretch>
-        </p:blipFill>
-        <p:spPr>
-          <a:xfrm>
-            <a:off x="7959363" y="3484074"/>
-            <a:ext cx="914400" cy="914400"/>
-          </a:xfrm>
-          <a:prstGeom prst="rect">
-            <a:avLst/>
-          </a:prstGeom>
-          <a:effectLst>
-            <a:outerShdw blurRad="50800" dist="38100" dir="2700000" algn="tl" rotWithShape="0">
-              <a:prstClr val="black">
-                <a:alpha val="40000"/>
-              </a:prstClr>
-            </a:outerShdw>
-          </a:effectLst>
-        </p:spPr>
-      </p:pic>
-      <p:pic>
-        <p:nvPicPr>
-          <p:cNvPr id="14" name="Kép 13">
-            <a:extLst>
-              <a:ext uri="{FF2B5EF4-FFF2-40B4-BE49-F238E27FC236}">
-                <a16:creationId xmlns:a16="http://schemas.microsoft.com/office/drawing/2014/main" id="{4DF4B949-BA0F-4DCC-9A89-2DED77730486}"/>
-              </a:ext>
-            </a:extLst>
-          </p:cNvPr>
-          <p:cNvPicPr>
-            <a:picLocks noChangeAspect="1"/>
-          </p:cNvPicPr>
-          <p:nvPr/>
-        </p:nvPicPr>
-        <p:blipFill>
-          <a:blip r:embed="rId6">
-            <a:extLst>
-              <a:ext uri="{28A0092B-C50C-407E-A947-70E740481C1C}">
-                <a14:useLocalDpi xmlns:a14="http://schemas.microsoft.com/office/drawing/2010/main" val="0"/>
-              </a:ext>
-            </a:extLst>
-          </a:blip>
-          <a:stretch>
-            <a:fillRect/>
-          </a:stretch>
-        </p:blipFill>
-        <p:spPr>
-          <a:xfrm>
-            <a:off x="8086723" y="1750642"/>
-            <a:ext cx="893027" cy="893027"/>
-          </a:xfrm>
-          <a:prstGeom prst="rect">
-            <a:avLst/>
-          </a:prstGeom>
-          <a:effectLst>
-            <a:outerShdw blurRad="50800" dist="38100" dir="2700000" algn="tl" rotWithShape="0">
-              <a:prstClr val="black">
-                <a:alpha val="40000"/>
-              </a:prstClr>
-            </a:outerShdw>
-          </a:effectLst>
-        </p:spPr>
-      </p:pic>
-      <p:sp>
-        <p:nvSpPr>
-          <p:cNvPr id="22" name="Alcím 2">
-            <a:extLst>
-              <a:ext uri="{FF2B5EF4-FFF2-40B4-BE49-F238E27FC236}">
-                <a16:creationId xmlns:a16="http://schemas.microsoft.com/office/drawing/2014/main" id="{3BFF8243-0606-4184-8E6F-F96F26A2551E}"/>
-              </a:ext>
-            </a:extLst>
-          </p:cNvPr>
-          <p:cNvSpPr txBox="1">
-            <a:spLocks/>
-          </p:cNvSpPr>
-          <p:nvPr/>
-        </p:nvSpPr>
-        <p:spPr>
-          <a:xfrm>
-            <a:off x="12192000" y="4236378"/>
             <a:ext cx="3981454" cy="674702"/>
           </a:xfrm>
           <a:prstGeom prst="rect">
@@ -5565,7 +6047,7 @@
                 <a:latin typeface="Times New Roman" panose="02020603050405020304" pitchFamily="18" charset="0"/>
                 <a:cs typeface="Times New Roman" panose="02020603050405020304" pitchFamily="18" charset="0"/>
               </a:rPr>
-              <a:t>Hogyan működik?</a:t>
+              <a:t>Mire használjuk?</a:t>
             </a:r>
           </a:p>
         </p:txBody>
@@ -5573,7 +6055,1026 @@
     </p:spTree>
     <p:extLst>
       <p:ext uri="{BB962C8B-B14F-4D97-AF65-F5344CB8AC3E}">
-        <p14:creationId xmlns:p14="http://schemas.microsoft.com/office/powerpoint/2010/main" val="1063436869"/>
+        <p14:creationId xmlns:p14="http://schemas.microsoft.com/office/powerpoint/2010/main" val="2326550186"/>
+      </p:ext>
+    </p:extLst>
+  </p:cSld>
+  <p:clrMapOvr>
+    <a:masterClrMapping/>
+  </p:clrMapOvr>
+  <mc:AlternateContent xmlns:mc="http://schemas.openxmlformats.org/markup-compatibility/2006" xmlns:p159="http://schemas.microsoft.com/office/powerpoint/2015/09/main">
+    <mc:Choice Requires="p159">
+      <p:transition xmlns:p14="http://schemas.microsoft.com/office/powerpoint/2010/main" spd="slow" p14:dur="2000">
+        <p159:morph option="byObject"/>
+      </p:transition>
+    </mc:Choice>
+    <mc:Fallback xmlns="">
+      <p:transition spd="slow">
+        <p:fade/>
+      </p:transition>
+    </mc:Fallback>
+  </mc:AlternateContent>
+</p:sld>
+</file>
+
+<file path=ppt/slides/slide4.xml><?xml version="1.0" encoding="utf-8"?>
+<p:sld xmlns:a="http://schemas.openxmlformats.org/drawingml/2006/main" xmlns:r="http://schemas.openxmlformats.org/officeDocument/2006/relationships" xmlns:p="http://schemas.openxmlformats.org/presentationml/2006/main">
+  <p:cSld>
+    <p:bg>
+      <p:bgPr>
+        <a:gradFill flip="none" rotWithShape="1">
+          <a:gsLst>
+            <a:gs pos="0">
+              <a:schemeClr val="bg2">
+                <a:lumMod val="90000"/>
+              </a:schemeClr>
+            </a:gs>
+            <a:gs pos="45000">
+              <a:schemeClr val="bg1">
+                <a:lumMod val="65000"/>
+              </a:schemeClr>
+            </a:gs>
+            <a:gs pos="100000">
+              <a:schemeClr val="bg2">
+                <a:lumMod val="10000"/>
+              </a:schemeClr>
+            </a:gs>
+          </a:gsLst>
+          <a:lin ang="5400000" scaled="1"/>
+          <a:tileRect/>
+        </a:gradFill>
+        <a:effectLst/>
+      </p:bgPr>
+    </p:bg>
+    <p:spTree>
+      <p:nvGrpSpPr>
+        <p:cNvPr id="1" name=""/>
+        <p:cNvGrpSpPr/>
+        <p:nvPr/>
+      </p:nvGrpSpPr>
+      <p:grpSpPr>
+        <a:xfrm>
+          <a:off x="0" y="0"/>
+          <a:ext cx="0" cy="0"/>
+          <a:chOff x="0" y="0"/>
+          <a:chExt cx="0" cy="0"/>
+        </a:xfrm>
+      </p:grpSpPr>
+      <p:sp>
+        <p:nvSpPr>
+          <p:cNvPr id="2" name="Cím 1">
+            <a:extLst>
+              <a:ext uri="{FF2B5EF4-FFF2-40B4-BE49-F238E27FC236}">
+                <a16:creationId xmlns:a16="http://schemas.microsoft.com/office/drawing/2014/main" id="{B2A63552-8D4C-456B-AB6E-2B42D66B77F3}"/>
+              </a:ext>
+            </a:extLst>
+          </p:cNvPr>
+          <p:cNvSpPr>
+            <a:spLocks noGrp="1"/>
+          </p:cNvSpPr>
+          <p:nvPr>
+            <p:ph type="ctrTitle"/>
+          </p:nvPr>
+        </p:nvSpPr>
+        <p:spPr>
+          <a:xfrm>
+            <a:off x="-10283634" y="2636872"/>
+            <a:ext cx="9492863" cy="748609"/>
+          </a:xfrm>
+        </p:spPr>
+        <p:txBody>
+          <a:bodyPr>
+            <a:normAutofit fontScale="90000"/>
+          </a:bodyPr>
+          <a:lstStyle/>
+          <a:p>
+            <a:br>
+              <a:rPr lang="hu-HU" sz="4800" dirty="0">
+                <a:latin typeface="Times New Roman" panose="02020603050405020304" pitchFamily="18" charset="0"/>
+                <a:cs typeface="Times New Roman" panose="02020603050405020304" pitchFamily="18" charset="0"/>
+              </a:rPr>
+            </a:br>
+            <a:r>
+              <a:rPr lang="hu-HU" sz="4800" dirty="0" err="1">
+                <a:latin typeface="Times New Roman" panose="02020603050405020304" pitchFamily="18" charset="0"/>
+                <a:cs typeface="Times New Roman" panose="02020603050405020304" pitchFamily="18" charset="0"/>
+              </a:rPr>
+              <a:t>Message</a:t>
+            </a:r>
+            <a:r>
+              <a:rPr lang="hu-HU" sz="4800" dirty="0">
+                <a:latin typeface="Times New Roman" panose="02020603050405020304" pitchFamily="18" charset="0"/>
+                <a:cs typeface="Times New Roman" panose="02020603050405020304" pitchFamily="18" charset="0"/>
+              </a:rPr>
+              <a:t> </a:t>
+            </a:r>
+            <a:r>
+              <a:rPr lang="hu-HU" sz="4800" dirty="0" err="1">
+                <a:latin typeface="Times New Roman" panose="02020603050405020304" pitchFamily="18" charset="0"/>
+                <a:cs typeface="Times New Roman" panose="02020603050405020304" pitchFamily="18" charset="0"/>
+              </a:rPr>
+              <a:t>Queuing</a:t>
+            </a:r>
+            <a:r>
+              <a:rPr lang="hu-HU" sz="4800" dirty="0">
+                <a:latin typeface="Times New Roman" panose="02020603050405020304" pitchFamily="18" charset="0"/>
+                <a:cs typeface="Times New Roman" panose="02020603050405020304" pitchFamily="18" charset="0"/>
+              </a:rPr>
+              <a:t> </a:t>
+            </a:r>
+            <a:r>
+              <a:rPr lang="hu-HU" sz="4800" dirty="0" err="1">
+                <a:latin typeface="Times New Roman" panose="02020603050405020304" pitchFamily="18" charset="0"/>
+                <a:cs typeface="Times New Roman" panose="02020603050405020304" pitchFamily="18" charset="0"/>
+              </a:rPr>
+              <a:t>Telemetry</a:t>
+            </a:r>
+            <a:r>
+              <a:rPr lang="hu-HU" sz="4800" dirty="0">
+                <a:latin typeface="Times New Roman" panose="02020603050405020304" pitchFamily="18" charset="0"/>
+                <a:cs typeface="Times New Roman" panose="02020603050405020304" pitchFamily="18" charset="0"/>
+              </a:rPr>
+              <a:t> </a:t>
+            </a:r>
+            <a:r>
+              <a:rPr lang="hu-HU" sz="4800" dirty="0" err="1">
+                <a:latin typeface="Times New Roman" panose="02020603050405020304" pitchFamily="18" charset="0"/>
+                <a:cs typeface="Times New Roman" panose="02020603050405020304" pitchFamily="18" charset="0"/>
+              </a:rPr>
+              <a:t>Transport</a:t>
+            </a:r>
+            <a:endParaRPr lang="hu-HU" sz="4800" dirty="0">
+              <a:latin typeface="Times New Roman" panose="02020603050405020304" pitchFamily="18" charset="0"/>
+              <a:cs typeface="Times New Roman" panose="02020603050405020304" pitchFamily="18" charset="0"/>
+            </a:endParaRPr>
+          </a:p>
+        </p:txBody>
+      </p:sp>
+      <p:sp>
+        <p:nvSpPr>
+          <p:cNvPr id="3" name="Alcím 2">
+            <a:extLst>
+              <a:ext uri="{FF2B5EF4-FFF2-40B4-BE49-F238E27FC236}">
+                <a16:creationId xmlns:a16="http://schemas.microsoft.com/office/drawing/2014/main" id="{080B6D76-FA53-4E30-98F7-3790CF55DB52}"/>
+              </a:ext>
+            </a:extLst>
+          </p:cNvPr>
+          <p:cNvSpPr>
+            <a:spLocks noGrp="1"/>
+          </p:cNvSpPr>
+          <p:nvPr>
+            <p:ph type="subTitle" idx="1"/>
+          </p:nvPr>
+        </p:nvSpPr>
+        <p:spPr>
+          <a:xfrm>
+            <a:off x="13658849" y="3429000"/>
+            <a:ext cx="6870700" cy="449262"/>
+          </a:xfrm>
+        </p:spPr>
+        <p:txBody>
+          <a:bodyPr>
+            <a:normAutofit/>
+          </a:bodyPr>
+          <a:lstStyle/>
+          <a:p>
+            <a:r>
+              <a:rPr lang="hu-HU" i="1" dirty="0">
+                <a:latin typeface="Times New Roman" panose="02020603050405020304" pitchFamily="18" charset="0"/>
+                <a:cs typeface="Times New Roman" panose="02020603050405020304" pitchFamily="18" charset="0"/>
+              </a:rPr>
+              <a:t>-Könnyű </a:t>
+            </a:r>
+            <a:r>
+              <a:rPr lang="hu-HU" i="1" dirty="0" err="1">
+                <a:latin typeface="Times New Roman" panose="02020603050405020304" pitchFamily="18" charset="0"/>
+                <a:cs typeface="Times New Roman" panose="02020603050405020304" pitchFamily="18" charset="0"/>
+              </a:rPr>
+              <a:t>üzenetkelezelő</a:t>
+            </a:r>
+            <a:r>
+              <a:rPr lang="hu-HU" i="1" dirty="0">
+                <a:latin typeface="Times New Roman" panose="02020603050405020304" pitchFamily="18" charset="0"/>
+                <a:cs typeface="Times New Roman" panose="02020603050405020304" pitchFamily="18" charset="0"/>
+              </a:rPr>
+              <a:t> protokoll </a:t>
+            </a:r>
+            <a:r>
+              <a:rPr lang="hu-HU" i="1" dirty="0" err="1">
+                <a:latin typeface="Times New Roman" panose="02020603050405020304" pitchFamily="18" charset="0"/>
+                <a:cs typeface="Times New Roman" panose="02020603050405020304" pitchFamily="18" charset="0"/>
+              </a:rPr>
+              <a:t>IoT</a:t>
+            </a:r>
+            <a:r>
+              <a:rPr lang="hu-HU" i="1" dirty="0">
+                <a:latin typeface="Times New Roman" panose="02020603050405020304" pitchFamily="18" charset="0"/>
+                <a:cs typeface="Times New Roman" panose="02020603050405020304" pitchFamily="18" charset="0"/>
+              </a:rPr>
+              <a:t> rendszerekben</a:t>
+            </a:r>
+          </a:p>
+        </p:txBody>
+      </p:sp>
+      <p:sp>
+        <p:nvSpPr>
+          <p:cNvPr id="4" name="Alcím 2">
+            <a:extLst>
+              <a:ext uri="{FF2B5EF4-FFF2-40B4-BE49-F238E27FC236}">
+                <a16:creationId xmlns:a16="http://schemas.microsoft.com/office/drawing/2014/main" id="{6CE16EB6-FEDC-43F0-AD02-E6C0D416E2A2}"/>
+              </a:ext>
+            </a:extLst>
+          </p:cNvPr>
+          <p:cNvSpPr txBox="1">
+            <a:spLocks/>
+          </p:cNvSpPr>
+          <p:nvPr/>
+        </p:nvSpPr>
+        <p:spPr>
+          <a:xfrm>
+            <a:off x="5264147" y="4488306"/>
+            <a:ext cx="1663700" cy="342900"/>
+          </a:xfrm>
+          <a:prstGeom prst="rect">
+            <a:avLst/>
+          </a:prstGeom>
+        </p:spPr>
+        <p:txBody>
+          <a:bodyPr vert="horz" lIns="91440" tIns="45720" rIns="91440" bIns="45720" rtlCol="0">
+            <a:normAutofit fontScale="92500"/>
+          </a:bodyPr>
+          <a:lstStyle>
+            <a:lvl1pPr marL="0" indent="0" algn="ctr" defTabSz="914400" rtl="0" eaLnBrk="1" latinLnBrk="0" hangingPunct="1">
+              <a:lnSpc>
+                <a:spcPct val="90000"/>
+              </a:lnSpc>
+              <a:spcBef>
+                <a:spcPts val="1000"/>
+              </a:spcBef>
+              <a:buFont typeface="Arial" panose="020B0604020202020204" pitchFamily="34" charset="0"/>
+              <a:buNone/>
+              <a:defRPr sz="2400" kern="1200">
+                <a:solidFill>
+                  <a:schemeClr val="tx1"/>
+                </a:solidFill>
+                <a:latin typeface="+mn-lt"/>
+                <a:ea typeface="+mn-ea"/>
+                <a:cs typeface="+mn-cs"/>
+              </a:defRPr>
+            </a:lvl1pPr>
+            <a:lvl2pPr marL="457200" indent="0" algn="ctr" defTabSz="914400" rtl="0" eaLnBrk="1" latinLnBrk="0" hangingPunct="1">
+              <a:lnSpc>
+                <a:spcPct val="90000"/>
+              </a:lnSpc>
+              <a:spcBef>
+                <a:spcPts val="500"/>
+              </a:spcBef>
+              <a:buFont typeface="Arial" panose="020B0604020202020204" pitchFamily="34" charset="0"/>
+              <a:buNone/>
+              <a:defRPr sz="2000" kern="1200">
+                <a:solidFill>
+                  <a:schemeClr val="tx1"/>
+                </a:solidFill>
+                <a:latin typeface="+mn-lt"/>
+                <a:ea typeface="+mn-ea"/>
+                <a:cs typeface="+mn-cs"/>
+              </a:defRPr>
+            </a:lvl2pPr>
+            <a:lvl3pPr marL="914400" indent="0" algn="ctr" defTabSz="914400" rtl="0" eaLnBrk="1" latinLnBrk="0" hangingPunct="1">
+              <a:lnSpc>
+                <a:spcPct val="90000"/>
+              </a:lnSpc>
+              <a:spcBef>
+                <a:spcPts val="500"/>
+              </a:spcBef>
+              <a:buFont typeface="Arial" panose="020B0604020202020204" pitchFamily="34" charset="0"/>
+              <a:buNone/>
+              <a:defRPr sz="1800" kern="1200">
+                <a:solidFill>
+                  <a:schemeClr val="tx1"/>
+                </a:solidFill>
+                <a:latin typeface="+mn-lt"/>
+                <a:ea typeface="+mn-ea"/>
+                <a:cs typeface="+mn-cs"/>
+              </a:defRPr>
+            </a:lvl3pPr>
+            <a:lvl4pPr marL="1371600" indent="0" algn="ctr" defTabSz="914400" rtl="0" eaLnBrk="1" latinLnBrk="0" hangingPunct="1">
+              <a:lnSpc>
+                <a:spcPct val="90000"/>
+              </a:lnSpc>
+              <a:spcBef>
+                <a:spcPts val="500"/>
+              </a:spcBef>
+              <a:buFont typeface="Arial" panose="020B0604020202020204" pitchFamily="34" charset="0"/>
+              <a:buNone/>
+              <a:defRPr sz="1600" kern="1200">
+                <a:solidFill>
+                  <a:schemeClr val="tx1"/>
+                </a:solidFill>
+                <a:latin typeface="+mn-lt"/>
+                <a:ea typeface="+mn-ea"/>
+                <a:cs typeface="+mn-cs"/>
+              </a:defRPr>
+            </a:lvl4pPr>
+            <a:lvl5pPr marL="1828800" indent="0" algn="ctr" defTabSz="914400" rtl="0" eaLnBrk="1" latinLnBrk="0" hangingPunct="1">
+              <a:lnSpc>
+                <a:spcPct val="90000"/>
+              </a:lnSpc>
+              <a:spcBef>
+                <a:spcPts val="500"/>
+              </a:spcBef>
+              <a:buFont typeface="Arial" panose="020B0604020202020204" pitchFamily="34" charset="0"/>
+              <a:buNone/>
+              <a:defRPr sz="1600" kern="1200">
+                <a:solidFill>
+                  <a:schemeClr val="tx1"/>
+                </a:solidFill>
+                <a:latin typeface="+mn-lt"/>
+                <a:ea typeface="+mn-ea"/>
+                <a:cs typeface="+mn-cs"/>
+              </a:defRPr>
+            </a:lvl5pPr>
+            <a:lvl6pPr marL="2286000" indent="0" algn="ctr" defTabSz="914400" rtl="0" eaLnBrk="1" latinLnBrk="0" hangingPunct="1">
+              <a:lnSpc>
+                <a:spcPct val="90000"/>
+              </a:lnSpc>
+              <a:spcBef>
+                <a:spcPts val="500"/>
+              </a:spcBef>
+              <a:buFont typeface="Arial" panose="020B0604020202020204" pitchFamily="34" charset="0"/>
+              <a:buNone/>
+              <a:defRPr sz="1600" kern="1200">
+                <a:solidFill>
+                  <a:schemeClr val="tx1"/>
+                </a:solidFill>
+                <a:latin typeface="+mn-lt"/>
+                <a:ea typeface="+mn-ea"/>
+                <a:cs typeface="+mn-cs"/>
+              </a:defRPr>
+            </a:lvl6pPr>
+            <a:lvl7pPr marL="2743200" indent="0" algn="ctr" defTabSz="914400" rtl="0" eaLnBrk="1" latinLnBrk="0" hangingPunct="1">
+              <a:lnSpc>
+                <a:spcPct val="90000"/>
+              </a:lnSpc>
+              <a:spcBef>
+                <a:spcPts val="500"/>
+              </a:spcBef>
+              <a:buFont typeface="Arial" panose="020B0604020202020204" pitchFamily="34" charset="0"/>
+              <a:buNone/>
+              <a:defRPr sz="1600" kern="1200">
+                <a:solidFill>
+                  <a:schemeClr val="tx1"/>
+                </a:solidFill>
+                <a:latin typeface="+mn-lt"/>
+                <a:ea typeface="+mn-ea"/>
+                <a:cs typeface="+mn-cs"/>
+              </a:defRPr>
+            </a:lvl7pPr>
+            <a:lvl8pPr marL="3200400" indent="0" algn="ctr" defTabSz="914400" rtl="0" eaLnBrk="1" latinLnBrk="0" hangingPunct="1">
+              <a:lnSpc>
+                <a:spcPct val="90000"/>
+              </a:lnSpc>
+              <a:spcBef>
+                <a:spcPts val="500"/>
+              </a:spcBef>
+              <a:buFont typeface="Arial" panose="020B0604020202020204" pitchFamily="34" charset="0"/>
+              <a:buNone/>
+              <a:defRPr sz="1600" kern="1200">
+                <a:solidFill>
+                  <a:schemeClr val="tx1"/>
+                </a:solidFill>
+                <a:latin typeface="+mn-lt"/>
+                <a:ea typeface="+mn-ea"/>
+                <a:cs typeface="+mn-cs"/>
+              </a:defRPr>
+            </a:lvl8pPr>
+            <a:lvl9pPr marL="3657600" indent="0" algn="ctr" defTabSz="914400" rtl="0" eaLnBrk="1" latinLnBrk="0" hangingPunct="1">
+              <a:lnSpc>
+                <a:spcPct val="90000"/>
+              </a:lnSpc>
+              <a:spcBef>
+                <a:spcPts val="500"/>
+              </a:spcBef>
+              <a:buFont typeface="Arial" panose="020B0604020202020204" pitchFamily="34" charset="0"/>
+              <a:buNone/>
+              <a:defRPr sz="1600" kern="1200">
+                <a:solidFill>
+                  <a:schemeClr val="tx1"/>
+                </a:solidFill>
+                <a:latin typeface="+mn-lt"/>
+                <a:ea typeface="+mn-ea"/>
+                <a:cs typeface="+mn-cs"/>
+              </a:defRPr>
+            </a:lvl9pPr>
+          </a:lstStyle>
+          <a:p>
+            <a:r>
+              <a:rPr lang="hu-HU" sz="1600" b="1" dirty="0">
+                <a:latin typeface="Times New Roman" panose="02020603050405020304" pitchFamily="18" charset="0"/>
+                <a:cs typeface="Times New Roman" panose="02020603050405020304" pitchFamily="18" charset="0"/>
+              </a:rPr>
+              <a:t>Bozó Attila Péter</a:t>
+            </a:r>
+          </a:p>
+        </p:txBody>
+      </p:sp>
+      <p:pic>
+        <p:nvPicPr>
+          <p:cNvPr id="6" name="Kép 5">
+            <a:extLst>
+              <a:ext uri="{FF2B5EF4-FFF2-40B4-BE49-F238E27FC236}">
+                <a16:creationId xmlns:a16="http://schemas.microsoft.com/office/drawing/2014/main" id="{0EA2C2C0-7CB5-4EDA-A1C1-20F14502A99B}"/>
+              </a:ext>
+            </a:extLst>
+          </p:cNvPr>
+          <p:cNvPicPr>
+            <a:picLocks noChangeAspect="1"/>
+          </p:cNvPicPr>
+          <p:nvPr/>
+        </p:nvPicPr>
+        <p:blipFill>
+          <a:blip r:embed="rId2">
+            <a:extLst>
+              <a:ext uri="{BEBA8EAE-BF5A-486C-A8C5-ECC9F3942E4B}">
+                <a14:imgProps xmlns:a14="http://schemas.microsoft.com/office/drawing/2010/main">
+                  <a14:imgLayer r:embed="rId3">
+                    <a14:imgEffect>
+                      <a14:saturation sat="0"/>
+                    </a14:imgEffect>
+                    <a14:imgEffect>
+                      <a14:brightnessContrast contrast="100000"/>
+                    </a14:imgEffect>
+                  </a14:imgLayer>
+                </a14:imgProps>
+              </a:ext>
+              <a:ext uri="{28A0092B-C50C-407E-A947-70E740481C1C}">
+                <a14:useLocalDpi xmlns:a14="http://schemas.microsoft.com/office/drawing/2010/main" val="0"/>
+              </a:ext>
+            </a:extLst>
+          </a:blip>
+          <a:stretch>
+            <a:fillRect/>
+          </a:stretch>
+        </p:blipFill>
+        <p:spPr>
+          <a:xfrm>
+            <a:off x="4915578" y="93837"/>
+            <a:ext cx="2360840" cy="2022884"/>
+          </a:xfrm>
+          <a:prstGeom prst="rect">
+            <a:avLst/>
+          </a:prstGeom>
+        </p:spPr>
+      </p:pic>
+      <p:sp>
+        <p:nvSpPr>
+          <p:cNvPr id="8" name="Téglalap: lekerekített 7">
+            <a:extLst>
+              <a:ext uri="{FF2B5EF4-FFF2-40B4-BE49-F238E27FC236}">
+                <a16:creationId xmlns:a16="http://schemas.microsoft.com/office/drawing/2014/main" id="{BC87AA45-369F-4D7A-826E-FE393A058A28}"/>
+              </a:ext>
+            </a:extLst>
+          </p:cNvPr>
+          <p:cNvSpPr/>
+          <p:nvPr/>
+        </p:nvSpPr>
+        <p:spPr>
+          <a:xfrm rot="5400000">
+            <a:off x="15123720" y="-25811"/>
+            <a:ext cx="1628039" cy="6073974"/>
+          </a:xfrm>
+          <a:prstGeom prst="roundRect">
+            <a:avLst>
+              <a:gd name="adj" fmla="val 50000"/>
+            </a:avLst>
+          </a:prstGeom>
+          <a:gradFill flip="none" rotWithShape="1">
+            <a:gsLst>
+              <a:gs pos="0">
+                <a:schemeClr val="bg1">
+                  <a:shade val="30000"/>
+                  <a:satMod val="115000"/>
+                </a:schemeClr>
+              </a:gs>
+              <a:gs pos="50000">
+                <a:schemeClr val="bg1">
+                  <a:shade val="67500"/>
+                  <a:satMod val="115000"/>
+                </a:schemeClr>
+              </a:gs>
+              <a:gs pos="100000">
+                <a:schemeClr val="bg1">
+                  <a:shade val="100000"/>
+                  <a:satMod val="115000"/>
+                </a:schemeClr>
+              </a:gs>
+            </a:gsLst>
+            <a:lin ang="5400000" scaled="1"/>
+            <a:tileRect/>
+          </a:gradFill>
+          <a:ln>
+            <a:solidFill>
+              <a:schemeClr val="bg1"/>
+            </a:solidFill>
+          </a:ln>
+          <a:effectLst>
+            <a:innerShdw blurRad="114300">
+              <a:prstClr val="black"/>
+            </a:innerShdw>
+          </a:effectLst>
+        </p:spPr>
+        <p:style>
+          <a:lnRef idx="2">
+            <a:schemeClr val="accent1">
+              <a:shade val="50000"/>
+            </a:schemeClr>
+          </a:lnRef>
+          <a:fillRef idx="1">
+            <a:schemeClr val="accent1"/>
+          </a:fillRef>
+          <a:effectRef idx="0">
+            <a:schemeClr val="accent1"/>
+          </a:effectRef>
+          <a:fontRef idx="minor">
+            <a:schemeClr val="lt1"/>
+          </a:fontRef>
+        </p:style>
+        <p:txBody>
+          <a:bodyPr rot="0" spcFirstLastPara="0" vertOverflow="overflow" horzOverflow="overflow" vert="horz" wrap="square" lIns="91440" tIns="45720" rIns="91440" bIns="45720" numCol="1" spcCol="0" rtlCol="0" fromWordArt="0" anchor="ctr" anchorCtr="0" forceAA="0" compatLnSpc="1">
+            <a:prstTxWarp prst="textNoShape">
+              <a:avLst/>
+            </a:prstTxWarp>
+            <a:noAutofit/>
+          </a:bodyPr>
+          <a:lstStyle/>
+          <a:p>
+            <a:pPr algn="ctr"/>
+            <a:endParaRPr lang="hu-HU"/>
+          </a:p>
+        </p:txBody>
+      </p:sp>
+      <p:sp>
+        <p:nvSpPr>
+          <p:cNvPr id="21" name="Téglalap: lekerekített 20">
+            <a:extLst>
+              <a:ext uri="{FF2B5EF4-FFF2-40B4-BE49-F238E27FC236}">
+                <a16:creationId xmlns:a16="http://schemas.microsoft.com/office/drawing/2014/main" id="{D891EC16-3552-4FE1-AED1-E497DBF2C12B}"/>
+              </a:ext>
+            </a:extLst>
+          </p:cNvPr>
+          <p:cNvSpPr/>
+          <p:nvPr/>
+        </p:nvSpPr>
+        <p:spPr>
+          <a:xfrm rot="5400000">
+            <a:off x="5281977" y="-25811"/>
+            <a:ext cx="1628039" cy="6073974"/>
+          </a:xfrm>
+          <a:prstGeom prst="roundRect">
+            <a:avLst>
+              <a:gd name="adj" fmla="val 50000"/>
+            </a:avLst>
+          </a:prstGeom>
+          <a:gradFill flip="none" rotWithShape="1">
+            <a:gsLst>
+              <a:gs pos="0">
+                <a:schemeClr val="bg1">
+                  <a:shade val="30000"/>
+                  <a:satMod val="115000"/>
+                </a:schemeClr>
+              </a:gs>
+              <a:gs pos="50000">
+                <a:schemeClr val="bg1">
+                  <a:shade val="67500"/>
+                  <a:satMod val="115000"/>
+                </a:schemeClr>
+              </a:gs>
+              <a:gs pos="100000">
+                <a:schemeClr val="bg1">
+                  <a:shade val="100000"/>
+                  <a:satMod val="115000"/>
+                </a:schemeClr>
+              </a:gs>
+            </a:gsLst>
+            <a:lin ang="5400000" scaled="1"/>
+            <a:tileRect/>
+          </a:gradFill>
+          <a:ln>
+            <a:solidFill>
+              <a:schemeClr val="bg1"/>
+            </a:solidFill>
+          </a:ln>
+          <a:effectLst>
+            <a:innerShdw blurRad="114300">
+              <a:prstClr val="black"/>
+            </a:innerShdw>
+          </a:effectLst>
+        </p:spPr>
+        <p:style>
+          <a:lnRef idx="2">
+            <a:schemeClr val="accent1">
+              <a:shade val="50000"/>
+            </a:schemeClr>
+          </a:lnRef>
+          <a:fillRef idx="1">
+            <a:schemeClr val="accent1"/>
+          </a:fillRef>
+          <a:effectRef idx="0">
+            <a:schemeClr val="accent1"/>
+          </a:effectRef>
+          <a:fontRef idx="minor">
+            <a:schemeClr val="lt1"/>
+          </a:fontRef>
+        </p:style>
+        <p:txBody>
+          <a:bodyPr rot="0" spcFirstLastPara="0" vertOverflow="overflow" horzOverflow="overflow" vert="horz" wrap="square" lIns="91440" tIns="45720" rIns="91440" bIns="45720" numCol="1" spcCol="0" rtlCol="0" fromWordArt="0" anchor="ctr" anchorCtr="0" forceAA="0" compatLnSpc="1">
+            <a:prstTxWarp prst="textNoShape">
+              <a:avLst/>
+            </a:prstTxWarp>
+            <a:noAutofit/>
+          </a:bodyPr>
+          <a:lstStyle/>
+          <a:p>
+            <a:pPr algn="ctr"/>
+            <a:endParaRPr lang="hu-HU"/>
+          </a:p>
+        </p:txBody>
+      </p:sp>
+      <p:sp>
+        <p:nvSpPr>
+          <p:cNvPr id="23" name="Alcím 2">
+            <a:extLst>
+              <a:ext uri="{FF2B5EF4-FFF2-40B4-BE49-F238E27FC236}">
+                <a16:creationId xmlns:a16="http://schemas.microsoft.com/office/drawing/2014/main" id="{130EC767-0828-4712-AD08-FF0C733F5B9B}"/>
+              </a:ext>
+            </a:extLst>
+          </p:cNvPr>
+          <p:cNvSpPr txBox="1">
+            <a:spLocks/>
+          </p:cNvSpPr>
+          <p:nvPr/>
+        </p:nvSpPr>
+        <p:spPr>
+          <a:xfrm>
+            <a:off x="4105269" y="2673825"/>
+            <a:ext cx="3981454" cy="674702"/>
+          </a:xfrm>
+          <a:prstGeom prst="rect">
+            <a:avLst/>
+          </a:prstGeom>
+        </p:spPr>
+        <p:txBody>
+          <a:bodyPr vert="horz" lIns="91440" tIns="45720" rIns="91440" bIns="45720" rtlCol="0">
+            <a:normAutofit fontScale="85000" lnSpcReduction="10000"/>
+          </a:bodyPr>
+          <a:lstStyle>
+            <a:lvl1pPr marL="0" indent="0" algn="ctr" defTabSz="914400" rtl="0" eaLnBrk="1" latinLnBrk="0" hangingPunct="1">
+              <a:lnSpc>
+                <a:spcPct val="90000"/>
+              </a:lnSpc>
+              <a:spcBef>
+                <a:spcPts val="1000"/>
+              </a:spcBef>
+              <a:buFont typeface="Arial" panose="020B0604020202020204" pitchFamily="34" charset="0"/>
+              <a:buNone/>
+              <a:defRPr sz="2400" kern="1200">
+                <a:solidFill>
+                  <a:schemeClr val="tx1"/>
+                </a:solidFill>
+                <a:latin typeface="+mn-lt"/>
+                <a:ea typeface="+mn-ea"/>
+                <a:cs typeface="+mn-cs"/>
+              </a:defRPr>
+            </a:lvl1pPr>
+            <a:lvl2pPr marL="457200" indent="0" algn="ctr" defTabSz="914400" rtl="0" eaLnBrk="1" latinLnBrk="0" hangingPunct="1">
+              <a:lnSpc>
+                <a:spcPct val="90000"/>
+              </a:lnSpc>
+              <a:spcBef>
+                <a:spcPts val="500"/>
+              </a:spcBef>
+              <a:buFont typeface="Arial" panose="020B0604020202020204" pitchFamily="34" charset="0"/>
+              <a:buNone/>
+              <a:defRPr sz="2000" kern="1200">
+                <a:solidFill>
+                  <a:schemeClr val="tx1"/>
+                </a:solidFill>
+                <a:latin typeface="+mn-lt"/>
+                <a:ea typeface="+mn-ea"/>
+                <a:cs typeface="+mn-cs"/>
+              </a:defRPr>
+            </a:lvl2pPr>
+            <a:lvl3pPr marL="914400" indent="0" algn="ctr" defTabSz="914400" rtl="0" eaLnBrk="1" latinLnBrk="0" hangingPunct="1">
+              <a:lnSpc>
+                <a:spcPct val="90000"/>
+              </a:lnSpc>
+              <a:spcBef>
+                <a:spcPts val="500"/>
+              </a:spcBef>
+              <a:buFont typeface="Arial" panose="020B0604020202020204" pitchFamily="34" charset="0"/>
+              <a:buNone/>
+              <a:defRPr sz="1800" kern="1200">
+                <a:solidFill>
+                  <a:schemeClr val="tx1"/>
+                </a:solidFill>
+                <a:latin typeface="+mn-lt"/>
+                <a:ea typeface="+mn-ea"/>
+                <a:cs typeface="+mn-cs"/>
+              </a:defRPr>
+            </a:lvl3pPr>
+            <a:lvl4pPr marL="1371600" indent="0" algn="ctr" defTabSz="914400" rtl="0" eaLnBrk="1" latinLnBrk="0" hangingPunct="1">
+              <a:lnSpc>
+                <a:spcPct val="90000"/>
+              </a:lnSpc>
+              <a:spcBef>
+                <a:spcPts val="500"/>
+              </a:spcBef>
+              <a:buFont typeface="Arial" panose="020B0604020202020204" pitchFamily="34" charset="0"/>
+              <a:buNone/>
+              <a:defRPr sz="1600" kern="1200">
+                <a:solidFill>
+                  <a:schemeClr val="tx1"/>
+                </a:solidFill>
+                <a:latin typeface="+mn-lt"/>
+                <a:ea typeface="+mn-ea"/>
+                <a:cs typeface="+mn-cs"/>
+              </a:defRPr>
+            </a:lvl4pPr>
+            <a:lvl5pPr marL="1828800" indent="0" algn="ctr" defTabSz="914400" rtl="0" eaLnBrk="1" latinLnBrk="0" hangingPunct="1">
+              <a:lnSpc>
+                <a:spcPct val="90000"/>
+              </a:lnSpc>
+              <a:spcBef>
+                <a:spcPts val="500"/>
+              </a:spcBef>
+              <a:buFont typeface="Arial" panose="020B0604020202020204" pitchFamily="34" charset="0"/>
+              <a:buNone/>
+              <a:defRPr sz="1600" kern="1200">
+                <a:solidFill>
+                  <a:schemeClr val="tx1"/>
+                </a:solidFill>
+                <a:latin typeface="+mn-lt"/>
+                <a:ea typeface="+mn-ea"/>
+                <a:cs typeface="+mn-cs"/>
+              </a:defRPr>
+            </a:lvl5pPr>
+            <a:lvl6pPr marL="2286000" indent="0" algn="ctr" defTabSz="914400" rtl="0" eaLnBrk="1" latinLnBrk="0" hangingPunct="1">
+              <a:lnSpc>
+                <a:spcPct val="90000"/>
+              </a:lnSpc>
+              <a:spcBef>
+                <a:spcPts val="500"/>
+              </a:spcBef>
+              <a:buFont typeface="Arial" panose="020B0604020202020204" pitchFamily="34" charset="0"/>
+              <a:buNone/>
+              <a:defRPr sz="1600" kern="1200">
+                <a:solidFill>
+                  <a:schemeClr val="tx1"/>
+                </a:solidFill>
+                <a:latin typeface="+mn-lt"/>
+                <a:ea typeface="+mn-ea"/>
+                <a:cs typeface="+mn-cs"/>
+              </a:defRPr>
+            </a:lvl6pPr>
+            <a:lvl7pPr marL="2743200" indent="0" algn="ctr" defTabSz="914400" rtl="0" eaLnBrk="1" latinLnBrk="0" hangingPunct="1">
+              <a:lnSpc>
+                <a:spcPct val="90000"/>
+              </a:lnSpc>
+              <a:spcBef>
+                <a:spcPts val="500"/>
+              </a:spcBef>
+              <a:buFont typeface="Arial" panose="020B0604020202020204" pitchFamily="34" charset="0"/>
+              <a:buNone/>
+              <a:defRPr sz="1600" kern="1200">
+                <a:solidFill>
+                  <a:schemeClr val="tx1"/>
+                </a:solidFill>
+                <a:latin typeface="+mn-lt"/>
+                <a:ea typeface="+mn-ea"/>
+                <a:cs typeface="+mn-cs"/>
+              </a:defRPr>
+            </a:lvl7pPr>
+            <a:lvl8pPr marL="3200400" indent="0" algn="ctr" defTabSz="914400" rtl="0" eaLnBrk="1" latinLnBrk="0" hangingPunct="1">
+              <a:lnSpc>
+                <a:spcPct val="90000"/>
+              </a:lnSpc>
+              <a:spcBef>
+                <a:spcPts val="500"/>
+              </a:spcBef>
+              <a:buFont typeface="Arial" panose="020B0604020202020204" pitchFamily="34" charset="0"/>
+              <a:buNone/>
+              <a:defRPr sz="1600" kern="1200">
+                <a:solidFill>
+                  <a:schemeClr val="tx1"/>
+                </a:solidFill>
+                <a:latin typeface="+mn-lt"/>
+                <a:ea typeface="+mn-ea"/>
+                <a:cs typeface="+mn-cs"/>
+              </a:defRPr>
+            </a:lvl8pPr>
+            <a:lvl9pPr marL="3657600" indent="0" algn="ctr" defTabSz="914400" rtl="0" eaLnBrk="1" latinLnBrk="0" hangingPunct="1">
+              <a:lnSpc>
+                <a:spcPct val="90000"/>
+              </a:lnSpc>
+              <a:spcBef>
+                <a:spcPts val="500"/>
+              </a:spcBef>
+              <a:buFont typeface="Arial" panose="020B0604020202020204" pitchFamily="34" charset="0"/>
+              <a:buNone/>
+              <a:defRPr sz="1600" kern="1200">
+                <a:solidFill>
+                  <a:schemeClr val="tx1"/>
+                </a:solidFill>
+                <a:latin typeface="+mn-lt"/>
+                <a:ea typeface="+mn-ea"/>
+                <a:cs typeface="+mn-cs"/>
+              </a:defRPr>
+            </a:lvl9pPr>
+          </a:lstStyle>
+          <a:p>
+            <a:r>
+              <a:rPr lang="hu-HU" sz="4400" b="1" dirty="0">
+                <a:latin typeface="Times New Roman" panose="02020603050405020304" pitchFamily="18" charset="0"/>
+                <a:cs typeface="Times New Roman" panose="02020603050405020304" pitchFamily="18" charset="0"/>
+              </a:rPr>
+              <a:t>Hogyan működik?</a:t>
+            </a:r>
+          </a:p>
+        </p:txBody>
+      </p:sp>
+      <p:pic>
+        <p:nvPicPr>
+          <p:cNvPr id="1026" name="Picture 2" descr="Eclipse Mosquitto | projects.eclipse.org">
+            <a:extLst>
+              <a:ext uri="{FF2B5EF4-FFF2-40B4-BE49-F238E27FC236}">
+                <a16:creationId xmlns:a16="http://schemas.microsoft.com/office/drawing/2014/main" id="{E5FE1074-9572-4166-BA16-F8873A23BFF9}"/>
+              </a:ext>
+            </a:extLst>
+          </p:cNvPr>
+          <p:cNvPicPr>
+            <a:picLocks noChangeAspect="1" noChangeArrowheads="1"/>
+          </p:cNvPicPr>
+          <p:nvPr/>
+        </p:nvPicPr>
+        <p:blipFill>
+          <a:blip r:embed="rId4">
+            <a:extLst>
+              <a:ext uri="{BEBA8EAE-BF5A-486C-A8C5-ECC9F3942E4B}">
+                <a14:imgProps xmlns:a14="http://schemas.microsoft.com/office/drawing/2010/main">
+                  <a14:imgLayer r:embed="rId5">
+                    <a14:imgEffect>
+                      <a14:brightnessContrast bright="-100000"/>
+                    </a14:imgEffect>
+                  </a14:imgLayer>
+                </a14:imgProps>
+              </a:ext>
+              <a:ext uri="{28A0092B-C50C-407E-A947-70E740481C1C}">
+                <a14:useLocalDpi xmlns:a14="http://schemas.microsoft.com/office/drawing/2010/main" val="0"/>
+              </a:ext>
+            </a:extLst>
+          </a:blip>
+          <a:srcRect/>
+          <a:stretch>
+            <a:fillRect/>
+          </a:stretch>
+        </p:blipFill>
+        <p:spPr bwMode="auto">
+          <a:xfrm>
+            <a:off x="892796" y="696814"/>
+            <a:ext cx="1441530" cy="1419907"/>
+          </a:xfrm>
+          <a:prstGeom prst="rect">
+            <a:avLst/>
+          </a:prstGeom>
+          <a:noFill/>
+          <a:extLst>
+            <a:ext uri="{909E8E84-426E-40DD-AFC4-6F175D3DCCD1}">
+              <a14:hiddenFill xmlns:a14="http://schemas.microsoft.com/office/drawing/2010/main">
+                <a:solidFill>
+                  <a:srgbClr val="FFFFFF"/>
+                </a:solidFill>
+              </a14:hiddenFill>
+            </a:ext>
+          </a:extLst>
+        </p:spPr>
+      </p:pic>
+      <p:pic>
+        <p:nvPicPr>
+          <p:cNvPr id="1028" name="Picture 4" descr="HiveMQ Reviews 2026: Details, Pricing, &amp; Features | G2">
+            <a:extLst>
+              <a:ext uri="{FF2B5EF4-FFF2-40B4-BE49-F238E27FC236}">
+                <a16:creationId xmlns:a16="http://schemas.microsoft.com/office/drawing/2014/main" id="{03063086-1D8B-4095-9848-6F0586C75FAB}"/>
+              </a:ext>
+            </a:extLst>
+          </p:cNvPr>
+          <p:cNvPicPr>
+            <a:picLocks noChangeAspect="1" noChangeArrowheads="1"/>
+          </p:cNvPicPr>
+          <p:nvPr/>
+        </p:nvPicPr>
+        <p:blipFill rotWithShape="1">
+          <a:blip r:embed="rId6">
+            <a:extLst>
+              <a:ext uri="{BEBA8EAE-BF5A-486C-A8C5-ECC9F3942E4B}">
+                <a14:imgProps xmlns:a14="http://schemas.microsoft.com/office/drawing/2010/main">
+                  <a14:imgLayer r:embed="rId7">
+                    <a14:imgEffect>
+                      <a14:saturation sat="0"/>
+                    </a14:imgEffect>
+                    <a14:imgEffect>
+                      <a14:brightnessContrast contrast="100000"/>
+                    </a14:imgEffect>
+                  </a14:imgLayer>
+                </a14:imgProps>
+              </a:ext>
+              <a:ext uri="{28A0092B-C50C-407E-A947-70E740481C1C}">
+                <a14:useLocalDpi xmlns:a14="http://schemas.microsoft.com/office/drawing/2010/main" val="0"/>
+              </a:ext>
+            </a:extLst>
+          </a:blip>
+          <a:srcRect l="22083" r="21556"/>
+          <a:stretch/>
+        </p:blipFill>
+        <p:spPr bwMode="auto">
+          <a:xfrm>
+            <a:off x="580537" y="2718112"/>
+            <a:ext cx="1526351" cy="1421775"/>
+          </a:xfrm>
+          <a:prstGeom prst="rect">
+            <a:avLst/>
+          </a:prstGeom>
+          <a:noFill/>
+          <a:extLst>
+            <a:ext uri="{909E8E84-426E-40DD-AFC4-6F175D3DCCD1}">
+              <a14:hiddenFill xmlns:a14="http://schemas.microsoft.com/office/drawing/2010/main">
+                <a:solidFill>
+                  <a:srgbClr val="FFFFFF"/>
+                </a:solidFill>
+              </a14:hiddenFill>
+            </a:ext>
+          </a:extLst>
+        </p:spPr>
+      </p:pic>
+      <p:pic>
+        <p:nvPicPr>
+          <p:cNvPr id="1030" name="Picture 6" descr="Cosmos">
+            <a:extLst>
+              <a:ext uri="{FF2B5EF4-FFF2-40B4-BE49-F238E27FC236}">
+                <a16:creationId xmlns:a16="http://schemas.microsoft.com/office/drawing/2014/main" id="{5BB01DAE-2019-4CA8-A258-E94C543093D9}"/>
+              </a:ext>
+            </a:extLst>
+          </p:cNvPr>
+          <p:cNvPicPr>
+            <a:picLocks noChangeAspect="1" noChangeArrowheads="1"/>
+          </p:cNvPicPr>
+          <p:nvPr/>
+        </p:nvPicPr>
+        <p:blipFill>
+          <a:blip r:embed="rId8">
+            <a:extLst>
+              <a:ext uri="{BEBA8EAE-BF5A-486C-A8C5-ECC9F3942E4B}">
+                <a14:imgProps xmlns:a14="http://schemas.microsoft.com/office/drawing/2010/main">
+                  <a14:imgLayer r:embed="rId9">
+                    <a14:imgEffect>
+                      <a14:brightnessContrast bright="-100000"/>
+                    </a14:imgEffect>
+                  </a14:imgLayer>
+                </a14:imgProps>
+              </a:ext>
+              <a:ext uri="{28A0092B-C50C-407E-A947-70E740481C1C}">
+                <a14:useLocalDpi xmlns:a14="http://schemas.microsoft.com/office/drawing/2010/main" val="0"/>
+              </a:ext>
+            </a:extLst>
+          </a:blip>
+          <a:srcRect/>
+          <a:stretch>
+            <a:fillRect/>
+          </a:stretch>
+        </p:blipFill>
+        <p:spPr bwMode="auto">
+          <a:xfrm>
+            <a:off x="1531053" y="4488306"/>
+            <a:ext cx="1606547" cy="1606547"/>
+          </a:xfrm>
+          <a:prstGeom prst="rect">
+            <a:avLst/>
+          </a:prstGeom>
+          <a:noFill/>
+          <a:extLst>
+            <a:ext uri="{909E8E84-426E-40DD-AFC4-6F175D3DCCD1}">
+              <a14:hiddenFill xmlns:a14="http://schemas.microsoft.com/office/drawing/2010/main">
+                <a:solidFill>
+                  <a:srgbClr val="FFFFFF"/>
+                </a:solidFill>
+              </a14:hiddenFill>
+            </a:ext>
+          </a:extLst>
+        </p:spPr>
+      </p:pic>
+    </p:spTree>
+    <p:extLst>
+      <p:ext uri="{BB962C8B-B14F-4D97-AF65-F5344CB8AC3E}">
+        <p14:creationId xmlns:p14="http://schemas.microsoft.com/office/powerpoint/2010/main" val="2985949554"/>
       </p:ext>
     </p:extLst>
   </p:cSld>

--- a/MQTT Bozó Attila Péter.pptx
+++ b/MQTT Bozó Attila Péter.pptx
@@ -9,6 +9,7 @@
     <p:sldId id="257" r:id="rId3"/>
     <p:sldId id="258" r:id="rId4"/>
     <p:sldId id="259" r:id="rId5"/>
+    <p:sldId id="260" r:id="rId6"/>
   </p:sldIdLst>
   <p:sldSz cx="12192000" cy="6858000"/>
   <p:notesSz cx="6858000" cy="9144000"/>
@@ -262,7 +263,7 @@
           <a:p>
             <a:fld id="{C1E3846D-CD3F-47E2-B16B-088B38F459EC}" type="datetimeFigureOut">
               <a:rPr lang="hu-HU" smtClean="0"/>
-              <a:t>2026. 01. 06.</a:t>
+              <a:t>2026. 01. 08.</a:t>
             </a:fld>
             <a:endParaRPr lang="hu-HU"/>
           </a:p>
@@ -460,7 +461,7 @@
           <a:p>
             <a:fld id="{C1E3846D-CD3F-47E2-B16B-088B38F459EC}" type="datetimeFigureOut">
               <a:rPr lang="hu-HU" smtClean="0"/>
-              <a:t>2026. 01. 06.</a:t>
+              <a:t>2026. 01. 08.</a:t>
             </a:fld>
             <a:endParaRPr lang="hu-HU"/>
           </a:p>
@@ -668,7 +669,7 @@
           <a:p>
             <a:fld id="{C1E3846D-CD3F-47E2-B16B-088B38F459EC}" type="datetimeFigureOut">
               <a:rPr lang="hu-HU" smtClean="0"/>
-              <a:t>2026. 01. 06.</a:t>
+              <a:t>2026. 01. 08.</a:t>
             </a:fld>
             <a:endParaRPr lang="hu-HU"/>
           </a:p>
@@ -866,7 +867,7 @@
           <a:p>
             <a:fld id="{C1E3846D-CD3F-47E2-B16B-088B38F459EC}" type="datetimeFigureOut">
               <a:rPr lang="hu-HU" smtClean="0"/>
-              <a:t>2026. 01. 06.</a:t>
+              <a:t>2026. 01. 08.</a:t>
             </a:fld>
             <a:endParaRPr lang="hu-HU"/>
           </a:p>
@@ -1141,7 +1142,7 @@
           <a:p>
             <a:fld id="{C1E3846D-CD3F-47E2-B16B-088B38F459EC}" type="datetimeFigureOut">
               <a:rPr lang="hu-HU" smtClean="0"/>
-              <a:t>2026. 01. 06.</a:t>
+              <a:t>2026. 01. 08.</a:t>
             </a:fld>
             <a:endParaRPr lang="hu-HU"/>
           </a:p>
@@ -1406,7 +1407,7 @@
           <a:p>
             <a:fld id="{C1E3846D-CD3F-47E2-B16B-088B38F459EC}" type="datetimeFigureOut">
               <a:rPr lang="hu-HU" smtClean="0"/>
-              <a:t>2026. 01. 06.</a:t>
+              <a:t>2026. 01. 08.</a:t>
             </a:fld>
             <a:endParaRPr lang="hu-HU"/>
           </a:p>
@@ -1818,7 +1819,7 @@
           <a:p>
             <a:fld id="{C1E3846D-CD3F-47E2-B16B-088B38F459EC}" type="datetimeFigureOut">
               <a:rPr lang="hu-HU" smtClean="0"/>
-              <a:t>2026. 01. 06.</a:t>
+              <a:t>2026. 01. 08.</a:t>
             </a:fld>
             <a:endParaRPr lang="hu-HU"/>
           </a:p>
@@ -1959,7 +1960,7 @@
           <a:p>
             <a:fld id="{C1E3846D-CD3F-47E2-B16B-088B38F459EC}" type="datetimeFigureOut">
               <a:rPr lang="hu-HU" smtClean="0"/>
-              <a:t>2026. 01. 06.</a:t>
+              <a:t>2026. 01. 08.</a:t>
             </a:fld>
             <a:endParaRPr lang="hu-HU"/>
           </a:p>
@@ -2072,7 +2073,7 @@
           <a:p>
             <a:fld id="{C1E3846D-CD3F-47E2-B16B-088B38F459EC}" type="datetimeFigureOut">
               <a:rPr lang="hu-HU" smtClean="0"/>
-              <a:t>2026. 01. 06.</a:t>
+              <a:t>2026. 01. 08.</a:t>
             </a:fld>
             <a:endParaRPr lang="hu-HU"/>
           </a:p>
@@ -2383,7 +2384,7 @@
           <a:p>
             <a:fld id="{C1E3846D-CD3F-47E2-B16B-088B38F459EC}" type="datetimeFigureOut">
               <a:rPr lang="hu-HU" smtClean="0"/>
-              <a:t>2026. 01. 06.</a:t>
+              <a:t>2026. 01. 08.</a:t>
             </a:fld>
             <a:endParaRPr lang="hu-HU"/>
           </a:p>
@@ -2671,7 +2672,7 @@
           <a:p>
             <a:fld id="{C1E3846D-CD3F-47E2-B16B-088B38F459EC}" type="datetimeFigureOut">
               <a:rPr lang="hu-HU" smtClean="0"/>
-              <a:t>2026. 01. 06.</a:t>
+              <a:t>2026. 01. 08.</a:t>
             </a:fld>
             <a:endParaRPr lang="hu-HU"/>
           </a:p>
@@ -2912,7 +2913,7 @@
           <a:p>
             <a:fld id="{C1E3846D-CD3F-47E2-B16B-088B38F459EC}" type="datetimeFigureOut">
               <a:rPr lang="hu-HU" smtClean="0"/>
-              <a:t>2026. 01. 06.</a:t>
+              <a:t>2026. 01. 08.</a:t>
             </a:fld>
             <a:endParaRPr lang="hu-HU"/>
           </a:p>
@@ -3355,6 +3356,71 @@
           <a:chExt cx="0" cy="0"/>
         </a:xfrm>
       </p:grpSpPr>
+      <p:pic>
+        <p:nvPicPr>
+          <p:cNvPr id="1026" name="Picture 2" descr="5,600+ Lots Of People Using Smartphones Stock Photos, Pictures &amp;  Royalty-Free Images - iStock">
+            <a:extLst>
+              <a:ext uri="{FF2B5EF4-FFF2-40B4-BE49-F238E27FC236}">
+                <a16:creationId xmlns:a16="http://schemas.microsoft.com/office/drawing/2014/main" id="{3B85DB2A-6AF4-44FC-A555-E0B82B9E85B6}"/>
+              </a:ext>
+            </a:extLst>
+          </p:cNvPr>
+          <p:cNvPicPr>
+            <a:picLocks noChangeAspect="1" noChangeArrowheads="1"/>
+          </p:cNvPicPr>
+          <p:nvPr/>
+        </p:nvPicPr>
+        <p:blipFill>
+          <a:blip r:embed="rId2">
+            <a:extLst>
+              <a:ext uri="{BEBA8EAE-BF5A-486C-A8C5-ECC9F3942E4B}">
+                <a14:imgProps xmlns:a14="http://schemas.microsoft.com/office/drawing/2010/main">
+                  <a14:imgLayer r:embed="rId3">
+                    <a14:imgEffect>
+                      <a14:sharpenSoften amount="-48000"/>
+                    </a14:imgEffect>
+                    <a14:imgEffect>
+                      <a14:saturation sat="0"/>
+                    </a14:imgEffect>
+                    <a14:imgEffect>
+                      <a14:brightnessContrast bright="33000"/>
+                    </a14:imgEffect>
+                  </a14:imgLayer>
+                </a14:imgProps>
+              </a:ext>
+              <a:ext uri="{28A0092B-C50C-407E-A947-70E740481C1C}">
+                <a14:useLocalDpi xmlns:a14="http://schemas.microsoft.com/office/drawing/2010/main" val="0"/>
+              </a:ext>
+            </a:extLst>
+          </a:blip>
+          <a:srcRect/>
+          <a:stretch>
+            <a:fillRect/>
+          </a:stretch>
+        </p:blipFill>
+        <p:spPr bwMode="auto">
+          <a:xfrm>
+            <a:off x="2854608" y="269486"/>
+            <a:ext cx="6482777" cy="4321851"/>
+          </a:xfrm>
+          <a:prstGeom prst="rect">
+            <a:avLst/>
+          </a:prstGeom>
+          <a:noFill/>
+          <a:effectLst>
+            <a:softEdge rad="1270000"/>
+          </a:effectLst>
+          <a:extLst>
+            <a:ext uri="{909E8E84-426E-40DD-AFC4-6F175D3DCCD1}">
+              <a14:hiddenFill xmlns:a14="http://schemas.microsoft.com/office/drawing/2010/main">
+                <a:solidFill>
+                  <a:srgbClr val="FFFFFF"/>
+                </a:solidFill>
+              </a14:hiddenFill>
+            </a:ext>
+          </a:extLst>
+        </p:spPr>
+      </p:pic>
       <p:sp>
         <p:nvSpPr>
           <p:cNvPr id="2" name="Cím 1">
@@ -3662,11 +3728,11 @@
           <p:nvPr/>
         </p:nvPicPr>
         <p:blipFill>
-          <a:blip r:embed="rId2">
+          <a:blip r:embed="rId4">
             <a:extLst>
               <a:ext uri="{BEBA8EAE-BF5A-486C-A8C5-ECC9F3942E4B}">
                 <a14:imgProps xmlns:a14="http://schemas.microsoft.com/office/drawing/2010/main">
-                  <a14:imgLayer r:embed="rId3">
+                  <a14:imgLayer r:embed="rId5">
                     <a14:imgEffect>
                       <a14:saturation sat="0"/>
                     </a14:imgEffect>
@@ -3980,13 +4046,13 @@
           <p:nvPr/>
         </p:nvPicPr>
         <p:blipFill>
-          <a:blip r:embed="rId4">
+          <a:blip r:embed="rId6">
             <a:extLst>
               <a:ext uri="{28A0092B-C50C-407E-A947-70E740481C1C}">
                 <a14:useLocalDpi xmlns:a14="http://schemas.microsoft.com/office/drawing/2010/main" val="0"/>
               </a:ext>
               <a:ext uri="{96DAC541-7B7A-43D3-8B79-37D633B846F1}">
-                <asvg:svgBlip xmlns:asvg="http://schemas.microsoft.com/office/drawing/2016/SVG/main" r:embed="rId5"/>
+                <asvg:svgBlip xmlns:asvg="http://schemas.microsoft.com/office/drawing/2016/SVG/main" r:embed="rId7"/>
               </a:ext>
             </a:extLst>
           </a:blip>
@@ -4026,7 +4092,7 @@
           <p:nvPr/>
         </p:nvPicPr>
         <p:blipFill>
-          <a:blip r:embed="rId6">
+          <a:blip r:embed="rId8">
             <a:extLst>
               <a:ext uri="{28A0092B-C50C-407E-A947-70E740481C1C}">
                 <a14:useLocalDpi xmlns:a14="http://schemas.microsoft.com/office/drawing/2010/main" val="0"/>
@@ -4069,13 +4135,13 @@
           <p:nvPr/>
         </p:nvPicPr>
         <p:blipFill>
-          <a:blip r:embed="rId7">
+          <a:blip r:embed="rId9">
             <a:extLst>
               <a:ext uri="{28A0092B-C50C-407E-A947-70E740481C1C}">
                 <a14:useLocalDpi xmlns:a14="http://schemas.microsoft.com/office/drawing/2010/main" val="0"/>
               </a:ext>
               <a:ext uri="{96DAC541-7B7A-43D3-8B79-37D633B846F1}">
-                <asvg:svgBlip xmlns:asvg="http://schemas.microsoft.com/office/drawing/2016/SVG/main" r:embed="rId8"/>
+                <asvg:svgBlip xmlns:asvg="http://schemas.microsoft.com/office/drawing/2016/SVG/main" r:embed="rId10"/>
               </a:ext>
             </a:extLst>
           </a:blip>
@@ -4108,13 +4174,13 @@
           <p:nvPr/>
         </p:nvPicPr>
         <p:blipFill>
-          <a:blip r:embed="rId9">
+          <a:blip r:embed="rId11">
             <a:extLst>
               <a:ext uri="{28A0092B-C50C-407E-A947-70E740481C1C}">
                 <a14:useLocalDpi xmlns:a14="http://schemas.microsoft.com/office/drawing/2010/main" val="0"/>
               </a:ext>
               <a:ext uri="{96DAC541-7B7A-43D3-8B79-37D633B846F1}">
-                <asvg:svgBlip xmlns:asvg="http://schemas.microsoft.com/office/drawing/2016/SVG/main" r:embed="rId10"/>
+                <asvg:svgBlip xmlns:asvg="http://schemas.microsoft.com/office/drawing/2016/SVG/main" r:embed="rId12"/>
               </a:ext>
             </a:extLst>
           </a:blip>
@@ -4200,6 +4266,71 @@
           <a:chExt cx="0" cy="0"/>
         </a:xfrm>
       </p:grpSpPr>
+      <p:pic>
+        <p:nvPicPr>
+          <p:cNvPr id="13" name="Picture 2" descr="5,600+ Lots Of People Using Smartphones Stock Photos, Pictures &amp;  Royalty-Free Images - iStock">
+            <a:extLst>
+              <a:ext uri="{FF2B5EF4-FFF2-40B4-BE49-F238E27FC236}">
+                <a16:creationId xmlns:a16="http://schemas.microsoft.com/office/drawing/2014/main" id="{C92BA295-7CA8-444D-8D74-7ACACC6ACA64}"/>
+              </a:ext>
+            </a:extLst>
+          </p:cNvPr>
+          <p:cNvPicPr>
+            <a:picLocks noChangeAspect="1" noChangeArrowheads="1"/>
+          </p:cNvPicPr>
+          <p:nvPr/>
+        </p:nvPicPr>
+        <p:blipFill>
+          <a:blip r:embed="rId2">
+            <a:extLst>
+              <a:ext uri="{BEBA8EAE-BF5A-486C-A8C5-ECC9F3942E4B}">
+                <a14:imgProps xmlns:a14="http://schemas.microsoft.com/office/drawing/2010/main">
+                  <a14:imgLayer r:embed="rId3">
+                    <a14:imgEffect>
+                      <a14:sharpenSoften amount="-100000"/>
+                    </a14:imgEffect>
+                    <a14:imgEffect>
+                      <a14:saturation sat="0"/>
+                    </a14:imgEffect>
+                    <a14:imgEffect>
+                      <a14:brightnessContrast bright="-56000"/>
+                    </a14:imgEffect>
+                  </a14:imgLayer>
+                </a14:imgProps>
+              </a:ext>
+              <a:ext uri="{28A0092B-C50C-407E-A947-70E740481C1C}">
+                <a14:useLocalDpi xmlns:a14="http://schemas.microsoft.com/office/drawing/2010/main" val="0"/>
+              </a:ext>
+            </a:extLst>
+          </a:blip>
+          <a:srcRect/>
+          <a:stretch>
+            <a:fillRect/>
+          </a:stretch>
+        </p:blipFill>
+        <p:spPr bwMode="auto">
+          <a:xfrm>
+            <a:off x="-790771" y="3549711"/>
+            <a:ext cx="13118046" cy="8745363"/>
+          </a:xfrm>
+          <a:prstGeom prst="rect">
+            <a:avLst/>
+          </a:prstGeom>
+          <a:noFill/>
+          <a:effectLst>
+            <a:softEdge rad="1270000"/>
+          </a:effectLst>
+          <a:extLst>
+            <a:ext uri="{909E8E84-426E-40DD-AFC4-6F175D3DCCD1}">
+              <a14:hiddenFill xmlns:a14="http://schemas.microsoft.com/office/drawing/2010/main">
+                <a:solidFill>
+                  <a:srgbClr val="FFFFFF"/>
+                </a:solidFill>
+              </a14:hiddenFill>
+            </a:ext>
+          </a:extLst>
+        </p:spPr>
+      </p:pic>
       <p:sp>
         <p:nvSpPr>
           <p:cNvPr id="2" name="Cím 1">
@@ -4507,11 +4638,11 @@
           <p:nvPr/>
         </p:nvPicPr>
         <p:blipFill>
-          <a:blip r:embed="rId2">
+          <a:blip r:embed="rId4">
             <a:extLst>
               <a:ext uri="{BEBA8EAE-BF5A-486C-A8C5-ECC9F3942E4B}">
                 <a14:imgProps xmlns:a14="http://schemas.microsoft.com/office/drawing/2010/main">
-                  <a14:imgLayer r:embed="rId3">
+                  <a14:imgLayer r:embed="rId5">
                     <a14:imgEffect>
                       <a14:saturation sat="0"/>
                     </a14:imgEffect>
@@ -4844,13 +4975,13 @@
           <p:nvPr/>
         </p:nvPicPr>
         <p:blipFill>
-          <a:blip r:embed="rId4">
+          <a:blip r:embed="rId6">
             <a:extLst>
               <a:ext uri="{28A0092B-C50C-407E-A947-70E740481C1C}">
                 <a14:useLocalDpi xmlns:a14="http://schemas.microsoft.com/office/drawing/2010/main" val="0"/>
               </a:ext>
               <a:ext uri="{96DAC541-7B7A-43D3-8B79-37D633B846F1}">
-                <asvg:svgBlip xmlns:asvg="http://schemas.microsoft.com/office/drawing/2016/SVG/main" r:embed="rId5"/>
+                <asvg:svgBlip xmlns:asvg="http://schemas.microsoft.com/office/drawing/2016/SVG/main" r:embed="rId7"/>
               </a:ext>
             </a:extLst>
           </a:blip>
@@ -4890,7 +5021,7 @@
           <p:nvPr/>
         </p:nvPicPr>
         <p:blipFill>
-          <a:blip r:embed="rId6">
+          <a:blip r:embed="rId8">
             <a:extLst>
               <a:ext uri="{28A0092B-C50C-407E-A947-70E740481C1C}">
                 <a14:useLocalDpi xmlns:a14="http://schemas.microsoft.com/office/drawing/2010/main" val="0"/>
@@ -4933,13 +5064,13 @@
           <p:nvPr/>
         </p:nvPicPr>
         <p:blipFill>
-          <a:blip r:embed="rId7">
+          <a:blip r:embed="rId9">
             <a:extLst>
               <a:ext uri="{28A0092B-C50C-407E-A947-70E740481C1C}">
                 <a14:useLocalDpi xmlns:a14="http://schemas.microsoft.com/office/drawing/2010/main" val="0"/>
               </a:ext>
               <a:ext uri="{96DAC541-7B7A-43D3-8B79-37D633B846F1}">
-                <asvg:svgBlip xmlns:asvg="http://schemas.microsoft.com/office/drawing/2016/SVG/main" r:embed="rId8"/>
+                <asvg:svgBlip xmlns:asvg="http://schemas.microsoft.com/office/drawing/2016/SVG/main" r:embed="rId10"/>
               </a:ext>
             </a:extLst>
           </a:blip>
@@ -4972,13 +5103,13 @@
           <p:nvPr/>
         </p:nvPicPr>
         <p:blipFill>
-          <a:blip r:embed="rId9">
+          <a:blip r:embed="rId11">
             <a:extLst>
               <a:ext uri="{28A0092B-C50C-407E-A947-70E740481C1C}">
                 <a14:useLocalDpi xmlns:a14="http://schemas.microsoft.com/office/drawing/2010/main" val="0"/>
               </a:ext>
               <a:ext uri="{96DAC541-7B7A-43D3-8B79-37D633B846F1}">
-                <asvg:svgBlip xmlns:asvg="http://schemas.microsoft.com/office/drawing/2016/SVG/main" r:embed="rId10"/>
+                <asvg:svgBlip xmlns:asvg="http://schemas.microsoft.com/office/drawing/2016/SVG/main" r:embed="rId12"/>
               </a:ext>
             </a:extLst>
           </a:blip>
@@ -4998,10 +5129,10 @@
       </p:pic>
       <p:pic>
         <p:nvPicPr>
-          <p:cNvPr id="17" name="Ábra 16" descr="Összezavarodott személy">
-            <a:extLst>
-              <a:ext uri="{FF2B5EF4-FFF2-40B4-BE49-F238E27FC236}">
-                <a16:creationId xmlns:a16="http://schemas.microsoft.com/office/drawing/2014/main" id="{5B15AC18-E306-47B8-BCF0-29667C6A7CD8}"/>
+          <p:cNvPr id="18" name="Kép 17">
+            <a:extLst>
+              <a:ext uri="{FF2B5EF4-FFF2-40B4-BE49-F238E27FC236}">
+                <a16:creationId xmlns:a16="http://schemas.microsoft.com/office/drawing/2014/main" id="{2664E888-9D72-4E0B-A6A3-5CD5313C3026}"/>
               </a:ext>
             </a:extLst>
           </p:cNvPr>
@@ -5011,13 +5142,22 @@
           <p:nvPr/>
         </p:nvPicPr>
         <p:blipFill>
-          <a:blip r:embed="rId11">
-            <a:extLst>
-              <a:ext uri="{28A0092B-C50C-407E-A947-70E740481C1C}">
-                <a14:useLocalDpi xmlns:a14="http://schemas.microsoft.com/office/drawing/2010/main" val="0"/>
-              </a:ext>
-              <a:ext uri="{96DAC541-7B7A-43D3-8B79-37D633B846F1}">
-                <asvg:svgBlip xmlns:asvg="http://schemas.microsoft.com/office/drawing/2016/SVG/main" r:embed="rId12"/>
+          <a:blip r:embed="rId13">
+            <a:extLst>
+              <a:ext uri="{BEBA8EAE-BF5A-486C-A8C5-ECC9F3942E4B}">
+                <a14:imgProps xmlns:a14="http://schemas.microsoft.com/office/drawing/2010/main">
+                  <a14:imgLayer r:embed="rId14">
+                    <a14:imgEffect>
+                      <a14:sharpenSoften amount="-25000"/>
+                    </a14:imgEffect>
+                    <a14:imgEffect>
+                      <a14:saturation sat="0"/>
+                    </a14:imgEffect>
+                    <a14:imgEffect>
+                      <a14:brightnessContrast bright="21000"/>
+                    </a14:imgEffect>
+                  </a14:imgLayer>
+                </a14:imgProps>
               </a:ext>
             </a:extLst>
           </a:blip>
@@ -5026,13 +5166,16 @@
           </a:stretch>
         </p:blipFill>
         <p:spPr>
-          <a:xfrm rot="19615665">
-            <a:off x="-1387768" y="6900255"/>
-            <a:ext cx="5242747" cy="3352683"/>
+          <a:xfrm rot="19824344">
+            <a:off x="12042400" y="2108876"/>
+            <a:ext cx="7143750" cy="4095750"/>
           </a:xfrm>
           <a:prstGeom prst="rect">
             <a:avLst/>
           </a:prstGeom>
+          <a:effectLst>
+            <a:softEdge rad="1104900"/>
+          </a:effectLst>
         </p:spPr>
       </p:pic>
     </p:spTree>
@@ -6052,6 +6195,354 @@
           </a:p>
         </p:txBody>
       </p:sp>
+      <p:pic>
+        <p:nvPicPr>
+          <p:cNvPr id="13" name="Picture 2" descr="Eclipse Mosquitto | projects.eclipse.org">
+            <a:extLst>
+              <a:ext uri="{FF2B5EF4-FFF2-40B4-BE49-F238E27FC236}">
+                <a16:creationId xmlns:a16="http://schemas.microsoft.com/office/drawing/2014/main" id="{1B762112-1A84-46A0-AE1D-FF05CD3F1592}"/>
+              </a:ext>
+            </a:extLst>
+          </p:cNvPr>
+          <p:cNvPicPr>
+            <a:picLocks noChangeAspect="1" noChangeArrowheads="1"/>
+          </p:cNvPicPr>
+          <p:nvPr/>
+        </p:nvPicPr>
+        <p:blipFill>
+          <a:blip r:embed="rId11">
+            <a:extLst>
+              <a:ext uri="{BEBA8EAE-BF5A-486C-A8C5-ECC9F3942E4B}">
+                <a14:imgProps xmlns:a14="http://schemas.microsoft.com/office/drawing/2010/main">
+                  <a14:imgLayer r:embed="rId12">
+                    <a14:imgEffect>
+                      <a14:brightnessContrast bright="-100000"/>
+                    </a14:imgEffect>
+                  </a14:imgLayer>
+                </a14:imgProps>
+              </a:ext>
+              <a:ext uri="{28A0092B-C50C-407E-A947-70E740481C1C}">
+                <a14:useLocalDpi xmlns:a14="http://schemas.microsoft.com/office/drawing/2010/main" val="0"/>
+              </a:ext>
+            </a:extLst>
+          </a:blip>
+          <a:srcRect/>
+          <a:stretch>
+            <a:fillRect/>
+          </a:stretch>
+        </p:blipFill>
+        <p:spPr bwMode="auto">
+          <a:xfrm>
+            <a:off x="-2358404" y="696814"/>
+            <a:ext cx="1441530" cy="1419907"/>
+          </a:xfrm>
+          <a:prstGeom prst="rect">
+            <a:avLst/>
+          </a:prstGeom>
+          <a:noFill/>
+          <a:extLst>
+            <a:ext uri="{909E8E84-426E-40DD-AFC4-6F175D3DCCD1}">
+              <a14:hiddenFill xmlns:a14="http://schemas.microsoft.com/office/drawing/2010/main">
+                <a:solidFill>
+                  <a:srgbClr val="FFFFFF"/>
+                </a:solidFill>
+              </a14:hiddenFill>
+            </a:ext>
+          </a:extLst>
+        </p:spPr>
+      </p:pic>
+      <p:pic>
+        <p:nvPicPr>
+          <p:cNvPr id="14" name="Picture 4" descr="HiveMQ Reviews 2026: Details, Pricing, &amp; Features | G2">
+            <a:extLst>
+              <a:ext uri="{FF2B5EF4-FFF2-40B4-BE49-F238E27FC236}">
+                <a16:creationId xmlns:a16="http://schemas.microsoft.com/office/drawing/2014/main" id="{2B2C6740-A9FF-46F8-BC33-BF1E189B9070}"/>
+              </a:ext>
+            </a:extLst>
+          </p:cNvPr>
+          <p:cNvPicPr>
+            <a:picLocks noChangeAspect="1" noChangeArrowheads="1"/>
+          </p:cNvPicPr>
+          <p:nvPr/>
+        </p:nvPicPr>
+        <p:blipFill rotWithShape="1">
+          <a:blip r:embed="rId13">
+            <a:extLst>
+              <a:ext uri="{BEBA8EAE-BF5A-486C-A8C5-ECC9F3942E4B}">
+                <a14:imgProps xmlns:a14="http://schemas.microsoft.com/office/drawing/2010/main">
+                  <a14:imgLayer r:embed="rId14">
+                    <a14:imgEffect>
+                      <a14:saturation sat="0"/>
+                    </a14:imgEffect>
+                    <a14:imgEffect>
+                      <a14:brightnessContrast contrast="100000"/>
+                    </a14:imgEffect>
+                  </a14:imgLayer>
+                </a14:imgProps>
+              </a:ext>
+              <a:ext uri="{28A0092B-C50C-407E-A947-70E740481C1C}">
+                <a14:useLocalDpi xmlns:a14="http://schemas.microsoft.com/office/drawing/2010/main" val="0"/>
+              </a:ext>
+            </a:extLst>
+          </a:blip>
+          <a:srcRect l="22083" r="21556"/>
+          <a:stretch/>
+        </p:blipFill>
+        <p:spPr bwMode="auto">
+          <a:xfrm>
+            <a:off x="-2670663" y="2718112"/>
+            <a:ext cx="1526351" cy="1421775"/>
+          </a:xfrm>
+          <a:prstGeom prst="rect">
+            <a:avLst/>
+          </a:prstGeom>
+          <a:noFill/>
+          <a:extLst>
+            <a:ext uri="{909E8E84-426E-40DD-AFC4-6F175D3DCCD1}">
+              <a14:hiddenFill xmlns:a14="http://schemas.microsoft.com/office/drawing/2010/main">
+                <a:solidFill>
+                  <a:srgbClr val="FFFFFF"/>
+                </a:solidFill>
+              </a14:hiddenFill>
+            </a:ext>
+          </a:extLst>
+        </p:spPr>
+      </p:pic>
+      <p:pic>
+        <p:nvPicPr>
+          <p:cNvPr id="15" name="Picture 6" descr="Cosmos">
+            <a:extLst>
+              <a:ext uri="{FF2B5EF4-FFF2-40B4-BE49-F238E27FC236}">
+                <a16:creationId xmlns:a16="http://schemas.microsoft.com/office/drawing/2014/main" id="{336825AB-8DA7-4BDD-95A0-4C66B45F7726}"/>
+              </a:ext>
+            </a:extLst>
+          </p:cNvPr>
+          <p:cNvPicPr>
+            <a:picLocks noChangeAspect="1" noChangeArrowheads="1"/>
+          </p:cNvPicPr>
+          <p:nvPr/>
+        </p:nvPicPr>
+        <p:blipFill>
+          <a:blip r:embed="rId15">
+            <a:extLst>
+              <a:ext uri="{BEBA8EAE-BF5A-486C-A8C5-ECC9F3942E4B}">
+                <a14:imgProps xmlns:a14="http://schemas.microsoft.com/office/drawing/2010/main">
+                  <a14:imgLayer r:embed="rId16">
+                    <a14:imgEffect>
+                      <a14:brightnessContrast bright="-100000"/>
+                    </a14:imgEffect>
+                  </a14:imgLayer>
+                </a14:imgProps>
+              </a:ext>
+              <a:ext uri="{28A0092B-C50C-407E-A947-70E740481C1C}">
+                <a14:useLocalDpi xmlns:a14="http://schemas.microsoft.com/office/drawing/2010/main" val="0"/>
+              </a:ext>
+            </a:extLst>
+          </a:blip>
+          <a:srcRect/>
+          <a:stretch>
+            <a:fillRect/>
+          </a:stretch>
+        </p:blipFill>
+        <p:spPr bwMode="auto">
+          <a:xfrm>
+            <a:off x="-1720147" y="4488306"/>
+            <a:ext cx="1606547" cy="1606547"/>
+          </a:xfrm>
+          <a:prstGeom prst="rect">
+            <a:avLst/>
+          </a:prstGeom>
+          <a:noFill/>
+          <a:extLst>
+            <a:ext uri="{909E8E84-426E-40DD-AFC4-6F175D3DCCD1}">
+              <a14:hiddenFill xmlns:a14="http://schemas.microsoft.com/office/drawing/2010/main">
+                <a:solidFill>
+                  <a:srgbClr val="FFFFFF"/>
+                </a:solidFill>
+              </a14:hiddenFill>
+            </a:ext>
+          </a:extLst>
+        </p:spPr>
+      </p:pic>
+      <p:pic>
+        <p:nvPicPr>
+          <p:cNvPr id="18" name="Picture 2" descr="5,600+ Lots Of People Using Smartphones Stock Photos, Pictures &amp;  Royalty-Free Images - iStock">
+            <a:extLst>
+              <a:ext uri="{FF2B5EF4-FFF2-40B4-BE49-F238E27FC236}">
+                <a16:creationId xmlns:a16="http://schemas.microsoft.com/office/drawing/2014/main" id="{B1ACB3AB-7DBA-45B2-A60E-CD01E976F78A}"/>
+              </a:ext>
+            </a:extLst>
+          </p:cNvPr>
+          <p:cNvPicPr>
+            <a:picLocks noChangeAspect="1" noChangeArrowheads="1"/>
+          </p:cNvPicPr>
+          <p:nvPr/>
+        </p:nvPicPr>
+        <p:blipFill>
+          <a:blip r:embed="rId17">
+            <a:extLst>
+              <a:ext uri="{BEBA8EAE-BF5A-486C-A8C5-ECC9F3942E4B}">
+                <a14:imgProps xmlns:a14="http://schemas.microsoft.com/office/drawing/2010/main">
+                  <a14:imgLayer r:embed="rId18">
+                    <a14:imgEffect>
+                      <a14:sharpenSoften amount="-100000"/>
+                    </a14:imgEffect>
+                    <a14:imgEffect>
+                      <a14:saturation sat="0"/>
+                    </a14:imgEffect>
+                    <a14:imgEffect>
+                      <a14:brightnessContrast bright="-56000"/>
+                    </a14:imgEffect>
+                  </a14:imgLayer>
+                </a14:imgProps>
+              </a:ext>
+              <a:ext uri="{28A0092B-C50C-407E-A947-70E740481C1C}">
+                <a14:useLocalDpi xmlns:a14="http://schemas.microsoft.com/office/drawing/2010/main" val="0"/>
+              </a:ext>
+            </a:extLst>
+          </a:blip>
+          <a:srcRect/>
+          <a:stretch>
+            <a:fillRect/>
+          </a:stretch>
+        </p:blipFill>
+        <p:spPr bwMode="auto">
+          <a:xfrm>
+            <a:off x="-790771" y="9167602"/>
+            <a:ext cx="13118046" cy="8745363"/>
+          </a:xfrm>
+          <a:prstGeom prst="rect">
+            <a:avLst/>
+          </a:prstGeom>
+          <a:noFill/>
+          <a:effectLst>
+            <a:softEdge rad="1270000"/>
+          </a:effectLst>
+          <a:extLst>
+            <a:ext uri="{909E8E84-426E-40DD-AFC4-6F175D3DCCD1}">
+              <a14:hiddenFill xmlns:a14="http://schemas.microsoft.com/office/drawing/2010/main">
+                <a:solidFill>
+                  <a:srgbClr val="FFFFFF"/>
+                </a:solidFill>
+              </a14:hiddenFill>
+            </a:ext>
+          </a:extLst>
+        </p:spPr>
+      </p:pic>
+      <p:pic>
+        <p:nvPicPr>
+          <p:cNvPr id="5" name="Kép 4">
+            <a:extLst>
+              <a:ext uri="{FF2B5EF4-FFF2-40B4-BE49-F238E27FC236}">
+                <a16:creationId xmlns:a16="http://schemas.microsoft.com/office/drawing/2014/main" id="{EAC3D647-9B7D-4956-8484-6AA4ED8C0AB0}"/>
+              </a:ext>
+            </a:extLst>
+          </p:cNvPr>
+          <p:cNvPicPr>
+            <a:picLocks noChangeAspect="1"/>
+          </p:cNvPicPr>
+          <p:nvPr/>
+        </p:nvPicPr>
+        <p:blipFill>
+          <a:blip r:embed="rId19">
+            <a:extLst>
+              <a:ext uri="{BEBA8EAE-BF5A-486C-A8C5-ECC9F3942E4B}">
+                <a14:imgProps xmlns:a14="http://schemas.microsoft.com/office/drawing/2010/main">
+                  <a14:imgLayer r:embed="rId20">
+                    <a14:imgEffect>
+                      <a14:sharpenSoften amount="-25000"/>
+                    </a14:imgEffect>
+                    <a14:imgEffect>
+                      <a14:saturation sat="0"/>
+                    </a14:imgEffect>
+                    <a14:imgEffect>
+                      <a14:brightnessContrast bright="21000"/>
+                    </a14:imgEffect>
+                  </a14:imgLayer>
+                </a14:imgProps>
+              </a:ext>
+            </a:extLst>
+          </a:blip>
+          <a:stretch>
+            <a:fillRect/>
+          </a:stretch>
+        </p:blipFill>
+        <p:spPr>
+          <a:xfrm rot="1605640">
+            <a:off x="6329119" y="2494231"/>
+            <a:ext cx="7143750" cy="4095750"/>
+          </a:xfrm>
+          <a:prstGeom prst="rect">
+            <a:avLst/>
+          </a:prstGeom>
+          <a:effectLst>
+            <a:softEdge rad="1104900"/>
+          </a:effectLst>
+        </p:spPr>
+      </p:pic>
+      <p:pic>
+        <p:nvPicPr>
+          <p:cNvPr id="24" name="Picture 4" descr="Inside Machine: Over 30,437 Royalty-Free Licensable Stock Illustrations &amp;  Drawings | Shutterstock">
+            <a:extLst>
+              <a:ext uri="{FF2B5EF4-FFF2-40B4-BE49-F238E27FC236}">
+                <a16:creationId xmlns:a16="http://schemas.microsoft.com/office/drawing/2014/main" id="{BC198631-B7BB-4BF5-B151-1D1E42116CE1}"/>
+              </a:ext>
+            </a:extLst>
+          </p:cNvPr>
+          <p:cNvPicPr>
+            <a:picLocks noChangeAspect="1" noChangeArrowheads="1"/>
+          </p:cNvPicPr>
+          <p:nvPr/>
+        </p:nvPicPr>
+        <p:blipFill rotWithShape="1">
+          <a:blip r:embed="rId21">
+            <a:extLst>
+              <a:ext uri="{BEBA8EAE-BF5A-486C-A8C5-ECC9F3942E4B}">
+                <a14:imgProps xmlns:a14="http://schemas.microsoft.com/office/drawing/2010/main">
+                  <a14:imgLayer r:embed="rId22">
+                    <a14:imgEffect>
+                      <a14:sharpenSoften amount="-40000"/>
+                    </a14:imgEffect>
+                    <a14:imgEffect>
+                      <a14:saturation sat="0"/>
+                    </a14:imgEffect>
+                    <a14:imgEffect>
+                      <a14:brightnessContrast bright="53000"/>
+                    </a14:imgEffect>
+                  </a14:imgLayer>
+                </a14:imgProps>
+              </a:ext>
+              <a:ext uri="{28A0092B-C50C-407E-A947-70E740481C1C}">
+                <a14:useLocalDpi xmlns:a14="http://schemas.microsoft.com/office/drawing/2010/main" val="0"/>
+              </a:ext>
+            </a:extLst>
+          </a:blip>
+          <a:srcRect b="10281"/>
+          <a:stretch/>
+        </p:blipFill>
+        <p:spPr bwMode="auto">
+          <a:xfrm rot="8622041">
+            <a:off x="10271151" y="6978246"/>
+            <a:ext cx="5013038" cy="2662455"/>
+          </a:xfrm>
+          <a:prstGeom prst="rect">
+            <a:avLst/>
+          </a:prstGeom>
+          <a:noFill/>
+          <a:effectLst>
+            <a:softEdge rad="1270000"/>
+          </a:effectLst>
+          <a:extLst>
+            <a:ext uri="{909E8E84-426E-40DD-AFC4-6F175D3DCCD1}">
+              <a14:hiddenFill xmlns:a14="http://schemas.microsoft.com/office/drawing/2010/main">
+                <a:solidFill>
+                  <a:srgbClr val="FFFFFF"/>
+                </a:solidFill>
+              </a14:hiddenFill>
+            </a:ext>
+          </a:extLst>
+        </p:spPr>
+      </p:pic>
     </p:spTree>
     <p:extLst>
       <p:ext uri="{BB962C8B-B14F-4D97-AF65-F5344CB8AC3E}">
@@ -7071,10 +7562,1120 @@
           </a:extLst>
         </p:spPr>
       </p:pic>
+      <p:pic>
+        <p:nvPicPr>
+          <p:cNvPr id="12" name="Kép 11">
+            <a:extLst>
+              <a:ext uri="{FF2B5EF4-FFF2-40B4-BE49-F238E27FC236}">
+                <a16:creationId xmlns:a16="http://schemas.microsoft.com/office/drawing/2014/main" id="{86CC4F45-9100-407C-BAAE-F2D9699030F1}"/>
+              </a:ext>
+            </a:extLst>
+          </p:cNvPr>
+          <p:cNvPicPr>
+            <a:picLocks noChangeAspect="1"/>
+          </p:cNvPicPr>
+          <p:nvPr/>
+        </p:nvPicPr>
+        <p:blipFill>
+          <a:blip r:embed="rId10">
+            <a:extLst>
+              <a:ext uri="{BEBA8EAE-BF5A-486C-A8C5-ECC9F3942E4B}">
+                <a14:imgProps xmlns:a14="http://schemas.microsoft.com/office/drawing/2010/main">
+                  <a14:imgLayer r:embed="rId11">
+                    <a14:imgEffect>
+                      <a14:sharpenSoften amount="-25000"/>
+                    </a14:imgEffect>
+                    <a14:imgEffect>
+                      <a14:saturation sat="0"/>
+                    </a14:imgEffect>
+                    <a14:imgEffect>
+                      <a14:brightnessContrast bright="21000"/>
+                    </a14:imgEffect>
+                  </a14:imgLayer>
+                </a14:imgProps>
+              </a:ext>
+            </a:extLst>
+          </a:blip>
+          <a:stretch>
+            <a:fillRect/>
+          </a:stretch>
+        </p:blipFill>
+        <p:spPr>
+          <a:xfrm rot="18550612">
+            <a:off x="12365864" y="2440431"/>
+            <a:ext cx="7143750" cy="4095750"/>
+          </a:xfrm>
+          <a:prstGeom prst="rect">
+            <a:avLst/>
+          </a:prstGeom>
+          <a:effectLst>
+            <a:softEdge rad="1104900"/>
+          </a:effectLst>
+        </p:spPr>
+      </p:pic>
+      <p:pic>
+        <p:nvPicPr>
+          <p:cNvPr id="4100" name="Picture 4" descr="Inside Machine: Over 30,437 Royalty-Free Licensable Stock Illustrations &amp;  Drawings | Shutterstock">
+            <a:extLst>
+              <a:ext uri="{FF2B5EF4-FFF2-40B4-BE49-F238E27FC236}">
+                <a16:creationId xmlns:a16="http://schemas.microsoft.com/office/drawing/2014/main" id="{1295F18D-0875-4577-8FBE-57695C27B1F3}"/>
+              </a:ext>
+            </a:extLst>
+          </p:cNvPr>
+          <p:cNvPicPr>
+            <a:picLocks noChangeAspect="1" noChangeArrowheads="1"/>
+          </p:cNvPicPr>
+          <p:nvPr/>
+        </p:nvPicPr>
+        <p:blipFill rotWithShape="1">
+          <a:blip r:embed="rId12">
+            <a:extLst>
+              <a:ext uri="{BEBA8EAE-BF5A-486C-A8C5-ECC9F3942E4B}">
+                <a14:imgProps xmlns:a14="http://schemas.microsoft.com/office/drawing/2010/main">
+                  <a14:imgLayer r:embed="rId13">
+                    <a14:imgEffect>
+                      <a14:sharpenSoften amount="-40000"/>
+                    </a14:imgEffect>
+                    <a14:imgEffect>
+                      <a14:saturation sat="0"/>
+                    </a14:imgEffect>
+                    <a14:imgEffect>
+                      <a14:brightnessContrast bright="49000" contrast="-64000"/>
+                    </a14:imgEffect>
+                  </a14:imgLayer>
+                </a14:imgProps>
+              </a:ext>
+              <a:ext uri="{28A0092B-C50C-407E-A947-70E740481C1C}">
+                <a14:useLocalDpi xmlns:a14="http://schemas.microsoft.com/office/drawing/2010/main" val="0"/>
+              </a:ext>
+            </a:extLst>
+          </a:blip>
+          <a:srcRect b="10281"/>
+          <a:stretch/>
+        </p:blipFill>
+        <p:spPr bwMode="auto">
+          <a:xfrm rot="5400000">
+            <a:off x="7044608" y="1677544"/>
+            <a:ext cx="6595502" cy="3502911"/>
+          </a:xfrm>
+          <a:prstGeom prst="rect">
+            <a:avLst/>
+          </a:prstGeom>
+          <a:noFill/>
+          <a:effectLst>
+            <a:softEdge rad="1270000"/>
+          </a:effectLst>
+          <a:extLst>
+            <a:ext uri="{909E8E84-426E-40DD-AFC4-6F175D3DCCD1}">
+              <a14:hiddenFill xmlns:a14="http://schemas.microsoft.com/office/drawing/2010/main">
+                <a:solidFill>
+                  <a:srgbClr val="FFFFFF"/>
+                </a:solidFill>
+              </a14:hiddenFill>
+            </a:ext>
+          </a:extLst>
+        </p:spPr>
+      </p:pic>
     </p:spTree>
     <p:extLst>
       <p:ext uri="{BB962C8B-B14F-4D97-AF65-F5344CB8AC3E}">
         <p14:creationId xmlns:p14="http://schemas.microsoft.com/office/powerpoint/2010/main" val="2985949554"/>
+      </p:ext>
+    </p:extLst>
+  </p:cSld>
+  <p:clrMapOvr>
+    <a:masterClrMapping/>
+  </p:clrMapOvr>
+  <mc:AlternateContent xmlns:mc="http://schemas.openxmlformats.org/markup-compatibility/2006" xmlns:p159="http://schemas.microsoft.com/office/powerpoint/2015/09/main">
+    <mc:Choice Requires="p159">
+      <p:transition xmlns:p14="http://schemas.microsoft.com/office/powerpoint/2010/main" spd="slow" p14:dur="2000">
+        <p159:morph option="byObject"/>
+      </p:transition>
+    </mc:Choice>
+    <mc:Fallback xmlns="">
+      <p:transition spd="slow">
+        <p:fade/>
+      </p:transition>
+    </mc:Fallback>
+  </mc:AlternateContent>
+</p:sld>
+</file>
+
+<file path=ppt/slides/slide5.xml><?xml version="1.0" encoding="utf-8"?>
+<p:sld xmlns:a="http://schemas.openxmlformats.org/drawingml/2006/main" xmlns:r="http://schemas.openxmlformats.org/officeDocument/2006/relationships" xmlns:p="http://schemas.openxmlformats.org/presentationml/2006/main">
+  <p:cSld>
+    <p:bg>
+      <p:bgPr>
+        <a:gradFill flip="none" rotWithShape="1">
+          <a:gsLst>
+            <a:gs pos="0">
+              <a:schemeClr val="bg2">
+                <a:lumMod val="90000"/>
+              </a:schemeClr>
+            </a:gs>
+            <a:gs pos="45000">
+              <a:schemeClr val="bg1">
+                <a:lumMod val="65000"/>
+              </a:schemeClr>
+            </a:gs>
+            <a:gs pos="100000">
+              <a:schemeClr val="bg2">
+                <a:lumMod val="10000"/>
+              </a:schemeClr>
+            </a:gs>
+          </a:gsLst>
+          <a:lin ang="5400000" scaled="1"/>
+          <a:tileRect/>
+        </a:gradFill>
+        <a:effectLst/>
+      </p:bgPr>
+    </p:bg>
+    <p:spTree>
+      <p:nvGrpSpPr>
+        <p:cNvPr id="1" name=""/>
+        <p:cNvGrpSpPr/>
+        <p:nvPr/>
+      </p:nvGrpSpPr>
+      <p:grpSpPr>
+        <a:xfrm>
+          <a:off x="0" y="0"/>
+          <a:ext cx="0" cy="0"/>
+          <a:chOff x="0" y="0"/>
+          <a:chExt cx="0" cy="0"/>
+        </a:xfrm>
+      </p:grpSpPr>
+      <p:sp>
+        <p:nvSpPr>
+          <p:cNvPr id="2" name="Cím 1">
+            <a:extLst>
+              <a:ext uri="{FF2B5EF4-FFF2-40B4-BE49-F238E27FC236}">
+                <a16:creationId xmlns:a16="http://schemas.microsoft.com/office/drawing/2014/main" id="{B2A63552-8D4C-456B-AB6E-2B42D66B77F3}"/>
+              </a:ext>
+            </a:extLst>
+          </p:cNvPr>
+          <p:cNvSpPr>
+            <a:spLocks noGrp="1"/>
+          </p:cNvSpPr>
+          <p:nvPr>
+            <p:ph type="ctrTitle"/>
+          </p:nvPr>
+        </p:nvSpPr>
+        <p:spPr>
+          <a:xfrm>
+            <a:off x="-10283634" y="2636872"/>
+            <a:ext cx="9492863" cy="748609"/>
+          </a:xfrm>
+        </p:spPr>
+        <p:txBody>
+          <a:bodyPr>
+            <a:normAutofit fontScale="90000"/>
+          </a:bodyPr>
+          <a:lstStyle/>
+          <a:p>
+            <a:br>
+              <a:rPr lang="hu-HU" sz="4800" dirty="0">
+                <a:latin typeface="Times New Roman" panose="02020603050405020304" pitchFamily="18" charset="0"/>
+                <a:cs typeface="Times New Roman" panose="02020603050405020304" pitchFamily="18" charset="0"/>
+              </a:rPr>
+            </a:br>
+            <a:r>
+              <a:rPr lang="hu-HU" sz="4800" dirty="0" err="1">
+                <a:latin typeface="Times New Roman" panose="02020603050405020304" pitchFamily="18" charset="0"/>
+                <a:cs typeface="Times New Roman" panose="02020603050405020304" pitchFamily="18" charset="0"/>
+              </a:rPr>
+              <a:t>Message</a:t>
+            </a:r>
+            <a:r>
+              <a:rPr lang="hu-HU" sz="4800" dirty="0">
+                <a:latin typeface="Times New Roman" panose="02020603050405020304" pitchFamily="18" charset="0"/>
+                <a:cs typeface="Times New Roman" panose="02020603050405020304" pitchFamily="18" charset="0"/>
+              </a:rPr>
+              <a:t> </a:t>
+            </a:r>
+            <a:r>
+              <a:rPr lang="hu-HU" sz="4800" dirty="0" err="1">
+                <a:latin typeface="Times New Roman" panose="02020603050405020304" pitchFamily="18" charset="0"/>
+                <a:cs typeface="Times New Roman" panose="02020603050405020304" pitchFamily="18" charset="0"/>
+              </a:rPr>
+              <a:t>Queuing</a:t>
+            </a:r>
+            <a:r>
+              <a:rPr lang="hu-HU" sz="4800" dirty="0">
+                <a:latin typeface="Times New Roman" panose="02020603050405020304" pitchFamily="18" charset="0"/>
+                <a:cs typeface="Times New Roman" panose="02020603050405020304" pitchFamily="18" charset="0"/>
+              </a:rPr>
+              <a:t> </a:t>
+            </a:r>
+            <a:r>
+              <a:rPr lang="hu-HU" sz="4800" dirty="0" err="1">
+                <a:latin typeface="Times New Roman" panose="02020603050405020304" pitchFamily="18" charset="0"/>
+                <a:cs typeface="Times New Roman" panose="02020603050405020304" pitchFamily="18" charset="0"/>
+              </a:rPr>
+              <a:t>Telemetry</a:t>
+            </a:r>
+            <a:r>
+              <a:rPr lang="hu-HU" sz="4800" dirty="0">
+                <a:latin typeface="Times New Roman" panose="02020603050405020304" pitchFamily="18" charset="0"/>
+                <a:cs typeface="Times New Roman" panose="02020603050405020304" pitchFamily="18" charset="0"/>
+              </a:rPr>
+              <a:t> </a:t>
+            </a:r>
+            <a:r>
+              <a:rPr lang="hu-HU" sz="4800" dirty="0" err="1">
+                <a:latin typeface="Times New Roman" panose="02020603050405020304" pitchFamily="18" charset="0"/>
+                <a:cs typeface="Times New Roman" panose="02020603050405020304" pitchFamily="18" charset="0"/>
+              </a:rPr>
+              <a:t>Transport</a:t>
+            </a:r>
+            <a:endParaRPr lang="hu-HU" sz="4800" dirty="0">
+              <a:latin typeface="Times New Roman" panose="02020603050405020304" pitchFamily="18" charset="0"/>
+              <a:cs typeface="Times New Roman" panose="02020603050405020304" pitchFamily="18" charset="0"/>
+            </a:endParaRPr>
+          </a:p>
+        </p:txBody>
+      </p:sp>
+      <p:sp>
+        <p:nvSpPr>
+          <p:cNvPr id="3" name="Alcím 2">
+            <a:extLst>
+              <a:ext uri="{FF2B5EF4-FFF2-40B4-BE49-F238E27FC236}">
+                <a16:creationId xmlns:a16="http://schemas.microsoft.com/office/drawing/2014/main" id="{080B6D76-FA53-4E30-98F7-3790CF55DB52}"/>
+              </a:ext>
+            </a:extLst>
+          </p:cNvPr>
+          <p:cNvSpPr>
+            <a:spLocks noGrp="1"/>
+          </p:cNvSpPr>
+          <p:nvPr>
+            <p:ph type="subTitle" idx="1"/>
+          </p:nvPr>
+        </p:nvSpPr>
+        <p:spPr>
+          <a:xfrm>
+            <a:off x="13658849" y="3429000"/>
+            <a:ext cx="6870700" cy="449262"/>
+          </a:xfrm>
+        </p:spPr>
+        <p:txBody>
+          <a:bodyPr>
+            <a:normAutofit/>
+          </a:bodyPr>
+          <a:lstStyle/>
+          <a:p>
+            <a:r>
+              <a:rPr lang="hu-HU" i="1" dirty="0">
+                <a:latin typeface="Times New Roman" panose="02020603050405020304" pitchFamily="18" charset="0"/>
+                <a:cs typeface="Times New Roman" panose="02020603050405020304" pitchFamily="18" charset="0"/>
+              </a:rPr>
+              <a:t>-Könnyű </a:t>
+            </a:r>
+            <a:r>
+              <a:rPr lang="hu-HU" i="1" dirty="0" err="1">
+                <a:latin typeface="Times New Roman" panose="02020603050405020304" pitchFamily="18" charset="0"/>
+                <a:cs typeface="Times New Roman" panose="02020603050405020304" pitchFamily="18" charset="0"/>
+              </a:rPr>
+              <a:t>üzenetkelezelő</a:t>
+            </a:r>
+            <a:r>
+              <a:rPr lang="hu-HU" i="1" dirty="0">
+                <a:latin typeface="Times New Roman" panose="02020603050405020304" pitchFamily="18" charset="0"/>
+                <a:cs typeface="Times New Roman" panose="02020603050405020304" pitchFamily="18" charset="0"/>
+              </a:rPr>
+              <a:t> protokoll </a:t>
+            </a:r>
+            <a:r>
+              <a:rPr lang="hu-HU" i="1" dirty="0" err="1">
+                <a:latin typeface="Times New Roman" panose="02020603050405020304" pitchFamily="18" charset="0"/>
+                <a:cs typeface="Times New Roman" panose="02020603050405020304" pitchFamily="18" charset="0"/>
+              </a:rPr>
+              <a:t>IoT</a:t>
+            </a:r>
+            <a:r>
+              <a:rPr lang="hu-HU" i="1" dirty="0">
+                <a:latin typeface="Times New Roman" panose="02020603050405020304" pitchFamily="18" charset="0"/>
+                <a:cs typeface="Times New Roman" panose="02020603050405020304" pitchFamily="18" charset="0"/>
+              </a:rPr>
+              <a:t> rendszerekben</a:t>
+            </a:r>
+          </a:p>
+        </p:txBody>
+      </p:sp>
+      <p:sp>
+        <p:nvSpPr>
+          <p:cNvPr id="4" name="Alcím 2">
+            <a:extLst>
+              <a:ext uri="{FF2B5EF4-FFF2-40B4-BE49-F238E27FC236}">
+                <a16:creationId xmlns:a16="http://schemas.microsoft.com/office/drawing/2014/main" id="{6CE16EB6-FEDC-43F0-AD02-E6C0D416E2A2}"/>
+              </a:ext>
+            </a:extLst>
+          </p:cNvPr>
+          <p:cNvSpPr txBox="1">
+            <a:spLocks/>
+          </p:cNvSpPr>
+          <p:nvPr/>
+        </p:nvSpPr>
+        <p:spPr>
+          <a:xfrm>
+            <a:off x="5264147" y="4488306"/>
+            <a:ext cx="1663700" cy="342900"/>
+          </a:xfrm>
+          <a:prstGeom prst="rect">
+            <a:avLst/>
+          </a:prstGeom>
+        </p:spPr>
+        <p:txBody>
+          <a:bodyPr vert="horz" lIns="91440" tIns="45720" rIns="91440" bIns="45720" rtlCol="0">
+            <a:normAutofit fontScale="92500"/>
+          </a:bodyPr>
+          <a:lstStyle>
+            <a:lvl1pPr marL="0" indent="0" algn="ctr" defTabSz="914400" rtl="0" eaLnBrk="1" latinLnBrk="0" hangingPunct="1">
+              <a:lnSpc>
+                <a:spcPct val="90000"/>
+              </a:lnSpc>
+              <a:spcBef>
+                <a:spcPts val="1000"/>
+              </a:spcBef>
+              <a:buFont typeface="Arial" panose="020B0604020202020204" pitchFamily="34" charset="0"/>
+              <a:buNone/>
+              <a:defRPr sz="2400" kern="1200">
+                <a:solidFill>
+                  <a:schemeClr val="tx1"/>
+                </a:solidFill>
+                <a:latin typeface="+mn-lt"/>
+                <a:ea typeface="+mn-ea"/>
+                <a:cs typeface="+mn-cs"/>
+              </a:defRPr>
+            </a:lvl1pPr>
+            <a:lvl2pPr marL="457200" indent="0" algn="ctr" defTabSz="914400" rtl="0" eaLnBrk="1" latinLnBrk="0" hangingPunct="1">
+              <a:lnSpc>
+                <a:spcPct val="90000"/>
+              </a:lnSpc>
+              <a:spcBef>
+                <a:spcPts val="500"/>
+              </a:spcBef>
+              <a:buFont typeface="Arial" panose="020B0604020202020204" pitchFamily="34" charset="0"/>
+              <a:buNone/>
+              <a:defRPr sz="2000" kern="1200">
+                <a:solidFill>
+                  <a:schemeClr val="tx1"/>
+                </a:solidFill>
+                <a:latin typeface="+mn-lt"/>
+                <a:ea typeface="+mn-ea"/>
+                <a:cs typeface="+mn-cs"/>
+              </a:defRPr>
+            </a:lvl2pPr>
+            <a:lvl3pPr marL="914400" indent="0" algn="ctr" defTabSz="914400" rtl="0" eaLnBrk="1" latinLnBrk="0" hangingPunct="1">
+              <a:lnSpc>
+                <a:spcPct val="90000"/>
+              </a:lnSpc>
+              <a:spcBef>
+                <a:spcPts val="500"/>
+              </a:spcBef>
+              <a:buFont typeface="Arial" panose="020B0604020202020204" pitchFamily="34" charset="0"/>
+              <a:buNone/>
+              <a:defRPr sz="1800" kern="1200">
+                <a:solidFill>
+                  <a:schemeClr val="tx1"/>
+                </a:solidFill>
+                <a:latin typeface="+mn-lt"/>
+                <a:ea typeface="+mn-ea"/>
+                <a:cs typeface="+mn-cs"/>
+              </a:defRPr>
+            </a:lvl3pPr>
+            <a:lvl4pPr marL="1371600" indent="0" algn="ctr" defTabSz="914400" rtl="0" eaLnBrk="1" latinLnBrk="0" hangingPunct="1">
+              <a:lnSpc>
+                <a:spcPct val="90000"/>
+              </a:lnSpc>
+              <a:spcBef>
+                <a:spcPts val="500"/>
+              </a:spcBef>
+              <a:buFont typeface="Arial" panose="020B0604020202020204" pitchFamily="34" charset="0"/>
+              <a:buNone/>
+              <a:defRPr sz="1600" kern="1200">
+                <a:solidFill>
+                  <a:schemeClr val="tx1"/>
+                </a:solidFill>
+                <a:latin typeface="+mn-lt"/>
+                <a:ea typeface="+mn-ea"/>
+                <a:cs typeface="+mn-cs"/>
+              </a:defRPr>
+            </a:lvl4pPr>
+            <a:lvl5pPr marL="1828800" indent="0" algn="ctr" defTabSz="914400" rtl="0" eaLnBrk="1" latinLnBrk="0" hangingPunct="1">
+              <a:lnSpc>
+                <a:spcPct val="90000"/>
+              </a:lnSpc>
+              <a:spcBef>
+                <a:spcPts val="500"/>
+              </a:spcBef>
+              <a:buFont typeface="Arial" panose="020B0604020202020204" pitchFamily="34" charset="0"/>
+              <a:buNone/>
+              <a:defRPr sz="1600" kern="1200">
+                <a:solidFill>
+                  <a:schemeClr val="tx1"/>
+                </a:solidFill>
+                <a:latin typeface="+mn-lt"/>
+                <a:ea typeface="+mn-ea"/>
+                <a:cs typeface="+mn-cs"/>
+              </a:defRPr>
+            </a:lvl5pPr>
+            <a:lvl6pPr marL="2286000" indent="0" algn="ctr" defTabSz="914400" rtl="0" eaLnBrk="1" latinLnBrk="0" hangingPunct="1">
+              <a:lnSpc>
+                <a:spcPct val="90000"/>
+              </a:lnSpc>
+              <a:spcBef>
+                <a:spcPts val="500"/>
+              </a:spcBef>
+              <a:buFont typeface="Arial" panose="020B0604020202020204" pitchFamily="34" charset="0"/>
+              <a:buNone/>
+              <a:defRPr sz="1600" kern="1200">
+                <a:solidFill>
+                  <a:schemeClr val="tx1"/>
+                </a:solidFill>
+                <a:latin typeface="+mn-lt"/>
+                <a:ea typeface="+mn-ea"/>
+                <a:cs typeface="+mn-cs"/>
+              </a:defRPr>
+            </a:lvl6pPr>
+            <a:lvl7pPr marL="2743200" indent="0" algn="ctr" defTabSz="914400" rtl="0" eaLnBrk="1" latinLnBrk="0" hangingPunct="1">
+              <a:lnSpc>
+                <a:spcPct val="90000"/>
+              </a:lnSpc>
+              <a:spcBef>
+                <a:spcPts val="500"/>
+              </a:spcBef>
+              <a:buFont typeface="Arial" panose="020B0604020202020204" pitchFamily="34" charset="0"/>
+              <a:buNone/>
+              <a:defRPr sz="1600" kern="1200">
+                <a:solidFill>
+                  <a:schemeClr val="tx1"/>
+                </a:solidFill>
+                <a:latin typeface="+mn-lt"/>
+                <a:ea typeface="+mn-ea"/>
+                <a:cs typeface="+mn-cs"/>
+              </a:defRPr>
+            </a:lvl7pPr>
+            <a:lvl8pPr marL="3200400" indent="0" algn="ctr" defTabSz="914400" rtl="0" eaLnBrk="1" latinLnBrk="0" hangingPunct="1">
+              <a:lnSpc>
+                <a:spcPct val="90000"/>
+              </a:lnSpc>
+              <a:spcBef>
+                <a:spcPts val="500"/>
+              </a:spcBef>
+              <a:buFont typeface="Arial" panose="020B0604020202020204" pitchFamily="34" charset="0"/>
+              <a:buNone/>
+              <a:defRPr sz="1600" kern="1200">
+                <a:solidFill>
+                  <a:schemeClr val="tx1"/>
+                </a:solidFill>
+                <a:latin typeface="+mn-lt"/>
+                <a:ea typeface="+mn-ea"/>
+                <a:cs typeface="+mn-cs"/>
+              </a:defRPr>
+            </a:lvl8pPr>
+            <a:lvl9pPr marL="3657600" indent="0" algn="ctr" defTabSz="914400" rtl="0" eaLnBrk="1" latinLnBrk="0" hangingPunct="1">
+              <a:lnSpc>
+                <a:spcPct val="90000"/>
+              </a:lnSpc>
+              <a:spcBef>
+                <a:spcPts val="500"/>
+              </a:spcBef>
+              <a:buFont typeface="Arial" panose="020B0604020202020204" pitchFamily="34" charset="0"/>
+              <a:buNone/>
+              <a:defRPr sz="1600" kern="1200">
+                <a:solidFill>
+                  <a:schemeClr val="tx1"/>
+                </a:solidFill>
+                <a:latin typeface="+mn-lt"/>
+                <a:ea typeface="+mn-ea"/>
+                <a:cs typeface="+mn-cs"/>
+              </a:defRPr>
+            </a:lvl9pPr>
+          </a:lstStyle>
+          <a:p>
+            <a:r>
+              <a:rPr lang="hu-HU" sz="1600" b="1" dirty="0">
+                <a:latin typeface="Times New Roman" panose="02020603050405020304" pitchFamily="18" charset="0"/>
+                <a:cs typeface="Times New Roman" panose="02020603050405020304" pitchFamily="18" charset="0"/>
+              </a:rPr>
+              <a:t>Bozó Attila Péter</a:t>
+            </a:r>
+          </a:p>
+        </p:txBody>
+      </p:sp>
+      <p:pic>
+        <p:nvPicPr>
+          <p:cNvPr id="6" name="Kép 5">
+            <a:extLst>
+              <a:ext uri="{FF2B5EF4-FFF2-40B4-BE49-F238E27FC236}">
+                <a16:creationId xmlns:a16="http://schemas.microsoft.com/office/drawing/2014/main" id="{0EA2C2C0-7CB5-4EDA-A1C1-20F14502A99B}"/>
+              </a:ext>
+            </a:extLst>
+          </p:cNvPr>
+          <p:cNvPicPr>
+            <a:picLocks noChangeAspect="1"/>
+          </p:cNvPicPr>
+          <p:nvPr/>
+        </p:nvPicPr>
+        <p:blipFill>
+          <a:blip r:embed="rId2">
+            <a:extLst>
+              <a:ext uri="{BEBA8EAE-BF5A-486C-A8C5-ECC9F3942E4B}">
+                <a14:imgProps xmlns:a14="http://schemas.microsoft.com/office/drawing/2010/main">
+                  <a14:imgLayer r:embed="rId3">
+                    <a14:imgEffect>
+                      <a14:saturation sat="0"/>
+                    </a14:imgEffect>
+                    <a14:imgEffect>
+                      <a14:brightnessContrast contrast="100000"/>
+                    </a14:imgEffect>
+                  </a14:imgLayer>
+                </a14:imgProps>
+              </a:ext>
+              <a:ext uri="{28A0092B-C50C-407E-A947-70E740481C1C}">
+                <a14:useLocalDpi xmlns:a14="http://schemas.microsoft.com/office/drawing/2010/main" val="0"/>
+              </a:ext>
+            </a:extLst>
+          </a:blip>
+          <a:stretch>
+            <a:fillRect/>
+          </a:stretch>
+        </p:blipFill>
+        <p:spPr>
+          <a:xfrm>
+            <a:off x="4915578" y="93837"/>
+            <a:ext cx="2360840" cy="2022884"/>
+          </a:xfrm>
+          <a:prstGeom prst="rect">
+            <a:avLst/>
+          </a:prstGeom>
+        </p:spPr>
+      </p:pic>
+      <p:sp>
+        <p:nvSpPr>
+          <p:cNvPr id="8" name="Téglalap: lekerekített 7">
+            <a:extLst>
+              <a:ext uri="{FF2B5EF4-FFF2-40B4-BE49-F238E27FC236}">
+                <a16:creationId xmlns:a16="http://schemas.microsoft.com/office/drawing/2014/main" id="{BC87AA45-369F-4D7A-826E-FE393A058A28}"/>
+              </a:ext>
+            </a:extLst>
+          </p:cNvPr>
+          <p:cNvSpPr/>
+          <p:nvPr/>
+        </p:nvSpPr>
+        <p:spPr>
+          <a:xfrm rot="5400000">
+            <a:off x="15123720" y="-25811"/>
+            <a:ext cx="1628039" cy="6073974"/>
+          </a:xfrm>
+          <a:prstGeom prst="roundRect">
+            <a:avLst>
+              <a:gd name="adj" fmla="val 50000"/>
+            </a:avLst>
+          </a:prstGeom>
+          <a:gradFill flip="none" rotWithShape="1">
+            <a:gsLst>
+              <a:gs pos="0">
+                <a:schemeClr val="bg1">
+                  <a:shade val="30000"/>
+                  <a:satMod val="115000"/>
+                </a:schemeClr>
+              </a:gs>
+              <a:gs pos="50000">
+                <a:schemeClr val="bg1">
+                  <a:shade val="67500"/>
+                  <a:satMod val="115000"/>
+                </a:schemeClr>
+              </a:gs>
+              <a:gs pos="100000">
+                <a:schemeClr val="bg1">
+                  <a:shade val="100000"/>
+                  <a:satMod val="115000"/>
+                </a:schemeClr>
+              </a:gs>
+            </a:gsLst>
+            <a:lin ang="5400000" scaled="1"/>
+            <a:tileRect/>
+          </a:gradFill>
+          <a:ln>
+            <a:solidFill>
+              <a:schemeClr val="bg1"/>
+            </a:solidFill>
+          </a:ln>
+          <a:effectLst>
+            <a:innerShdw blurRad="114300">
+              <a:prstClr val="black"/>
+            </a:innerShdw>
+          </a:effectLst>
+        </p:spPr>
+        <p:style>
+          <a:lnRef idx="2">
+            <a:schemeClr val="accent1">
+              <a:shade val="50000"/>
+            </a:schemeClr>
+          </a:lnRef>
+          <a:fillRef idx="1">
+            <a:schemeClr val="accent1"/>
+          </a:fillRef>
+          <a:effectRef idx="0">
+            <a:schemeClr val="accent1"/>
+          </a:effectRef>
+          <a:fontRef idx="minor">
+            <a:schemeClr val="lt1"/>
+          </a:fontRef>
+        </p:style>
+        <p:txBody>
+          <a:bodyPr rot="0" spcFirstLastPara="0" vertOverflow="overflow" horzOverflow="overflow" vert="horz" wrap="square" lIns="91440" tIns="45720" rIns="91440" bIns="45720" numCol="1" spcCol="0" rtlCol="0" fromWordArt="0" anchor="ctr" anchorCtr="0" forceAA="0" compatLnSpc="1">
+            <a:prstTxWarp prst="textNoShape">
+              <a:avLst/>
+            </a:prstTxWarp>
+            <a:noAutofit/>
+          </a:bodyPr>
+          <a:lstStyle/>
+          <a:p>
+            <a:pPr algn="ctr"/>
+            <a:endParaRPr lang="hu-HU"/>
+          </a:p>
+        </p:txBody>
+      </p:sp>
+      <p:sp>
+        <p:nvSpPr>
+          <p:cNvPr id="21" name="Téglalap: lekerekített 20">
+            <a:extLst>
+              <a:ext uri="{FF2B5EF4-FFF2-40B4-BE49-F238E27FC236}">
+                <a16:creationId xmlns:a16="http://schemas.microsoft.com/office/drawing/2014/main" id="{D891EC16-3552-4FE1-AED1-E497DBF2C12B}"/>
+              </a:ext>
+            </a:extLst>
+          </p:cNvPr>
+          <p:cNvSpPr/>
+          <p:nvPr/>
+        </p:nvSpPr>
+        <p:spPr>
+          <a:xfrm rot="10800000">
+            <a:off x="5281977" y="7318423"/>
+            <a:ext cx="1628039" cy="6073974"/>
+          </a:xfrm>
+          <a:prstGeom prst="roundRect">
+            <a:avLst>
+              <a:gd name="adj" fmla="val 50000"/>
+            </a:avLst>
+          </a:prstGeom>
+          <a:gradFill flip="none" rotWithShape="1">
+            <a:gsLst>
+              <a:gs pos="0">
+                <a:schemeClr val="bg1">
+                  <a:shade val="30000"/>
+                  <a:satMod val="115000"/>
+                </a:schemeClr>
+              </a:gs>
+              <a:gs pos="50000">
+                <a:schemeClr val="bg1">
+                  <a:shade val="67500"/>
+                  <a:satMod val="115000"/>
+                </a:schemeClr>
+              </a:gs>
+              <a:gs pos="100000">
+                <a:schemeClr val="bg1">
+                  <a:shade val="100000"/>
+                  <a:satMod val="115000"/>
+                </a:schemeClr>
+              </a:gs>
+            </a:gsLst>
+            <a:lin ang="5400000" scaled="1"/>
+            <a:tileRect/>
+          </a:gradFill>
+          <a:ln>
+            <a:solidFill>
+              <a:schemeClr val="bg1"/>
+            </a:solidFill>
+          </a:ln>
+          <a:effectLst>
+            <a:innerShdw blurRad="114300">
+              <a:prstClr val="black"/>
+            </a:innerShdw>
+          </a:effectLst>
+        </p:spPr>
+        <p:style>
+          <a:lnRef idx="2">
+            <a:schemeClr val="accent1">
+              <a:shade val="50000"/>
+            </a:schemeClr>
+          </a:lnRef>
+          <a:fillRef idx="1">
+            <a:schemeClr val="accent1"/>
+          </a:fillRef>
+          <a:effectRef idx="0">
+            <a:schemeClr val="accent1"/>
+          </a:effectRef>
+          <a:fontRef idx="minor">
+            <a:schemeClr val="lt1"/>
+          </a:fontRef>
+        </p:style>
+        <p:txBody>
+          <a:bodyPr rot="0" spcFirstLastPara="0" vertOverflow="overflow" horzOverflow="overflow" vert="horz" wrap="square" lIns="91440" tIns="45720" rIns="91440" bIns="45720" numCol="1" spcCol="0" rtlCol="0" fromWordArt="0" anchor="ctr" anchorCtr="0" forceAA="0" compatLnSpc="1">
+            <a:prstTxWarp prst="textNoShape">
+              <a:avLst/>
+            </a:prstTxWarp>
+            <a:noAutofit/>
+          </a:bodyPr>
+          <a:lstStyle/>
+          <a:p>
+            <a:pPr algn="ctr"/>
+            <a:endParaRPr lang="hu-HU"/>
+          </a:p>
+        </p:txBody>
+      </p:sp>
+      <p:pic>
+        <p:nvPicPr>
+          <p:cNvPr id="1026" name="Picture 2" descr="Eclipse Mosquitto | projects.eclipse.org">
+            <a:extLst>
+              <a:ext uri="{FF2B5EF4-FFF2-40B4-BE49-F238E27FC236}">
+                <a16:creationId xmlns:a16="http://schemas.microsoft.com/office/drawing/2014/main" id="{E5FE1074-9572-4166-BA16-F8873A23BFF9}"/>
+              </a:ext>
+            </a:extLst>
+          </p:cNvPr>
+          <p:cNvPicPr>
+            <a:picLocks noChangeAspect="1" noChangeArrowheads="1"/>
+          </p:cNvPicPr>
+          <p:nvPr/>
+        </p:nvPicPr>
+        <p:blipFill>
+          <a:blip r:embed="rId4">
+            <a:extLst>
+              <a:ext uri="{BEBA8EAE-BF5A-486C-A8C5-ECC9F3942E4B}">
+                <a14:imgProps xmlns:a14="http://schemas.microsoft.com/office/drawing/2010/main">
+                  <a14:imgLayer r:embed="rId5">
+                    <a14:imgEffect>
+                      <a14:brightnessContrast bright="-100000"/>
+                    </a14:imgEffect>
+                  </a14:imgLayer>
+                </a14:imgProps>
+              </a:ext>
+              <a:ext uri="{28A0092B-C50C-407E-A947-70E740481C1C}">
+                <a14:useLocalDpi xmlns:a14="http://schemas.microsoft.com/office/drawing/2010/main" val="0"/>
+              </a:ext>
+            </a:extLst>
+          </a:blip>
+          <a:srcRect/>
+          <a:stretch>
+            <a:fillRect/>
+          </a:stretch>
+        </p:blipFill>
+        <p:spPr bwMode="auto">
+          <a:xfrm>
+            <a:off x="-2822863" y="696814"/>
+            <a:ext cx="1441530" cy="1419907"/>
+          </a:xfrm>
+          <a:prstGeom prst="rect">
+            <a:avLst/>
+          </a:prstGeom>
+          <a:noFill/>
+          <a:extLst>
+            <a:ext uri="{909E8E84-426E-40DD-AFC4-6F175D3DCCD1}">
+              <a14:hiddenFill xmlns:a14="http://schemas.microsoft.com/office/drawing/2010/main">
+                <a:solidFill>
+                  <a:srgbClr val="FFFFFF"/>
+                </a:solidFill>
+              </a14:hiddenFill>
+            </a:ext>
+          </a:extLst>
+        </p:spPr>
+      </p:pic>
+      <p:pic>
+        <p:nvPicPr>
+          <p:cNvPr id="1028" name="Picture 4" descr="HiveMQ Reviews 2026: Details, Pricing, &amp; Features | G2">
+            <a:extLst>
+              <a:ext uri="{FF2B5EF4-FFF2-40B4-BE49-F238E27FC236}">
+                <a16:creationId xmlns:a16="http://schemas.microsoft.com/office/drawing/2014/main" id="{03063086-1D8B-4095-9848-6F0586C75FAB}"/>
+              </a:ext>
+            </a:extLst>
+          </p:cNvPr>
+          <p:cNvPicPr>
+            <a:picLocks noChangeAspect="1" noChangeArrowheads="1"/>
+          </p:cNvPicPr>
+          <p:nvPr/>
+        </p:nvPicPr>
+        <p:blipFill rotWithShape="1">
+          <a:blip r:embed="rId6">
+            <a:extLst>
+              <a:ext uri="{BEBA8EAE-BF5A-486C-A8C5-ECC9F3942E4B}">
+                <a14:imgProps xmlns:a14="http://schemas.microsoft.com/office/drawing/2010/main">
+                  <a14:imgLayer r:embed="rId7">
+                    <a14:imgEffect>
+                      <a14:saturation sat="0"/>
+                    </a14:imgEffect>
+                    <a14:imgEffect>
+                      <a14:brightnessContrast contrast="100000"/>
+                    </a14:imgEffect>
+                  </a14:imgLayer>
+                </a14:imgProps>
+              </a:ext>
+              <a:ext uri="{28A0092B-C50C-407E-A947-70E740481C1C}">
+                <a14:useLocalDpi xmlns:a14="http://schemas.microsoft.com/office/drawing/2010/main" val="0"/>
+              </a:ext>
+            </a:extLst>
+          </a:blip>
+          <a:srcRect l="22083" r="21556"/>
+          <a:stretch/>
+        </p:blipFill>
+        <p:spPr bwMode="auto">
+          <a:xfrm>
+            <a:off x="-3135122" y="2718112"/>
+            <a:ext cx="1526351" cy="1421775"/>
+          </a:xfrm>
+          <a:prstGeom prst="rect">
+            <a:avLst/>
+          </a:prstGeom>
+          <a:noFill/>
+          <a:extLst>
+            <a:ext uri="{909E8E84-426E-40DD-AFC4-6F175D3DCCD1}">
+              <a14:hiddenFill xmlns:a14="http://schemas.microsoft.com/office/drawing/2010/main">
+                <a:solidFill>
+                  <a:srgbClr val="FFFFFF"/>
+                </a:solidFill>
+              </a14:hiddenFill>
+            </a:ext>
+          </a:extLst>
+        </p:spPr>
+      </p:pic>
+      <p:pic>
+        <p:nvPicPr>
+          <p:cNvPr id="1030" name="Picture 6" descr="Cosmos">
+            <a:extLst>
+              <a:ext uri="{FF2B5EF4-FFF2-40B4-BE49-F238E27FC236}">
+                <a16:creationId xmlns:a16="http://schemas.microsoft.com/office/drawing/2014/main" id="{5BB01DAE-2019-4CA8-A258-E94C543093D9}"/>
+              </a:ext>
+            </a:extLst>
+          </p:cNvPr>
+          <p:cNvPicPr>
+            <a:picLocks noChangeAspect="1" noChangeArrowheads="1"/>
+          </p:cNvPicPr>
+          <p:nvPr/>
+        </p:nvPicPr>
+        <p:blipFill>
+          <a:blip r:embed="rId8">
+            <a:extLst>
+              <a:ext uri="{BEBA8EAE-BF5A-486C-A8C5-ECC9F3942E4B}">
+                <a14:imgProps xmlns:a14="http://schemas.microsoft.com/office/drawing/2010/main">
+                  <a14:imgLayer r:embed="rId9">
+                    <a14:imgEffect>
+                      <a14:brightnessContrast bright="-100000"/>
+                    </a14:imgEffect>
+                  </a14:imgLayer>
+                </a14:imgProps>
+              </a:ext>
+              <a:ext uri="{28A0092B-C50C-407E-A947-70E740481C1C}">
+                <a14:useLocalDpi xmlns:a14="http://schemas.microsoft.com/office/drawing/2010/main" val="0"/>
+              </a:ext>
+            </a:extLst>
+          </a:blip>
+          <a:srcRect/>
+          <a:stretch>
+            <a:fillRect/>
+          </a:stretch>
+        </p:blipFill>
+        <p:spPr bwMode="auto">
+          <a:xfrm>
+            <a:off x="-2184606" y="4488306"/>
+            <a:ext cx="1606547" cy="1606547"/>
+          </a:xfrm>
+          <a:prstGeom prst="rect">
+            <a:avLst/>
+          </a:prstGeom>
+          <a:noFill/>
+          <a:extLst>
+            <a:ext uri="{909E8E84-426E-40DD-AFC4-6F175D3DCCD1}">
+              <a14:hiddenFill xmlns:a14="http://schemas.microsoft.com/office/drawing/2010/main">
+                <a:solidFill>
+                  <a:srgbClr val="FFFFFF"/>
+                </a:solidFill>
+              </a14:hiddenFill>
+            </a:ext>
+          </a:extLst>
+        </p:spPr>
+      </p:pic>
+      <p:pic>
+        <p:nvPicPr>
+          <p:cNvPr id="12" name="Kép 11">
+            <a:extLst>
+              <a:ext uri="{FF2B5EF4-FFF2-40B4-BE49-F238E27FC236}">
+                <a16:creationId xmlns:a16="http://schemas.microsoft.com/office/drawing/2014/main" id="{86CC4F45-9100-407C-BAAE-F2D9699030F1}"/>
+              </a:ext>
+            </a:extLst>
+          </p:cNvPr>
+          <p:cNvPicPr>
+            <a:picLocks noChangeAspect="1"/>
+          </p:cNvPicPr>
+          <p:nvPr/>
+        </p:nvPicPr>
+        <p:blipFill>
+          <a:blip r:embed="rId10">
+            <a:extLst>
+              <a:ext uri="{BEBA8EAE-BF5A-486C-A8C5-ECC9F3942E4B}">
+                <a14:imgProps xmlns:a14="http://schemas.microsoft.com/office/drawing/2010/main">
+                  <a14:imgLayer r:embed="rId11">
+                    <a14:imgEffect>
+                      <a14:sharpenSoften amount="-25000"/>
+                    </a14:imgEffect>
+                    <a14:imgEffect>
+                      <a14:saturation sat="0"/>
+                    </a14:imgEffect>
+                    <a14:imgEffect>
+                      <a14:brightnessContrast bright="21000"/>
+                    </a14:imgEffect>
+                  </a14:imgLayer>
+                </a14:imgProps>
+              </a:ext>
+            </a:extLst>
+          </a:blip>
+          <a:stretch>
+            <a:fillRect/>
+          </a:stretch>
+        </p:blipFill>
+        <p:spPr>
+          <a:xfrm rot="18550612">
+            <a:off x="12365864" y="2440431"/>
+            <a:ext cx="7143750" cy="4095750"/>
+          </a:xfrm>
+          <a:prstGeom prst="rect">
+            <a:avLst/>
+          </a:prstGeom>
+          <a:effectLst>
+            <a:softEdge rad="1104900"/>
+          </a:effectLst>
+        </p:spPr>
+      </p:pic>
+      <p:pic>
+        <p:nvPicPr>
+          <p:cNvPr id="4100" name="Picture 4" descr="Inside Machine: Over 30,437 Royalty-Free Licensable Stock Illustrations &amp;  Drawings | Shutterstock">
+            <a:extLst>
+              <a:ext uri="{FF2B5EF4-FFF2-40B4-BE49-F238E27FC236}">
+                <a16:creationId xmlns:a16="http://schemas.microsoft.com/office/drawing/2014/main" id="{1295F18D-0875-4577-8FBE-57695C27B1F3}"/>
+              </a:ext>
+            </a:extLst>
+          </p:cNvPr>
+          <p:cNvPicPr>
+            <a:picLocks noChangeAspect="1" noChangeArrowheads="1"/>
+          </p:cNvPicPr>
+          <p:nvPr/>
+        </p:nvPicPr>
+        <p:blipFill rotWithShape="1">
+          <a:blip r:embed="rId12">
+            <a:extLst>
+              <a:ext uri="{BEBA8EAE-BF5A-486C-A8C5-ECC9F3942E4B}">
+                <a14:imgProps xmlns:a14="http://schemas.microsoft.com/office/drawing/2010/main">
+                  <a14:imgLayer r:embed="rId13">
+                    <a14:imgEffect>
+                      <a14:sharpenSoften amount="-40000"/>
+                    </a14:imgEffect>
+                    <a14:imgEffect>
+                      <a14:saturation sat="0"/>
+                    </a14:imgEffect>
+                    <a14:imgEffect>
+                      <a14:brightnessContrast bright="49000" contrast="-64000"/>
+                    </a14:imgEffect>
+                  </a14:imgLayer>
+                </a14:imgProps>
+              </a:ext>
+              <a:ext uri="{28A0092B-C50C-407E-A947-70E740481C1C}">
+                <a14:useLocalDpi xmlns:a14="http://schemas.microsoft.com/office/drawing/2010/main" val="0"/>
+              </a:ext>
+            </a:extLst>
+          </a:blip>
+          <a:srcRect b="10281"/>
+          <a:stretch/>
+        </p:blipFill>
+        <p:spPr bwMode="auto">
+          <a:xfrm rot="5400000">
+            <a:off x="11340839" y="1677544"/>
+            <a:ext cx="6595502" cy="3502911"/>
+          </a:xfrm>
+          <a:prstGeom prst="rect">
+            <a:avLst/>
+          </a:prstGeom>
+          <a:noFill/>
+          <a:effectLst>
+            <a:softEdge rad="1270000"/>
+          </a:effectLst>
+          <a:extLst>
+            <a:ext uri="{909E8E84-426E-40DD-AFC4-6F175D3DCCD1}">
+              <a14:hiddenFill xmlns:a14="http://schemas.microsoft.com/office/drawing/2010/main">
+                <a:solidFill>
+                  <a:srgbClr val="FFFFFF"/>
+                </a:solidFill>
+              </a14:hiddenFill>
+            </a:ext>
+          </a:extLst>
+        </p:spPr>
+      </p:pic>
+      <p:pic>
+        <p:nvPicPr>
+          <p:cNvPr id="5122" name="Picture 2" descr="5,071 Thank You Hands Stock Photos - Free &amp; Royalty-Free Stock Photos from  Dreamstime">
+            <a:extLst>
+              <a:ext uri="{FF2B5EF4-FFF2-40B4-BE49-F238E27FC236}">
+                <a16:creationId xmlns:a16="http://schemas.microsoft.com/office/drawing/2014/main" id="{0E94CF5D-9469-4F27-9B2B-1B01743767FD}"/>
+              </a:ext>
+            </a:extLst>
+          </p:cNvPr>
+          <p:cNvPicPr>
+            <a:picLocks noChangeAspect="1" noChangeArrowheads="1"/>
+          </p:cNvPicPr>
+          <p:nvPr/>
+        </p:nvPicPr>
+        <p:blipFill>
+          <a:blip r:embed="rId14">
+            <a:extLst>
+              <a:ext uri="{BEBA8EAE-BF5A-486C-A8C5-ECC9F3942E4B}">
+                <a14:imgProps xmlns:a14="http://schemas.microsoft.com/office/drawing/2010/main">
+                  <a14:imgLayer r:embed="rId15">
+                    <a14:imgEffect>
+                      <a14:sharpenSoften amount="-37000"/>
+                    </a14:imgEffect>
+                    <a14:imgEffect>
+                      <a14:saturation sat="0"/>
+                    </a14:imgEffect>
+                    <a14:imgEffect>
+                      <a14:brightnessContrast bright="23000" contrast="35000"/>
+                    </a14:imgEffect>
+                  </a14:imgLayer>
+                </a14:imgProps>
+              </a:ext>
+              <a:ext uri="{28A0092B-C50C-407E-A947-70E740481C1C}">
+                <a14:useLocalDpi xmlns:a14="http://schemas.microsoft.com/office/drawing/2010/main" val="0"/>
+              </a:ext>
+            </a:extLst>
+          </a:blip>
+          <a:srcRect/>
+          <a:stretch>
+            <a:fillRect/>
+          </a:stretch>
+        </p:blipFill>
+        <p:spPr bwMode="auto">
+          <a:xfrm>
+            <a:off x="2926435" y="1105279"/>
+            <a:ext cx="6339122" cy="3862337"/>
+          </a:xfrm>
+          <a:prstGeom prst="rect">
+            <a:avLst/>
+          </a:prstGeom>
+          <a:noFill/>
+          <a:effectLst>
+            <a:softEdge rad="1270000"/>
+          </a:effectLst>
+          <a:extLst>
+            <a:ext uri="{909E8E84-426E-40DD-AFC4-6F175D3DCCD1}">
+              <a14:hiddenFill xmlns:a14="http://schemas.microsoft.com/office/drawing/2010/main">
+                <a:solidFill>
+                  <a:srgbClr val="FFFFFF"/>
+                </a:solidFill>
+              </a14:hiddenFill>
+            </a:ext>
+          </a:extLst>
+        </p:spPr>
+      </p:pic>
+    </p:spTree>
+    <p:extLst>
+      <p:ext uri="{BB962C8B-B14F-4D97-AF65-F5344CB8AC3E}">
+        <p14:creationId xmlns:p14="http://schemas.microsoft.com/office/powerpoint/2010/main" val="561951970"/>
       </p:ext>
     </p:extLst>
   </p:cSld>
